--- a/report/MSDS692 Practicum I Craig Rudman.pptx
+++ b/report/MSDS692 Practicum I Craig Rudman.pptx
@@ -1,8 +1,8 @@
 
 <file path=ppt/presentation.xml><?xml version="1.0" encoding="utf-8"?>
-<p:presentation xmlns:a="http://schemas.openxmlformats.org/drawingml/2006/main" xmlns:r="http://schemas.openxmlformats.org/officeDocument/2006/relationships" xmlns:p="http://schemas.openxmlformats.org/presentationml/2006/main" saveSubsetFonts="1" autoCompressPictures="0">
+<p:presentation xmlns:a="http://schemas.openxmlformats.org/drawingml/2006/main" xmlns:r="http://schemas.openxmlformats.org/officeDocument/2006/relationships" xmlns:p="http://schemas.openxmlformats.org/presentationml/2006/main" showSpecialPlsOnTitleSld="0" saveSubsetFonts="1" autoCompressPictures="0">
   <p:sldMasterIdLst>
-    <p:sldMasterId id="2147483648" r:id="rId1"/>
+    <p:sldMasterId id="2147483650" r:id="rId1"/>
   </p:sldMasterIdLst>
   <p:notesMasterIdLst>
     <p:notesMasterId r:id="rId17"/>
@@ -1532,7 +1532,633 @@
 </file>
 
 <file path=ppt/slideLayouts/slideLayout1.xml><?xml version="1.0" encoding="utf-8"?>
-<p:sldLayout xmlns:a="http://schemas.openxmlformats.org/drawingml/2006/main" xmlns:r="http://schemas.openxmlformats.org/officeDocument/2006/relationships" xmlns:p="http://schemas.openxmlformats.org/presentationml/2006/main" preserve="1">
+<p:sldLayout xmlns:a="http://schemas.openxmlformats.org/drawingml/2006/main" xmlns:r="http://schemas.openxmlformats.org/officeDocument/2006/relationships" xmlns:p="http://schemas.openxmlformats.org/presentationml/2006/main" type="title" preserve="1">
+  <p:cSld name="Title Slide">
+    <p:spTree>
+      <p:nvGrpSpPr>
+        <p:cNvPr id="1" name=""/>
+        <p:cNvGrpSpPr/>
+        <p:nvPr/>
+      </p:nvGrpSpPr>
+      <p:grpSpPr>
+        <a:xfrm>
+          <a:off x="0" y="0"/>
+          <a:ext cx="0" cy="0"/>
+          <a:chOff x="0" y="0"/>
+          <a:chExt cx="0" cy="0"/>
+        </a:xfrm>
+      </p:grpSpPr>
+      <p:sp>
+        <p:nvSpPr>
+          <p:cNvPr id="2" name="Title 1">
+            <a:extLst>
+              <a:ext uri="{FF2B5EF4-FFF2-40B4-BE49-F238E27FC236}">
+                <a16:creationId xmlns:a16="http://schemas.microsoft.com/office/drawing/2014/main" id="{20560D38-3EA7-98B9-6752-39E8F948BA15}"/>
+              </a:ext>
+            </a:extLst>
+          </p:cNvPr>
+          <p:cNvSpPr>
+            <a:spLocks noGrp="1"/>
+          </p:cNvSpPr>
+          <p:nvPr>
+            <p:ph type="ctrTitle"/>
+          </p:nvPr>
+        </p:nvSpPr>
+        <p:spPr>
+          <a:xfrm>
+            <a:off x="1143000" y="841375"/>
+            <a:ext cx="6858000" cy="1790700"/>
+          </a:xfrm>
+        </p:spPr>
+        <p:txBody>
+          <a:bodyPr anchor="b"/>
+          <a:lstStyle>
+            <a:lvl1pPr algn="ctr">
+              <a:defRPr sz="6000"/>
+            </a:lvl1pPr>
+          </a:lstStyle>
+          <a:p>
+            <a:r>
+              <a:rPr lang="en-US"/>
+              <a:t>Click to edit Master title style</a:t>
+            </a:r>
+          </a:p>
+        </p:txBody>
+      </p:sp>
+      <p:sp>
+        <p:nvSpPr>
+          <p:cNvPr id="3" name="Subtitle 2">
+            <a:extLst>
+              <a:ext uri="{FF2B5EF4-FFF2-40B4-BE49-F238E27FC236}">
+                <a16:creationId xmlns:a16="http://schemas.microsoft.com/office/drawing/2014/main" id="{F33D5B60-1D52-DBBF-9E62-D4CE0D535C6B}"/>
+              </a:ext>
+            </a:extLst>
+          </p:cNvPr>
+          <p:cNvSpPr>
+            <a:spLocks noGrp="1"/>
+          </p:cNvSpPr>
+          <p:nvPr>
+            <p:ph type="subTitle" idx="1"/>
+          </p:nvPr>
+        </p:nvSpPr>
+        <p:spPr>
+          <a:xfrm>
+            <a:off x="1143000" y="2701925"/>
+            <a:ext cx="6858000" cy="1241425"/>
+          </a:xfrm>
+        </p:spPr>
+        <p:txBody>
+          <a:bodyPr/>
+          <a:lstStyle>
+            <a:lvl1pPr marL="0" indent="0" algn="ctr">
+              <a:buNone/>
+              <a:defRPr sz="2400"/>
+            </a:lvl1pPr>
+            <a:lvl2pPr marL="457200" indent="0" algn="ctr">
+              <a:buNone/>
+              <a:defRPr sz="2000"/>
+            </a:lvl2pPr>
+            <a:lvl3pPr marL="914400" indent="0" algn="ctr">
+              <a:buNone/>
+              <a:defRPr sz="1800"/>
+            </a:lvl3pPr>
+            <a:lvl4pPr marL="1371600" indent="0" algn="ctr">
+              <a:buNone/>
+              <a:defRPr sz="1600"/>
+            </a:lvl4pPr>
+            <a:lvl5pPr marL="1828800" indent="0" algn="ctr">
+              <a:buNone/>
+              <a:defRPr sz="1600"/>
+            </a:lvl5pPr>
+            <a:lvl6pPr marL="2286000" indent="0" algn="ctr">
+              <a:buNone/>
+              <a:defRPr sz="1600"/>
+            </a:lvl6pPr>
+            <a:lvl7pPr marL="2743200" indent="0" algn="ctr">
+              <a:buNone/>
+              <a:defRPr sz="1600"/>
+            </a:lvl7pPr>
+            <a:lvl8pPr marL="3200400" indent="0" algn="ctr">
+              <a:buNone/>
+              <a:defRPr sz="1600"/>
+            </a:lvl8pPr>
+            <a:lvl9pPr marL="3657600" indent="0" algn="ctr">
+              <a:buNone/>
+              <a:defRPr sz="1600"/>
+            </a:lvl9pPr>
+          </a:lstStyle>
+          <a:p>
+            <a:r>
+              <a:rPr lang="en-US"/>
+              <a:t>Click to edit Master subtitle style</a:t>
+            </a:r>
+          </a:p>
+        </p:txBody>
+      </p:sp>
+      <p:sp>
+        <p:nvSpPr>
+          <p:cNvPr id="4" name="Date Placeholder 3">
+            <a:extLst>
+              <a:ext uri="{FF2B5EF4-FFF2-40B4-BE49-F238E27FC236}">
+                <a16:creationId xmlns:a16="http://schemas.microsoft.com/office/drawing/2014/main" id="{7C5FAE75-962B-DCE4-38F6-45478F04A04A}"/>
+              </a:ext>
+            </a:extLst>
+          </p:cNvPr>
+          <p:cNvSpPr>
+            <a:spLocks noGrp="1"/>
+          </p:cNvSpPr>
+          <p:nvPr>
+            <p:ph type="dt" sz="half" idx="10"/>
+          </p:nvPr>
+        </p:nvSpPr>
+        <p:spPr/>
+        <p:txBody>
+          <a:bodyPr/>
+          <a:lstStyle/>
+          <a:p>
+            <a:fld id="{517C7DB4-066D-E64F-AACA-70882CED0933}" type="datetime1">
+              <a:rPr lang="en-US" smtClean="0"/>
+              <a:t>6/21/26</a:t>
+            </a:fld>
+            <a:endParaRPr lang="en-US"/>
+          </a:p>
+        </p:txBody>
+      </p:sp>
+      <p:sp>
+        <p:nvSpPr>
+          <p:cNvPr id="5" name="Footer Placeholder 4">
+            <a:extLst>
+              <a:ext uri="{FF2B5EF4-FFF2-40B4-BE49-F238E27FC236}">
+                <a16:creationId xmlns:a16="http://schemas.microsoft.com/office/drawing/2014/main" id="{18C606AC-D49B-9AB1-B8E4-99B470F94133}"/>
+              </a:ext>
+            </a:extLst>
+          </p:cNvPr>
+          <p:cNvSpPr>
+            <a:spLocks noGrp="1"/>
+          </p:cNvSpPr>
+          <p:nvPr>
+            <p:ph type="ftr" sz="quarter" idx="11"/>
+          </p:nvPr>
+        </p:nvSpPr>
+        <p:spPr/>
+        <p:txBody>
+          <a:bodyPr/>
+          <a:lstStyle/>
+          <a:p>
+            <a:endParaRPr lang="en-US"/>
+          </a:p>
+        </p:txBody>
+      </p:sp>
+      <p:sp>
+        <p:nvSpPr>
+          <p:cNvPr id="6" name="Slide Number Placeholder 5">
+            <a:extLst>
+              <a:ext uri="{FF2B5EF4-FFF2-40B4-BE49-F238E27FC236}">
+                <a16:creationId xmlns:a16="http://schemas.microsoft.com/office/drawing/2014/main" id="{B1BDE6E5-2875-DB33-BFD0-BC9163DE5B64}"/>
+              </a:ext>
+            </a:extLst>
+          </p:cNvPr>
+          <p:cNvSpPr>
+            <a:spLocks noGrp="1"/>
+          </p:cNvSpPr>
+          <p:nvPr>
+            <p:ph type="sldNum" sz="quarter" idx="12"/>
+          </p:nvPr>
+        </p:nvSpPr>
+        <p:spPr/>
+        <p:txBody>
+          <a:bodyPr/>
+          <a:lstStyle/>
+          <a:p>
+            <a:fld id="{59854499-FE6F-F146-B363-A2BB07F446CC}" type="slidenum">
+              <a:rPr lang="en-US" smtClean="0"/>
+              <a:t>‹#›</a:t>
+            </a:fld>
+            <a:endParaRPr lang="en-US"/>
+          </a:p>
+        </p:txBody>
+      </p:sp>
+    </p:spTree>
+    <p:extLst>
+      <p:ext uri="{BB962C8B-B14F-4D97-AF65-F5344CB8AC3E}">
+        <p14:creationId xmlns:p14="http://schemas.microsoft.com/office/powerpoint/2010/main" val="1809941376"/>
+      </p:ext>
+    </p:extLst>
+  </p:cSld>
+  <p:clrMapOvr>
+    <a:masterClrMapping/>
+  </p:clrMapOvr>
+</p:sldLayout>
+</file>
+
+<file path=ppt/slideLayouts/slideLayout10.xml><?xml version="1.0" encoding="utf-8"?>
+<p:sldLayout xmlns:a="http://schemas.openxmlformats.org/drawingml/2006/main" xmlns:r="http://schemas.openxmlformats.org/officeDocument/2006/relationships" xmlns:p="http://schemas.openxmlformats.org/presentationml/2006/main" type="vertTx" preserve="1">
+  <p:cSld name="Title and Vertical Text">
+    <p:spTree>
+      <p:nvGrpSpPr>
+        <p:cNvPr id="1" name=""/>
+        <p:cNvGrpSpPr/>
+        <p:nvPr/>
+      </p:nvGrpSpPr>
+      <p:grpSpPr>
+        <a:xfrm>
+          <a:off x="0" y="0"/>
+          <a:ext cx="0" cy="0"/>
+          <a:chOff x="0" y="0"/>
+          <a:chExt cx="0" cy="0"/>
+        </a:xfrm>
+      </p:grpSpPr>
+      <p:sp>
+        <p:nvSpPr>
+          <p:cNvPr id="2" name="Title 1">
+            <a:extLst>
+              <a:ext uri="{FF2B5EF4-FFF2-40B4-BE49-F238E27FC236}">
+                <a16:creationId xmlns:a16="http://schemas.microsoft.com/office/drawing/2014/main" id="{493A65A2-F21E-A725-CE48-AF5F0D47E032}"/>
+              </a:ext>
+            </a:extLst>
+          </p:cNvPr>
+          <p:cNvSpPr>
+            <a:spLocks noGrp="1"/>
+          </p:cNvSpPr>
+          <p:nvPr>
+            <p:ph type="title"/>
+          </p:nvPr>
+        </p:nvSpPr>
+        <p:spPr/>
+        <p:txBody>
+          <a:bodyPr/>
+          <a:lstStyle/>
+          <a:p>
+            <a:r>
+              <a:rPr lang="en-US"/>
+              <a:t>Click to edit Master title style</a:t>
+            </a:r>
+          </a:p>
+        </p:txBody>
+      </p:sp>
+      <p:sp>
+        <p:nvSpPr>
+          <p:cNvPr id="3" name="Vertical Text Placeholder 2">
+            <a:extLst>
+              <a:ext uri="{FF2B5EF4-FFF2-40B4-BE49-F238E27FC236}">
+                <a16:creationId xmlns:a16="http://schemas.microsoft.com/office/drawing/2014/main" id="{EFE6CA01-1592-AC93-4E69-B04B88A454F3}"/>
+              </a:ext>
+            </a:extLst>
+          </p:cNvPr>
+          <p:cNvSpPr>
+            <a:spLocks noGrp="1"/>
+          </p:cNvSpPr>
+          <p:nvPr>
+            <p:ph type="body" orient="vert" idx="1"/>
+          </p:nvPr>
+        </p:nvSpPr>
+        <p:spPr/>
+        <p:txBody>
+          <a:bodyPr vert="eaVert"/>
+          <a:lstStyle/>
+          <a:p>
+            <a:pPr lvl="0"/>
+            <a:r>
+              <a:rPr lang="en-US"/>
+              <a:t>Click to edit Master text styles</a:t>
+            </a:r>
+          </a:p>
+          <a:p>
+            <a:pPr lvl="1"/>
+            <a:r>
+              <a:rPr lang="en-US"/>
+              <a:t>Second level</a:t>
+            </a:r>
+          </a:p>
+          <a:p>
+            <a:pPr lvl="2"/>
+            <a:r>
+              <a:rPr lang="en-US"/>
+              <a:t>Third level</a:t>
+            </a:r>
+          </a:p>
+          <a:p>
+            <a:pPr lvl="3"/>
+            <a:r>
+              <a:rPr lang="en-US"/>
+              <a:t>Fourth level</a:t>
+            </a:r>
+          </a:p>
+          <a:p>
+            <a:pPr lvl="4"/>
+            <a:r>
+              <a:rPr lang="en-US"/>
+              <a:t>Fifth level</a:t>
+            </a:r>
+          </a:p>
+        </p:txBody>
+      </p:sp>
+      <p:sp>
+        <p:nvSpPr>
+          <p:cNvPr id="4" name="Date Placeholder 3">
+            <a:extLst>
+              <a:ext uri="{FF2B5EF4-FFF2-40B4-BE49-F238E27FC236}">
+                <a16:creationId xmlns:a16="http://schemas.microsoft.com/office/drawing/2014/main" id="{7F78E460-826E-7DF3-AAF6-F309E289ADB1}"/>
+              </a:ext>
+            </a:extLst>
+          </p:cNvPr>
+          <p:cNvSpPr>
+            <a:spLocks noGrp="1"/>
+          </p:cNvSpPr>
+          <p:nvPr>
+            <p:ph type="dt" sz="half" idx="10"/>
+          </p:nvPr>
+        </p:nvSpPr>
+        <p:spPr/>
+        <p:txBody>
+          <a:bodyPr/>
+          <a:lstStyle/>
+          <a:p>
+            <a:fld id="{3740829C-690F-7F48-93B0-64293CACC2E5}" type="datetime1">
+              <a:rPr lang="en-US" smtClean="0"/>
+              <a:t>6/21/26</a:t>
+            </a:fld>
+            <a:endParaRPr lang="en-US"/>
+          </a:p>
+        </p:txBody>
+      </p:sp>
+      <p:sp>
+        <p:nvSpPr>
+          <p:cNvPr id="5" name="Footer Placeholder 4">
+            <a:extLst>
+              <a:ext uri="{FF2B5EF4-FFF2-40B4-BE49-F238E27FC236}">
+                <a16:creationId xmlns:a16="http://schemas.microsoft.com/office/drawing/2014/main" id="{465B847D-0191-4102-BA23-A1B42E2AE13E}"/>
+              </a:ext>
+            </a:extLst>
+          </p:cNvPr>
+          <p:cNvSpPr>
+            <a:spLocks noGrp="1"/>
+          </p:cNvSpPr>
+          <p:nvPr>
+            <p:ph type="ftr" sz="quarter" idx="11"/>
+          </p:nvPr>
+        </p:nvSpPr>
+        <p:spPr/>
+        <p:txBody>
+          <a:bodyPr/>
+          <a:lstStyle/>
+          <a:p>
+            <a:endParaRPr lang="en-US"/>
+          </a:p>
+        </p:txBody>
+      </p:sp>
+      <p:sp>
+        <p:nvSpPr>
+          <p:cNvPr id="6" name="Slide Number Placeholder 5">
+            <a:extLst>
+              <a:ext uri="{FF2B5EF4-FFF2-40B4-BE49-F238E27FC236}">
+                <a16:creationId xmlns:a16="http://schemas.microsoft.com/office/drawing/2014/main" id="{D421EE2F-3E1C-3A80-1C46-8EB1E7F3D095}"/>
+              </a:ext>
+            </a:extLst>
+          </p:cNvPr>
+          <p:cNvSpPr>
+            <a:spLocks noGrp="1"/>
+          </p:cNvSpPr>
+          <p:nvPr>
+            <p:ph type="sldNum" sz="quarter" idx="12"/>
+          </p:nvPr>
+        </p:nvSpPr>
+        <p:spPr/>
+        <p:txBody>
+          <a:bodyPr/>
+          <a:lstStyle/>
+          <a:p>
+            <a:fld id="{59854499-FE6F-F146-B363-A2BB07F446CC}" type="slidenum">
+              <a:rPr lang="en-US" smtClean="0"/>
+              <a:t>‹#›</a:t>
+            </a:fld>
+            <a:endParaRPr lang="en-US"/>
+          </a:p>
+        </p:txBody>
+      </p:sp>
+    </p:spTree>
+    <p:extLst>
+      <p:ext uri="{BB962C8B-B14F-4D97-AF65-F5344CB8AC3E}">
+        <p14:creationId xmlns:p14="http://schemas.microsoft.com/office/powerpoint/2010/main" val="478303803"/>
+      </p:ext>
+    </p:extLst>
+  </p:cSld>
+  <p:clrMapOvr>
+    <a:masterClrMapping/>
+  </p:clrMapOvr>
+</p:sldLayout>
+</file>
+
+<file path=ppt/slideLayouts/slideLayout11.xml><?xml version="1.0" encoding="utf-8"?>
+<p:sldLayout xmlns:a="http://schemas.openxmlformats.org/drawingml/2006/main" xmlns:r="http://schemas.openxmlformats.org/officeDocument/2006/relationships" xmlns:p="http://schemas.openxmlformats.org/presentationml/2006/main" type="vertTitleAndTx" preserve="1">
+  <p:cSld name="Vertical Title and Text">
+    <p:spTree>
+      <p:nvGrpSpPr>
+        <p:cNvPr id="1" name=""/>
+        <p:cNvGrpSpPr/>
+        <p:nvPr/>
+      </p:nvGrpSpPr>
+      <p:grpSpPr>
+        <a:xfrm>
+          <a:off x="0" y="0"/>
+          <a:ext cx="0" cy="0"/>
+          <a:chOff x="0" y="0"/>
+          <a:chExt cx="0" cy="0"/>
+        </a:xfrm>
+      </p:grpSpPr>
+      <p:sp>
+        <p:nvSpPr>
+          <p:cNvPr id="2" name="Vertical Title 1">
+            <a:extLst>
+              <a:ext uri="{FF2B5EF4-FFF2-40B4-BE49-F238E27FC236}">
+                <a16:creationId xmlns:a16="http://schemas.microsoft.com/office/drawing/2014/main" id="{CCF2424E-FC25-4F58-F5E9-152C60994B39}"/>
+              </a:ext>
+            </a:extLst>
+          </p:cNvPr>
+          <p:cNvSpPr>
+            <a:spLocks noGrp="1"/>
+          </p:cNvSpPr>
+          <p:nvPr>
+            <p:ph type="title" orient="vert"/>
+          </p:nvPr>
+        </p:nvSpPr>
+        <p:spPr>
+          <a:xfrm>
+            <a:off x="6543675" y="274638"/>
+            <a:ext cx="1971675" cy="4357687"/>
+          </a:xfrm>
+        </p:spPr>
+        <p:txBody>
+          <a:bodyPr vert="eaVert"/>
+          <a:lstStyle/>
+          <a:p>
+            <a:r>
+              <a:rPr lang="en-US"/>
+              <a:t>Click to edit Master title style</a:t>
+            </a:r>
+          </a:p>
+        </p:txBody>
+      </p:sp>
+      <p:sp>
+        <p:nvSpPr>
+          <p:cNvPr id="3" name="Vertical Text Placeholder 2">
+            <a:extLst>
+              <a:ext uri="{FF2B5EF4-FFF2-40B4-BE49-F238E27FC236}">
+                <a16:creationId xmlns:a16="http://schemas.microsoft.com/office/drawing/2014/main" id="{1C814530-EB62-36C1-FCD5-B9AA2B7A7E51}"/>
+              </a:ext>
+            </a:extLst>
+          </p:cNvPr>
+          <p:cNvSpPr>
+            <a:spLocks noGrp="1"/>
+          </p:cNvSpPr>
+          <p:nvPr>
+            <p:ph type="body" orient="vert" idx="1"/>
+          </p:nvPr>
+        </p:nvSpPr>
+        <p:spPr>
+          <a:xfrm>
+            <a:off x="628650" y="274638"/>
+            <a:ext cx="5762625" cy="4357687"/>
+          </a:xfrm>
+        </p:spPr>
+        <p:txBody>
+          <a:bodyPr vert="eaVert"/>
+          <a:lstStyle/>
+          <a:p>
+            <a:pPr lvl="0"/>
+            <a:r>
+              <a:rPr lang="en-US"/>
+              <a:t>Click to edit Master text styles</a:t>
+            </a:r>
+          </a:p>
+          <a:p>
+            <a:pPr lvl="1"/>
+            <a:r>
+              <a:rPr lang="en-US"/>
+              <a:t>Second level</a:t>
+            </a:r>
+          </a:p>
+          <a:p>
+            <a:pPr lvl="2"/>
+            <a:r>
+              <a:rPr lang="en-US"/>
+              <a:t>Third level</a:t>
+            </a:r>
+          </a:p>
+          <a:p>
+            <a:pPr lvl="3"/>
+            <a:r>
+              <a:rPr lang="en-US"/>
+              <a:t>Fourth level</a:t>
+            </a:r>
+          </a:p>
+          <a:p>
+            <a:pPr lvl="4"/>
+            <a:r>
+              <a:rPr lang="en-US"/>
+              <a:t>Fifth level</a:t>
+            </a:r>
+          </a:p>
+        </p:txBody>
+      </p:sp>
+      <p:sp>
+        <p:nvSpPr>
+          <p:cNvPr id="4" name="Date Placeholder 3">
+            <a:extLst>
+              <a:ext uri="{FF2B5EF4-FFF2-40B4-BE49-F238E27FC236}">
+                <a16:creationId xmlns:a16="http://schemas.microsoft.com/office/drawing/2014/main" id="{0949C5CC-0217-E227-0AB6-80BC06881165}"/>
+              </a:ext>
+            </a:extLst>
+          </p:cNvPr>
+          <p:cNvSpPr>
+            <a:spLocks noGrp="1"/>
+          </p:cNvSpPr>
+          <p:nvPr>
+            <p:ph type="dt" sz="half" idx="10"/>
+          </p:nvPr>
+        </p:nvSpPr>
+        <p:spPr/>
+        <p:txBody>
+          <a:bodyPr/>
+          <a:lstStyle/>
+          <a:p>
+            <a:fld id="{5DCF8C41-E7C7-6B48-B051-772FB5200599}" type="datetime1">
+              <a:rPr lang="en-US" smtClean="0"/>
+              <a:t>6/21/26</a:t>
+            </a:fld>
+            <a:endParaRPr lang="en-US"/>
+          </a:p>
+        </p:txBody>
+      </p:sp>
+      <p:sp>
+        <p:nvSpPr>
+          <p:cNvPr id="5" name="Footer Placeholder 4">
+            <a:extLst>
+              <a:ext uri="{FF2B5EF4-FFF2-40B4-BE49-F238E27FC236}">
+                <a16:creationId xmlns:a16="http://schemas.microsoft.com/office/drawing/2014/main" id="{5DC42A52-ACC5-5394-7A64-3B0893D28D8C}"/>
+              </a:ext>
+            </a:extLst>
+          </p:cNvPr>
+          <p:cNvSpPr>
+            <a:spLocks noGrp="1"/>
+          </p:cNvSpPr>
+          <p:nvPr>
+            <p:ph type="ftr" sz="quarter" idx="11"/>
+          </p:nvPr>
+        </p:nvSpPr>
+        <p:spPr/>
+        <p:txBody>
+          <a:bodyPr/>
+          <a:lstStyle/>
+          <a:p>
+            <a:endParaRPr lang="en-US"/>
+          </a:p>
+        </p:txBody>
+      </p:sp>
+      <p:sp>
+        <p:nvSpPr>
+          <p:cNvPr id="6" name="Slide Number Placeholder 5">
+            <a:extLst>
+              <a:ext uri="{FF2B5EF4-FFF2-40B4-BE49-F238E27FC236}">
+                <a16:creationId xmlns:a16="http://schemas.microsoft.com/office/drawing/2014/main" id="{ED356201-D4EA-3F5A-1A04-388B7F9B5A33}"/>
+              </a:ext>
+            </a:extLst>
+          </p:cNvPr>
+          <p:cNvSpPr>
+            <a:spLocks noGrp="1"/>
+          </p:cNvSpPr>
+          <p:nvPr>
+            <p:ph type="sldNum" sz="quarter" idx="12"/>
+          </p:nvPr>
+        </p:nvSpPr>
+        <p:spPr/>
+        <p:txBody>
+          <a:bodyPr/>
+          <a:lstStyle/>
+          <a:p>
+            <a:fld id="{59854499-FE6F-F146-B363-A2BB07F446CC}" type="slidenum">
+              <a:rPr lang="en-US" smtClean="0"/>
+              <a:t>‹#›</a:t>
+            </a:fld>
+            <a:endParaRPr lang="en-US"/>
+          </a:p>
+        </p:txBody>
+      </p:sp>
+    </p:spTree>
+    <p:extLst>
+      <p:ext uri="{BB962C8B-B14F-4D97-AF65-F5344CB8AC3E}">
+        <p14:creationId xmlns:p14="http://schemas.microsoft.com/office/powerpoint/2010/main" val="39406998"/>
+      </p:ext>
+    </p:extLst>
+  </p:cSld>
+  <p:clrMapOvr>
+    <a:masterClrMapping/>
+  </p:clrMapOvr>
+</p:sldLayout>
+</file>
+
+<file path=ppt/slideLayouts/slideLayout12.xml><?xml version="1.0" encoding="utf-8"?>
+<p:sldLayout xmlns:a="http://schemas.openxmlformats.org/drawingml/2006/main" xmlns:r="http://schemas.openxmlformats.org/officeDocument/2006/relationships" xmlns:p="http://schemas.openxmlformats.org/presentationml/2006/main">
   <p:cSld name="DEFAULT">
     <p:bg>
       <p:bgRef idx="1001">
@@ -1554,6 +2180,2014 @@
         </a:xfrm>
       </p:grpSpPr>
     </p:spTree>
+    <p:extLst>
+      <p:ext uri="{BB962C8B-B14F-4D97-AF65-F5344CB8AC3E}">
+        <p14:creationId xmlns:p14="http://schemas.microsoft.com/office/powerpoint/2010/main" val="2763641251"/>
+      </p:ext>
+    </p:extLst>
+  </p:cSld>
+  <p:clrMapOvr>
+    <a:masterClrMapping/>
+  </p:clrMapOvr>
+</p:sldLayout>
+</file>
+
+<file path=ppt/slideLayouts/slideLayout2.xml><?xml version="1.0" encoding="utf-8"?>
+<p:sldLayout xmlns:a="http://schemas.openxmlformats.org/drawingml/2006/main" xmlns:r="http://schemas.openxmlformats.org/officeDocument/2006/relationships" xmlns:p="http://schemas.openxmlformats.org/presentationml/2006/main" type="obj" preserve="1">
+  <p:cSld name="Title and Content">
+    <p:spTree>
+      <p:nvGrpSpPr>
+        <p:cNvPr id="1" name=""/>
+        <p:cNvGrpSpPr/>
+        <p:nvPr/>
+      </p:nvGrpSpPr>
+      <p:grpSpPr>
+        <a:xfrm>
+          <a:off x="0" y="0"/>
+          <a:ext cx="0" cy="0"/>
+          <a:chOff x="0" y="0"/>
+          <a:chExt cx="0" cy="0"/>
+        </a:xfrm>
+      </p:grpSpPr>
+      <p:sp>
+        <p:nvSpPr>
+          <p:cNvPr id="2" name="Title 1">
+            <a:extLst>
+              <a:ext uri="{FF2B5EF4-FFF2-40B4-BE49-F238E27FC236}">
+                <a16:creationId xmlns:a16="http://schemas.microsoft.com/office/drawing/2014/main" id="{F3DC3B34-AA92-733B-28D0-5462CE4813FB}"/>
+              </a:ext>
+            </a:extLst>
+          </p:cNvPr>
+          <p:cNvSpPr>
+            <a:spLocks noGrp="1"/>
+          </p:cNvSpPr>
+          <p:nvPr>
+            <p:ph type="title"/>
+          </p:nvPr>
+        </p:nvSpPr>
+        <p:spPr/>
+        <p:txBody>
+          <a:bodyPr/>
+          <a:lstStyle/>
+          <a:p>
+            <a:r>
+              <a:rPr lang="en-US"/>
+              <a:t>Click to edit Master title style</a:t>
+            </a:r>
+          </a:p>
+        </p:txBody>
+      </p:sp>
+      <p:sp>
+        <p:nvSpPr>
+          <p:cNvPr id="3" name="Content Placeholder 2">
+            <a:extLst>
+              <a:ext uri="{FF2B5EF4-FFF2-40B4-BE49-F238E27FC236}">
+                <a16:creationId xmlns:a16="http://schemas.microsoft.com/office/drawing/2014/main" id="{A4BF2908-225E-434E-7606-28C0F12C9844}"/>
+              </a:ext>
+            </a:extLst>
+          </p:cNvPr>
+          <p:cNvSpPr>
+            <a:spLocks noGrp="1"/>
+          </p:cNvSpPr>
+          <p:nvPr>
+            <p:ph idx="1"/>
+          </p:nvPr>
+        </p:nvSpPr>
+        <p:spPr/>
+        <p:txBody>
+          <a:bodyPr/>
+          <a:lstStyle/>
+          <a:p>
+            <a:pPr lvl="0"/>
+            <a:r>
+              <a:rPr lang="en-US"/>
+              <a:t>Click to edit Master text styles</a:t>
+            </a:r>
+          </a:p>
+          <a:p>
+            <a:pPr lvl="1"/>
+            <a:r>
+              <a:rPr lang="en-US"/>
+              <a:t>Second level</a:t>
+            </a:r>
+          </a:p>
+          <a:p>
+            <a:pPr lvl="2"/>
+            <a:r>
+              <a:rPr lang="en-US"/>
+              <a:t>Third level</a:t>
+            </a:r>
+          </a:p>
+          <a:p>
+            <a:pPr lvl="3"/>
+            <a:r>
+              <a:rPr lang="en-US"/>
+              <a:t>Fourth level</a:t>
+            </a:r>
+          </a:p>
+          <a:p>
+            <a:pPr lvl="4"/>
+            <a:r>
+              <a:rPr lang="en-US"/>
+              <a:t>Fifth level</a:t>
+            </a:r>
+          </a:p>
+        </p:txBody>
+      </p:sp>
+      <p:sp>
+        <p:nvSpPr>
+          <p:cNvPr id="4" name="Date Placeholder 3">
+            <a:extLst>
+              <a:ext uri="{FF2B5EF4-FFF2-40B4-BE49-F238E27FC236}">
+                <a16:creationId xmlns:a16="http://schemas.microsoft.com/office/drawing/2014/main" id="{934A63CE-5C82-E060-AB93-64EE83E2F501}"/>
+              </a:ext>
+            </a:extLst>
+          </p:cNvPr>
+          <p:cNvSpPr>
+            <a:spLocks noGrp="1"/>
+          </p:cNvSpPr>
+          <p:nvPr>
+            <p:ph type="dt" sz="half" idx="10"/>
+          </p:nvPr>
+        </p:nvSpPr>
+        <p:spPr/>
+        <p:txBody>
+          <a:bodyPr/>
+          <a:lstStyle/>
+          <a:p>
+            <a:fld id="{A07D40B0-4BD1-E545-A9DD-31DC06D86CE5}" type="datetime1">
+              <a:rPr lang="en-US" smtClean="0"/>
+              <a:t>6/21/26</a:t>
+            </a:fld>
+            <a:endParaRPr lang="en-US"/>
+          </a:p>
+        </p:txBody>
+      </p:sp>
+      <p:sp>
+        <p:nvSpPr>
+          <p:cNvPr id="5" name="Footer Placeholder 4">
+            <a:extLst>
+              <a:ext uri="{FF2B5EF4-FFF2-40B4-BE49-F238E27FC236}">
+                <a16:creationId xmlns:a16="http://schemas.microsoft.com/office/drawing/2014/main" id="{D420FFB3-DA93-AA0E-B3CC-250A3682847B}"/>
+              </a:ext>
+            </a:extLst>
+          </p:cNvPr>
+          <p:cNvSpPr>
+            <a:spLocks noGrp="1"/>
+          </p:cNvSpPr>
+          <p:nvPr>
+            <p:ph type="ftr" sz="quarter" idx="11"/>
+          </p:nvPr>
+        </p:nvSpPr>
+        <p:spPr/>
+        <p:txBody>
+          <a:bodyPr/>
+          <a:lstStyle/>
+          <a:p>
+            <a:endParaRPr lang="en-US"/>
+          </a:p>
+        </p:txBody>
+      </p:sp>
+      <p:sp>
+        <p:nvSpPr>
+          <p:cNvPr id="6" name="Slide Number Placeholder 5">
+            <a:extLst>
+              <a:ext uri="{FF2B5EF4-FFF2-40B4-BE49-F238E27FC236}">
+                <a16:creationId xmlns:a16="http://schemas.microsoft.com/office/drawing/2014/main" id="{5D84C1CA-5CA8-2D4D-CA7B-B6091CCE44B8}"/>
+              </a:ext>
+            </a:extLst>
+          </p:cNvPr>
+          <p:cNvSpPr>
+            <a:spLocks noGrp="1"/>
+          </p:cNvSpPr>
+          <p:nvPr>
+            <p:ph type="sldNum" sz="quarter" idx="12"/>
+          </p:nvPr>
+        </p:nvSpPr>
+        <p:spPr/>
+        <p:txBody>
+          <a:bodyPr/>
+          <a:lstStyle/>
+          <a:p>
+            <a:fld id="{59854499-FE6F-F146-B363-A2BB07F446CC}" type="slidenum">
+              <a:rPr lang="en-US" smtClean="0"/>
+              <a:t>‹#›</a:t>
+            </a:fld>
+            <a:endParaRPr lang="en-US"/>
+          </a:p>
+        </p:txBody>
+      </p:sp>
+    </p:spTree>
+    <p:extLst>
+      <p:ext uri="{BB962C8B-B14F-4D97-AF65-F5344CB8AC3E}">
+        <p14:creationId xmlns:p14="http://schemas.microsoft.com/office/powerpoint/2010/main" val="1784603390"/>
+      </p:ext>
+    </p:extLst>
+  </p:cSld>
+  <p:clrMapOvr>
+    <a:masterClrMapping/>
+  </p:clrMapOvr>
+</p:sldLayout>
+</file>
+
+<file path=ppt/slideLayouts/slideLayout3.xml><?xml version="1.0" encoding="utf-8"?>
+<p:sldLayout xmlns:a="http://schemas.openxmlformats.org/drawingml/2006/main" xmlns:r="http://schemas.openxmlformats.org/officeDocument/2006/relationships" xmlns:p="http://schemas.openxmlformats.org/presentationml/2006/main" type="secHead" preserve="1">
+  <p:cSld name="Section Header">
+    <p:spTree>
+      <p:nvGrpSpPr>
+        <p:cNvPr id="1" name=""/>
+        <p:cNvGrpSpPr/>
+        <p:nvPr/>
+      </p:nvGrpSpPr>
+      <p:grpSpPr>
+        <a:xfrm>
+          <a:off x="0" y="0"/>
+          <a:ext cx="0" cy="0"/>
+          <a:chOff x="0" y="0"/>
+          <a:chExt cx="0" cy="0"/>
+        </a:xfrm>
+      </p:grpSpPr>
+      <p:sp>
+        <p:nvSpPr>
+          <p:cNvPr id="2" name="Title 1">
+            <a:extLst>
+              <a:ext uri="{FF2B5EF4-FFF2-40B4-BE49-F238E27FC236}">
+                <a16:creationId xmlns:a16="http://schemas.microsoft.com/office/drawing/2014/main" id="{944C299D-15E7-020A-229B-77D7DAF25CBF}"/>
+              </a:ext>
+            </a:extLst>
+          </p:cNvPr>
+          <p:cNvSpPr>
+            <a:spLocks noGrp="1"/>
+          </p:cNvSpPr>
+          <p:nvPr>
+            <p:ph type="title"/>
+          </p:nvPr>
+        </p:nvSpPr>
+        <p:spPr>
+          <a:xfrm>
+            <a:off x="623888" y="1282700"/>
+            <a:ext cx="7886700" cy="2139950"/>
+          </a:xfrm>
+        </p:spPr>
+        <p:txBody>
+          <a:bodyPr anchor="b"/>
+          <a:lstStyle>
+            <a:lvl1pPr>
+              <a:defRPr sz="6000"/>
+            </a:lvl1pPr>
+          </a:lstStyle>
+          <a:p>
+            <a:r>
+              <a:rPr lang="en-US"/>
+              <a:t>Click to edit Master title style</a:t>
+            </a:r>
+          </a:p>
+        </p:txBody>
+      </p:sp>
+      <p:sp>
+        <p:nvSpPr>
+          <p:cNvPr id="3" name="Text Placeholder 2">
+            <a:extLst>
+              <a:ext uri="{FF2B5EF4-FFF2-40B4-BE49-F238E27FC236}">
+                <a16:creationId xmlns:a16="http://schemas.microsoft.com/office/drawing/2014/main" id="{8A2F0AB8-1935-80F4-CC3B-47B44FF42FED}"/>
+              </a:ext>
+            </a:extLst>
+          </p:cNvPr>
+          <p:cNvSpPr>
+            <a:spLocks noGrp="1"/>
+          </p:cNvSpPr>
+          <p:nvPr>
+            <p:ph type="body" idx="1"/>
+          </p:nvPr>
+        </p:nvSpPr>
+        <p:spPr>
+          <a:xfrm>
+            <a:off x="623888" y="3441700"/>
+            <a:ext cx="7886700" cy="1125538"/>
+          </a:xfrm>
+        </p:spPr>
+        <p:txBody>
+          <a:bodyPr/>
+          <a:lstStyle>
+            <a:lvl1pPr marL="0" indent="0">
+              <a:buNone/>
+              <a:defRPr sz="2400">
+                <a:solidFill>
+                  <a:schemeClr val="tx1">
+                    <a:tint val="82000"/>
+                  </a:schemeClr>
+                </a:solidFill>
+              </a:defRPr>
+            </a:lvl1pPr>
+            <a:lvl2pPr marL="457200" indent="0">
+              <a:buNone/>
+              <a:defRPr sz="2000">
+                <a:solidFill>
+                  <a:schemeClr val="tx1">
+                    <a:tint val="82000"/>
+                  </a:schemeClr>
+                </a:solidFill>
+              </a:defRPr>
+            </a:lvl2pPr>
+            <a:lvl3pPr marL="914400" indent="0">
+              <a:buNone/>
+              <a:defRPr sz="1800">
+                <a:solidFill>
+                  <a:schemeClr val="tx1">
+                    <a:tint val="82000"/>
+                  </a:schemeClr>
+                </a:solidFill>
+              </a:defRPr>
+            </a:lvl3pPr>
+            <a:lvl4pPr marL="1371600" indent="0">
+              <a:buNone/>
+              <a:defRPr sz="1600">
+                <a:solidFill>
+                  <a:schemeClr val="tx1">
+                    <a:tint val="82000"/>
+                  </a:schemeClr>
+                </a:solidFill>
+              </a:defRPr>
+            </a:lvl4pPr>
+            <a:lvl5pPr marL="1828800" indent="0">
+              <a:buNone/>
+              <a:defRPr sz="1600">
+                <a:solidFill>
+                  <a:schemeClr val="tx1">
+                    <a:tint val="82000"/>
+                  </a:schemeClr>
+                </a:solidFill>
+              </a:defRPr>
+            </a:lvl5pPr>
+            <a:lvl6pPr marL="2286000" indent="0">
+              <a:buNone/>
+              <a:defRPr sz="1600">
+                <a:solidFill>
+                  <a:schemeClr val="tx1">
+                    <a:tint val="82000"/>
+                  </a:schemeClr>
+                </a:solidFill>
+              </a:defRPr>
+            </a:lvl6pPr>
+            <a:lvl7pPr marL="2743200" indent="0">
+              <a:buNone/>
+              <a:defRPr sz="1600">
+                <a:solidFill>
+                  <a:schemeClr val="tx1">
+                    <a:tint val="82000"/>
+                  </a:schemeClr>
+                </a:solidFill>
+              </a:defRPr>
+            </a:lvl7pPr>
+            <a:lvl8pPr marL="3200400" indent="0">
+              <a:buNone/>
+              <a:defRPr sz="1600">
+                <a:solidFill>
+                  <a:schemeClr val="tx1">
+                    <a:tint val="82000"/>
+                  </a:schemeClr>
+                </a:solidFill>
+              </a:defRPr>
+            </a:lvl8pPr>
+            <a:lvl9pPr marL="3657600" indent="0">
+              <a:buNone/>
+              <a:defRPr sz="1600">
+                <a:solidFill>
+                  <a:schemeClr val="tx1">
+                    <a:tint val="82000"/>
+                  </a:schemeClr>
+                </a:solidFill>
+              </a:defRPr>
+            </a:lvl9pPr>
+          </a:lstStyle>
+          <a:p>
+            <a:pPr lvl="0"/>
+            <a:r>
+              <a:rPr lang="en-US"/>
+              <a:t>Click to edit Master text styles</a:t>
+            </a:r>
+          </a:p>
+        </p:txBody>
+      </p:sp>
+      <p:sp>
+        <p:nvSpPr>
+          <p:cNvPr id="4" name="Date Placeholder 3">
+            <a:extLst>
+              <a:ext uri="{FF2B5EF4-FFF2-40B4-BE49-F238E27FC236}">
+                <a16:creationId xmlns:a16="http://schemas.microsoft.com/office/drawing/2014/main" id="{74E084A1-26B1-2FB0-710E-283DDE542FED}"/>
+              </a:ext>
+            </a:extLst>
+          </p:cNvPr>
+          <p:cNvSpPr>
+            <a:spLocks noGrp="1"/>
+          </p:cNvSpPr>
+          <p:nvPr>
+            <p:ph type="dt" sz="half" idx="10"/>
+          </p:nvPr>
+        </p:nvSpPr>
+        <p:spPr/>
+        <p:txBody>
+          <a:bodyPr/>
+          <a:lstStyle/>
+          <a:p>
+            <a:fld id="{F99398D8-DFF5-1842-8EFB-7EA18E349DAD}" type="datetime1">
+              <a:rPr lang="en-US" smtClean="0"/>
+              <a:t>6/21/26</a:t>
+            </a:fld>
+            <a:endParaRPr lang="en-US"/>
+          </a:p>
+        </p:txBody>
+      </p:sp>
+      <p:sp>
+        <p:nvSpPr>
+          <p:cNvPr id="5" name="Footer Placeholder 4">
+            <a:extLst>
+              <a:ext uri="{FF2B5EF4-FFF2-40B4-BE49-F238E27FC236}">
+                <a16:creationId xmlns:a16="http://schemas.microsoft.com/office/drawing/2014/main" id="{4249C7EE-894A-949C-982E-A39C4212A472}"/>
+              </a:ext>
+            </a:extLst>
+          </p:cNvPr>
+          <p:cNvSpPr>
+            <a:spLocks noGrp="1"/>
+          </p:cNvSpPr>
+          <p:nvPr>
+            <p:ph type="ftr" sz="quarter" idx="11"/>
+          </p:nvPr>
+        </p:nvSpPr>
+        <p:spPr/>
+        <p:txBody>
+          <a:bodyPr/>
+          <a:lstStyle/>
+          <a:p>
+            <a:endParaRPr lang="en-US"/>
+          </a:p>
+        </p:txBody>
+      </p:sp>
+      <p:sp>
+        <p:nvSpPr>
+          <p:cNvPr id="6" name="Slide Number Placeholder 5">
+            <a:extLst>
+              <a:ext uri="{FF2B5EF4-FFF2-40B4-BE49-F238E27FC236}">
+                <a16:creationId xmlns:a16="http://schemas.microsoft.com/office/drawing/2014/main" id="{5048ACCB-18A3-52E8-D550-67F7C670AA83}"/>
+              </a:ext>
+            </a:extLst>
+          </p:cNvPr>
+          <p:cNvSpPr>
+            <a:spLocks noGrp="1"/>
+          </p:cNvSpPr>
+          <p:nvPr>
+            <p:ph type="sldNum" sz="quarter" idx="12"/>
+          </p:nvPr>
+        </p:nvSpPr>
+        <p:spPr/>
+        <p:txBody>
+          <a:bodyPr/>
+          <a:lstStyle/>
+          <a:p>
+            <a:fld id="{59854499-FE6F-F146-B363-A2BB07F446CC}" type="slidenum">
+              <a:rPr lang="en-US" smtClean="0"/>
+              <a:t>‹#›</a:t>
+            </a:fld>
+            <a:endParaRPr lang="en-US"/>
+          </a:p>
+        </p:txBody>
+      </p:sp>
+    </p:spTree>
+    <p:extLst>
+      <p:ext uri="{BB962C8B-B14F-4D97-AF65-F5344CB8AC3E}">
+        <p14:creationId xmlns:p14="http://schemas.microsoft.com/office/powerpoint/2010/main" val="3661367521"/>
+      </p:ext>
+    </p:extLst>
+  </p:cSld>
+  <p:clrMapOvr>
+    <a:masterClrMapping/>
+  </p:clrMapOvr>
+</p:sldLayout>
+</file>
+
+<file path=ppt/slideLayouts/slideLayout4.xml><?xml version="1.0" encoding="utf-8"?>
+<p:sldLayout xmlns:a="http://schemas.openxmlformats.org/drawingml/2006/main" xmlns:r="http://schemas.openxmlformats.org/officeDocument/2006/relationships" xmlns:p="http://schemas.openxmlformats.org/presentationml/2006/main" type="twoObj" preserve="1">
+  <p:cSld name="Two Content">
+    <p:spTree>
+      <p:nvGrpSpPr>
+        <p:cNvPr id="1" name=""/>
+        <p:cNvGrpSpPr/>
+        <p:nvPr/>
+      </p:nvGrpSpPr>
+      <p:grpSpPr>
+        <a:xfrm>
+          <a:off x="0" y="0"/>
+          <a:ext cx="0" cy="0"/>
+          <a:chOff x="0" y="0"/>
+          <a:chExt cx="0" cy="0"/>
+        </a:xfrm>
+      </p:grpSpPr>
+      <p:sp>
+        <p:nvSpPr>
+          <p:cNvPr id="2" name="Title 1">
+            <a:extLst>
+              <a:ext uri="{FF2B5EF4-FFF2-40B4-BE49-F238E27FC236}">
+                <a16:creationId xmlns:a16="http://schemas.microsoft.com/office/drawing/2014/main" id="{D59CFCC6-21E4-33E9-FF0C-1128F38F9177}"/>
+              </a:ext>
+            </a:extLst>
+          </p:cNvPr>
+          <p:cNvSpPr>
+            <a:spLocks noGrp="1"/>
+          </p:cNvSpPr>
+          <p:nvPr>
+            <p:ph type="title"/>
+          </p:nvPr>
+        </p:nvSpPr>
+        <p:spPr/>
+        <p:txBody>
+          <a:bodyPr/>
+          <a:lstStyle/>
+          <a:p>
+            <a:r>
+              <a:rPr lang="en-US"/>
+              <a:t>Click to edit Master title style</a:t>
+            </a:r>
+          </a:p>
+        </p:txBody>
+      </p:sp>
+      <p:sp>
+        <p:nvSpPr>
+          <p:cNvPr id="3" name="Content Placeholder 2">
+            <a:extLst>
+              <a:ext uri="{FF2B5EF4-FFF2-40B4-BE49-F238E27FC236}">
+                <a16:creationId xmlns:a16="http://schemas.microsoft.com/office/drawing/2014/main" id="{D3ED4E32-2309-058D-CFE0-9CE3B6626665}"/>
+              </a:ext>
+            </a:extLst>
+          </p:cNvPr>
+          <p:cNvSpPr>
+            <a:spLocks noGrp="1"/>
+          </p:cNvSpPr>
+          <p:nvPr>
+            <p:ph sz="half" idx="1"/>
+          </p:nvPr>
+        </p:nvSpPr>
+        <p:spPr>
+          <a:xfrm>
+            <a:off x="628650" y="1370013"/>
+            <a:ext cx="3867150" cy="3262312"/>
+          </a:xfrm>
+        </p:spPr>
+        <p:txBody>
+          <a:bodyPr/>
+          <a:lstStyle/>
+          <a:p>
+            <a:pPr lvl="0"/>
+            <a:r>
+              <a:rPr lang="en-US"/>
+              <a:t>Click to edit Master text styles</a:t>
+            </a:r>
+          </a:p>
+          <a:p>
+            <a:pPr lvl="1"/>
+            <a:r>
+              <a:rPr lang="en-US"/>
+              <a:t>Second level</a:t>
+            </a:r>
+          </a:p>
+          <a:p>
+            <a:pPr lvl="2"/>
+            <a:r>
+              <a:rPr lang="en-US"/>
+              <a:t>Third level</a:t>
+            </a:r>
+          </a:p>
+          <a:p>
+            <a:pPr lvl="3"/>
+            <a:r>
+              <a:rPr lang="en-US"/>
+              <a:t>Fourth level</a:t>
+            </a:r>
+          </a:p>
+          <a:p>
+            <a:pPr lvl="4"/>
+            <a:r>
+              <a:rPr lang="en-US"/>
+              <a:t>Fifth level</a:t>
+            </a:r>
+          </a:p>
+        </p:txBody>
+      </p:sp>
+      <p:sp>
+        <p:nvSpPr>
+          <p:cNvPr id="4" name="Content Placeholder 3">
+            <a:extLst>
+              <a:ext uri="{FF2B5EF4-FFF2-40B4-BE49-F238E27FC236}">
+                <a16:creationId xmlns:a16="http://schemas.microsoft.com/office/drawing/2014/main" id="{CDEDEC96-C247-2431-5567-D6849B9A9F6C}"/>
+              </a:ext>
+            </a:extLst>
+          </p:cNvPr>
+          <p:cNvSpPr>
+            <a:spLocks noGrp="1"/>
+          </p:cNvSpPr>
+          <p:nvPr>
+            <p:ph sz="half" idx="2"/>
+          </p:nvPr>
+        </p:nvSpPr>
+        <p:spPr>
+          <a:xfrm>
+            <a:off x="4648200" y="1370013"/>
+            <a:ext cx="3867150" cy="3262312"/>
+          </a:xfrm>
+        </p:spPr>
+        <p:txBody>
+          <a:bodyPr/>
+          <a:lstStyle/>
+          <a:p>
+            <a:pPr lvl="0"/>
+            <a:r>
+              <a:rPr lang="en-US"/>
+              <a:t>Click to edit Master text styles</a:t>
+            </a:r>
+          </a:p>
+          <a:p>
+            <a:pPr lvl="1"/>
+            <a:r>
+              <a:rPr lang="en-US"/>
+              <a:t>Second level</a:t>
+            </a:r>
+          </a:p>
+          <a:p>
+            <a:pPr lvl="2"/>
+            <a:r>
+              <a:rPr lang="en-US"/>
+              <a:t>Third level</a:t>
+            </a:r>
+          </a:p>
+          <a:p>
+            <a:pPr lvl="3"/>
+            <a:r>
+              <a:rPr lang="en-US"/>
+              <a:t>Fourth level</a:t>
+            </a:r>
+          </a:p>
+          <a:p>
+            <a:pPr lvl="4"/>
+            <a:r>
+              <a:rPr lang="en-US"/>
+              <a:t>Fifth level</a:t>
+            </a:r>
+          </a:p>
+        </p:txBody>
+      </p:sp>
+      <p:sp>
+        <p:nvSpPr>
+          <p:cNvPr id="5" name="Date Placeholder 4">
+            <a:extLst>
+              <a:ext uri="{FF2B5EF4-FFF2-40B4-BE49-F238E27FC236}">
+                <a16:creationId xmlns:a16="http://schemas.microsoft.com/office/drawing/2014/main" id="{A806B98C-8326-28AE-8DEC-C11F86C9810D}"/>
+              </a:ext>
+            </a:extLst>
+          </p:cNvPr>
+          <p:cNvSpPr>
+            <a:spLocks noGrp="1"/>
+          </p:cNvSpPr>
+          <p:nvPr>
+            <p:ph type="dt" sz="half" idx="10"/>
+          </p:nvPr>
+        </p:nvSpPr>
+        <p:spPr/>
+        <p:txBody>
+          <a:bodyPr/>
+          <a:lstStyle/>
+          <a:p>
+            <a:fld id="{6F6558AB-181D-2D4D-B92E-4D3FECF4962F}" type="datetime1">
+              <a:rPr lang="en-US" smtClean="0"/>
+              <a:t>6/21/26</a:t>
+            </a:fld>
+            <a:endParaRPr lang="en-US"/>
+          </a:p>
+        </p:txBody>
+      </p:sp>
+      <p:sp>
+        <p:nvSpPr>
+          <p:cNvPr id="6" name="Footer Placeholder 5">
+            <a:extLst>
+              <a:ext uri="{FF2B5EF4-FFF2-40B4-BE49-F238E27FC236}">
+                <a16:creationId xmlns:a16="http://schemas.microsoft.com/office/drawing/2014/main" id="{5AD48115-0391-2811-0C32-7B7C2D100110}"/>
+              </a:ext>
+            </a:extLst>
+          </p:cNvPr>
+          <p:cNvSpPr>
+            <a:spLocks noGrp="1"/>
+          </p:cNvSpPr>
+          <p:nvPr>
+            <p:ph type="ftr" sz="quarter" idx="11"/>
+          </p:nvPr>
+        </p:nvSpPr>
+        <p:spPr/>
+        <p:txBody>
+          <a:bodyPr/>
+          <a:lstStyle/>
+          <a:p>
+            <a:endParaRPr lang="en-US"/>
+          </a:p>
+        </p:txBody>
+      </p:sp>
+      <p:sp>
+        <p:nvSpPr>
+          <p:cNvPr id="7" name="Slide Number Placeholder 6">
+            <a:extLst>
+              <a:ext uri="{FF2B5EF4-FFF2-40B4-BE49-F238E27FC236}">
+                <a16:creationId xmlns:a16="http://schemas.microsoft.com/office/drawing/2014/main" id="{63963D82-8649-2C21-DE42-A2857126FF15}"/>
+              </a:ext>
+            </a:extLst>
+          </p:cNvPr>
+          <p:cNvSpPr>
+            <a:spLocks noGrp="1"/>
+          </p:cNvSpPr>
+          <p:nvPr>
+            <p:ph type="sldNum" sz="quarter" idx="12"/>
+          </p:nvPr>
+        </p:nvSpPr>
+        <p:spPr/>
+        <p:txBody>
+          <a:bodyPr/>
+          <a:lstStyle/>
+          <a:p>
+            <a:fld id="{59854499-FE6F-F146-B363-A2BB07F446CC}" type="slidenum">
+              <a:rPr lang="en-US" smtClean="0"/>
+              <a:t>‹#›</a:t>
+            </a:fld>
+            <a:endParaRPr lang="en-US"/>
+          </a:p>
+        </p:txBody>
+      </p:sp>
+    </p:spTree>
+    <p:extLst>
+      <p:ext uri="{BB962C8B-B14F-4D97-AF65-F5344CB8AC3E}">
+        <p14:creationId xmlns:p14="http://schemas.microsoft.com/office/powerpoint/2010/main" val="1038819896"/>
+      </p:ext>
+    </p:extLst>
+  </p:cSld>
+  <p:clrMapOvr>
+    <a:masterClrMapping/>
+  </p:clrMapOvr>
+</p:sldLayout>
+</file>
+
+<file path=ppt/slideLayouts/slideLayout5.xml><?xml version="1.0" encoding="utf-8"?>
+<p:sldLayout xmlns:a="http://schemas.openxmlformats.org/drawingml/2006/main" xmlns:r="http://schemas.openxmlformats.org/officeDocument/2006/relationships" xmlns:p="http://schemas.openxmlformats.org/presentationml/2006/main" type="twoTxTwoObj" preserve="1">
+  <p:cSld name="Comparison">
+    <p:spTree>
+      <p:nvGrpSpPr>
+        <p:cNvPr id="1" name=""/>
+        <p:cNvGrpSpPr/>
+        <p:nvPr/>
+      </p:nvGrpSpPr>
+      <p:grpSpPr>
+        <a:xfrm>
+          <a:off x="0" y="0"/>
+          <a:ext cx="0" cy="0"/>
+          <a:chOff x="0" y="0"/>
+          <a:chExt cx="0" cy="0"/>
+        </a:xfrm>
+      </p:grpSpPr>
+      <p:sp>
+        <p:nvSpPr>
+          <p:cNvPr id="2" name="Title 1">
+            <a:extLst>
+              <a:ext uri="{FF2B5EF4-FFF2-40B4-BE49-F238E27FC236}">
+                <a16:creationId xmlns:a16="http://schemas.microsoft.com/office/drawing/2014/main" id="{DC8BFBA6-5931-001D-EE1D-918084272365}"/>
+              </a:ext>
+            </a:extLst>
+          </p:cNvPr>
+          <p:cNvSpPr>
+            <a:spLocks noGrp="1"/>
+          </p:cNvSpPr>
+          <p:nvPr>
+            <p:ph type="title"/>
+          </p:nvPr>
+        </p:nvSpPr>
+        <p:spPr>
+          <a:xfrm>
+            <a:off x="630238" y="274638"/>
+            <a:ext cx="7886700" cy="993775"/>
+          </a:xfrm>
+        </p:spPr>
+        <p:txBody>
+          <a:bodyPr/>
+          <a:lstStyle/>
+          <a:p>
+            <a:r>
+              <a:rPr lang="en-US"/>
+              <a:t>Click to edit Master title style</a:t>
+            </a:r>
+          </a:p>
+        </p:txBody>
+      </p:sp>
+      <p:sp>
+        <p:nvSpPr>
+          <p:cNvPr id="3" name="Text Placeholder 2">
+            <a:extLst>
+              <a:ext uri="{FF2B5EF4-FFF2-40B4-BE49-F238E27FC236}">
+                <a16:creationId xmlns:a16="http://schemas.microsoft.com/office/drawing/2014/main" id="{6E6DC5B7-897A-7B34-4E45-4E0D8338B8DE}"/>
+              </a:ext>
+            </a:extLst>
+          </p:cNvPr>
+          <p:cNvSpPr>
+            <a:spLocks noGrp="1"/>
+          </p:cNvSpPr>
+          <p:nvPr>
+            <p:ph type="body" idx="1"/>
+          </p:nvPr>
+        </p:nvSpPr>
+        <p:spPr>
+          <a:xfrm>
+            <a:off x="630238" y="1260475"/>
+            <a:ext cx="3868737" cy="619125"/>
+          </a:xfrm>
+        </p:spPr>
+        <p:txBody>
+          <a:bodyPr anchor="b"/>
+          <a:lstStyle>
+            <a:lvl1pPr marL="0" indent="0">
+              <a:buNone/>
+              <a:defRPr sz="2400" b="1"/>
+            </a:lvl1pPr>
+            <a:lvl2pPr marL="457200" indent="0">
+              <a:buNone/>
+              <a:defRPr sz="2000" b="1"/>
+            </a:lvl2pPr>
+            <a:lvl3pPr marL="914400" indent="0">
+              <a:buNone/>
+              <a:defRPr sz="1800" b="1"/>
+            </a:lvl3pPr>
+            <a:lvl4pPr marL="1371600" indent="0">
+              <a:buNone/>
+              <a:defRPr sz="1600" b="1"/>
+            </a:lvl4pPr>
+            <a:lvl5pPr marL="1828800" indent="0">
+              <a:buNone/>
+              <a:defRPr sz="1600" b="1"/>
+            </a:lvl5pPr>
+            <a:lvl6pPr marL="2286000" indent="0">
+              <a:buNone/>
+              <a:defRPr sz="1600" b="1"/>
+            </a:lvl6pPr>
+            <a:lvl7pPr marL="2743200" indent="0">
+              <a:buNone/>
+              <a:defRPr sz="1600" b="1"/>
+            </a:lvl7pPr>
+            <a:lvl8pPr marL="3200400" indent="0">
+              <a:buNone/>
+              <a:defRPr sz="1600" b="1"/>
+            </a:lvl8pPr>
+            <a:lvl9pPr marL="3657600" indent="0">
+              <a:buNone/>
+              <a:defRPr sz="1600" b="1"/>
+            </a:lvl9pPr>
+          </a:lstStyle>
+          <a:p>
+            <a:pPr lvl="0"/>
+            <a:r>
+              <a:rPr lang="en-US"/>
+              <a:t>Click to edit Master text styles</a:t>
+            </a:r>
+          </a:p>
+        </p:txBody>
+      </p:sp>
+      <p:sp>
+        <p:nvSpPr>
+          <p:cNvPr id="4" name="Content Placeholder 3">
+            <a:extLst>
+              <a:ext uri="{FF2B5EF4-FFF2-40B4-BE49-F238E27FC236}">
+                <a16:creationId xmlns:a16="http://schemas.microsoft.com/office/drawing/2014/main" id="{787B601C-C25F-456B-A835-7C2179167803}"/>
+              </a:ext>
+            </a:extLst>
+          </p:cNvPr>
+          <p:cNvSpPr>
+            <a:spLocks noGrp="1"/>
+          </p:cNvSpPr>
+          <p:nvPr>
+            <p:ph sz="half" idx="2"/>
+          </p:nvPr>
+        </p:nvSpPr>
+        <p:spPr>
+          <a:xfrm>
+            <a:off x="630238" y="1879600"/>
+            <a:ext cx="3868737" cy="2762250"/>
+          </a:xfrm>
+        </p:spPr>
+        <p:txBody>
+          <a:bodyPr/>
+          <a:lstStyle/>
+          <a:p>
+            <a:pPr lvl="0"/>
+            <a:r>
+              <a:rPr lang="en-US"/>
+              <a:t>Click to edit Master text styles</a:t>
+            </a:r>
+          </a:p>
+          <a:p>
+            <a:pPr lvl="1"/>
+            <a:r>
+              <a:rPr lang="en-US"/>
+              <a:t>Second level</a:t>
+            </a:r>
+          </a:p>
+          <a:p>
+            <a:pPr lvl="2"/>
+            <a:r>
+              <a:rPr lang="en-US"/>
+              <a:t>Third level</a:t>
+            </a:r>
+          </a:p>
+          <a:p>
+            <a:pPr lvl="3"/>
+            <a:r>
+              <a:rPr lang="en-US"/>
+              <a:t>Fourth level</a:t>
+            </a:r>
+          </a:p>
+          <a:p>
+            <a:pPr lvl="4"/>
+            <a:r>
+              <a:rPr lang="en-US"/>
+              <a:t>Fifth level</a:t>
+            </a:r>
+          </a:p>
+        </p:txBody>
+      </p:sp>
+      <p:sp>
+        <p:nvSpPr>
+          <p:cNvPr id="5" name="Text Placeholder 4">
+            <a:extLst>
+              <a:ext uri="{FF2B5EF4-FFF2-40B4-BE49-F238E27FC236}">
+                <a16:creationId xmlns:a16="http://schemas.microsoft.com/office/drawing/2014/main" id="{FDE940D5-5E94-B553-E8DC-92986DC222B6}"/>
+              </a:ext>
+            </a:extLst>
+          </p:cNvPr>
+          <p:cNvSpPr>
+            <a:spLocks noGrp="1"/>
+          </p:cNvSpPr>
+          <p:nvPr>
+            <p:ph type="body" sz="quarter" idx="3"/>
+          </p:nvPr>
+        </p:nvSpPr>
+        <p:spPr>
+          <a:xfrm>
+            <a:off x="4629150" y="1260475"/>
+            <a:ext cx="3887788" cy="619125"/>
+          </a:xfrm>
+        </p:spPr>
+        <p:txBody>
+          <a:bodyPr anchor="b"/>
+          <a:lstStyle>
+            <a:lvl1pPr marL="0" indent="0">
+              <a:buNone/>
+              <a:defRPr sz="2400" b="1"/>
+            </a:lvl1pPr>
+            <a:lvl2pPr marL="457200" indent="0">
+              <a:buNone/>
+              <a:defRPr sz="2000" b="1"/>
+            </a:lvl2pPr>
+            <a:lvl3pPr marL="914400" indent="0">
+              <a:buNone/>
+              <a:defRPr sz="1800" b="1"/>
+            </a:lvl3pPr>
+            <a:lvl4pPr marL="1371600" indent="0">
+              <a:buNone/>
+              <a:defRPr sz="1600" b="1"/>
+            </a:lvl4pPr>
+            <a:lvl5pPr marL="1828800" indent="0">
+              <a:buNone/>
+              <a:defRPr sz="1600" b="1"/>
+            </a:lvl5pPr>
+            <a:lvl6pPr marL="2286000" indent="0">
+              <a:buNone/>
+              <a:defRPr sz="1600" b="1"/>
+            </a:lvl6pPr>
+            <a:lvl7pPr marL="2743200" indent="0">
+              <a:buNone/>
+              <a:defRPr sz="1600" b="1"/>
+            </a:lvl7pPr>
+            <a:lvl8pPr marL="3200400" indent="0">
+              <a:buNone/>
+              <a:defRPr sz="1600" b="1"/>
+            </a:lvl8pPr>
+            <a:lvl9pPr marL="3657600" indent="0">
+              <a:buNone/>
+              <a:defRPr sz="1600" b="1"/>
+            </a:lvl9pPr>
+          </a:lstStyle>
+          <a:p>
+            <a:pPr lvl="0"/>
+            <a:r>
+              <a:rPr lang="en-US"/>
+              <a:t>Click to edit Master text styles</a:t>
+            </a:r>
+          </a:p>
+        </p:txBody>
+      </p:sp>
+      <p:sp>
+        <p:nvSpPr>
+          <p:cNvPr id="6" name="Content Placeholder 5">
+            <a:extLst>
+              <a:ext uri="{FF2B5EF4-FFF2-40B4-BE49-F238E27FC236}">
+                <a16:creationId xmlns:a16="http://schemas.microsoft.com/office/drawing/2014/main" id="{B2B7FDA2-3424-797A-047B-975F859514F8}"/>
+              </a:ext>
+            </a:extLst>
+          </p:cNvPr>
+          <p:cNvSpPr>
+            <a:spLocks noGrp="1"/>
+          </p:cNvSpPr>
+          <p:nvPr>
+            <p:ph sz="quarter" idx="4"/>
+          </p:nvPr>
+        </p:nvSpPr>
+        <p:spPr>
+          <a:xfrm>
+            <a:off x="4629150" y="1879600"/>
+            <a:ext cx="3887788" cy="2762250"/>
+          </a:xfrm>
+        </p:spPr>
+        <p:txBody>
+          <a:bodyPr/>
+          <a:lstStyle/>
+          <a:p>
+            <a:pPr lvl="0"/>
+            <a:r>
+              <a:rPr lang="en-US"/>
+              <a:t>Click to edit Master text styles</a:t>
+            </a:r>
+          </a:p>
+          <a:p>
+            <a:pPr lvl="1"/>
+            <a:r>
+              <a:rPr lang="en-US"/>
+              <a:t>Second level</a:t>
+            </a:r>
+          </a:p>
+          <a:p>
+            <a:pPr lvl="2"/>
+            <a:r>
+              <a:rPr lang="en-US"/>
+              <a:t>Third level</a:t>
+            </a:r>
+          </a:p>
+          <a:p>
+            <a:pPr lvl="3"/>
+            <a:r>
+              <a:rPr lang="en-US"/>
+              <a:t>Fourth level</a:t>
+            </a:r>
+          </a:p>
+          <a:p>
+            <a:pPr lvl="4"/>
+            <a:r>
+              <a:rPr lang="en-US"/>
+              <a:t>Fifth level</a:t>
+            </a:r>
+          </a:p>
+        </p:txBody>
+      </p:sp>
+      <p:sp>
+        <p:nvSpPr>
+          <p:cNvPr id="7" name="Date Placeholder 6">
+            <a:extLst>
+              <a:ext uri="{FF2B5EF4-FFF2-40B4-BE49-F238E27FC236}">
+                <a16:creationId xmlns:a16="http://schemas.microsoft.com/office/drawing/2014/main" id="{65BACFB2-1CA3-F512-8773-A99AE809370B}"/>
+              </a:ext>
+            </a:extLst>
+          </p:cNvPr>
+          <p:cNvSpPr>
+            <a:spLocks noGrp="1"/>
+          </p:cNvSpPr>
+          <p:nvPr>
+            <p:ph type="dt" sz="half" idx="10"/>
+          </p:nvPr>
+        </p:nvSpPr>
+        <p:spPr/>
+        <p:txBody>
+          <a:bodyPr/>
+          <a:lstStyle/>
+          <a:p>
+            <a:fld id="{20318742-2822-1A4A-BB4E-0ED73E9A1171}" type="datetime1">
+              <a:rPr lang="en-US" smtClean="0"/>
+              <a:t>6/21/26</a:t>
+            </a:fld>
+            <a:endParaRPr lang="en-US"/>
+          </a:p>
+        </p:txBody>
+      </p:sp>
+      <p:sp>
+        <p:nvSpPr>
+          <p:cNvPr id="8" name="Footer Placeholder 7">
+            <a:extLst>
+              <a:ext uri="{FF2B5EF4-FFF2-40B4-BE49-F238E27FC236}">
+                <a16:creationId xmlns:a16="http://schemas.microsoft.com/office/drawing/2014/main" id="{4CF90FDE-B85B-4B3F-E6F4-9E47B151B034}"/>
+              </a:ext>
+            </a:extLst>
+          </p:cNvPr>
+          <p:cNvSpPr>
+            <a:spLocks noGrp="1"/>
+          </p:cNvSpPr>
+          <p:nvPr>
+            <p:ph type="ftr" sz="quarter" idx="11"/>
+          </p:nvPr>
+        </p:nvSpPr>
+        <p:spPr/>
+        <p:txBody>
+          <a:bodyPr/>
+          <a:lstStyle/>
+          <a:p>
+            <a:endParaRPr lang="en-US"/>
+          </a:p>
+        </p:txBody>
+      </p:sp>
+      <p:sp>
+        <p:nvSpPr>
+          <p:cNvPr id="9" name="Slide Number Placeholder 8">
+            <a:extLst>
+              <a:ext uri="{FF2B5EF4-FFF2-40B4-BE49-F238E27FC236}">
+                <a16:creationId xmlns:a16="http://schemas.microsoft.com/office/drawing/2014/main" id="{0E8E4D0B-3867-3D06-9A77-F2805E682D3D}"/>
+              </a:ext>
+            </a:extLst>
+          </p:cNvPr>
+          <p:cNvSpPr>
+            <a:spLocks noGrp="1"/>
+          </p:cNvSpPr>
+          <p:nvPr>
+            <p:ph type="sldNum" sz="quarter" idx="12"/>
+          </p:nvPr>
+        </p:nvSpPr>
+        <p:spPr/>
+        <p:txBody>
+          <a:bodyPr/>
+          <a:lstStyle/>
+          <a:p>
+            <a:fld id="{59854499-FE6F-F146-B363-A2BB07F446CC}" type="slidenum">
+              <a:rPr lang="en-US" smtClean="0"/>
+              <a:t>‹#›</a:t>
+            </a:fld>
+            <a:endParaRPr lang="en-US"/>
+          </a:p>
+        </p:txBody>
+      </p:sp>
+    </p:spTree>
+    <p:extLst>
+      <p:ext uri="{BB962C8B-B14F-4D97-AF65-F5344CB8AC3E}">
+        <p14:creationId xmlns:p14="http://schemas.microsoft.com/office/powerpoint/2010/main" val="2425670590"/>
+      </p:ext>
+    </p:extLst>
+  </p:cSld>
+  <p:clrMapOvr>
+    <a:masterClrMapping/>
+  </p:clrMapOvr>
+</p:sldLayout>
+</file>
+
+<file path=ppt/slideLayouts/slideLayout6.xml><?xml version="1.0" encoding="utf-8"?>
+<p:sldLayout xmlns:a="http://schemas.openxmlformats.org/drawingml/2006/main" xmlns:r="http://schemas.openxmlformats.org/officeDocument/2006/relationships" xmlns:p="http://schemas.openxmlformats.org/presentationml/2006/main" type="titleOnly" preserve="1">
+  <p:cSld name="Title Only">
+    <p:spTree>
+      <p:nvGrpSpPr>
+        <p:cNvPr id="1" name=""/>
+        <p:cNvGrpSpPr/>
+        <p:nvPr/>
+      </p:nvGrpSpPr>
+      <p:grpSpPr>
+        <a:xfrm>
+          <a:off x="0" y="0"/>
+          <a:ext cx="0" cy="0"/>
+          <a:chOff x="0" y="0"/>
+          <a:chExt cx="0" cy="0"/>
+        </a:xfrm>
+      </p:grpSpPr>
+      <p:sp>
+        <p:nvSpPr>
+          <p:cNvPr id="2" name="Title 1">
+            <a:extLst>
+              <a:ext uri="{FF2B5EF4-FFF2-40B4-BE49-F238E27FC236}">
+                <a16:creationId xmlns:a16="http://schemas.microsoft.com/office/drawing/2014/main" id="{AF88B907-18B6-7E3A-DE6B-CD02DA43A9BC}"/>
+              </a:ext>
+            </a:extLst>
+          </p:cNvPr>
+          <p:cNvSpPr>
+            <a:spLocks noGrp="1"/>
+          </p:cNvSpPr>
+          <p:nvPr>
+            <p:ph type="title"/>
+          </p:nvPr>
+        </p:nvSpPr>
+        <p:spPr/>
+        <p:txBody>
+          <a:bodyPr/>
+          <a:lstStyle/>
+          <a:p>
+            <a:r>
+              <a:rPr lang="en-US"/>
+              <a:t>Click to edit Master title style</a:t>
+            </a:r>
+          </a:p>
+        </p:txBody>
+      </p:sp>
+      <p:sp>
+        <p:nvSpPr>
+          <p:cNvPr id="3" name="Date Placeholder 2">
+            <a:extLst>
+              <a:ext uri="{FF2B5EF4-FFF2-40B4-BE49-F238E27FC236}">
+                <a16:creationId xmlns:a16="http://schemas.microsoft.com/office/drawing/2014/main" id="{DEEDF38A-19BF-44E1-F1CC-1E5C0D815E71}"/>
+              </a:ext>
+            </a:extLst>
+          </p:cNvPr>
+          <p:cNvSpPr>
+            <a:spLocks noGrp="1"/>
+          </p:cNvSpPr>
+          <p:nvPr>
+            <p:ph type="dt" sz="half" idx="10"/>
+          </p:nvPr>
+        </p:nvSpPr>
+        <p:spPr/>
+        <p:txBody>
+          <a:bodyPr/>
+          <a:lstStyle/>
+          <a:p>
+            <a:fld id="{70A01EC0-E714-DD4D-9DB2-511B089AA6CC}" type="datetime1">
+              <a:rPr lang="en-US" smtClean="0"/>
+              <a:t>6/21/26</a:t>
+            </a:fld>
+            <a:endParaRPr lang="en-US"/>
+          </a:p>
+        </p:txBody>
+      </p:sp>
+      <p:sp>
+        <p:nvSpPr>
+          <p:cNvPr id="4" name="Footer Placeholder 3">
+            <a:extLst>
+              <a:ext uri="{FF2B5EF4-FFF2-40B4-BE49-F238E27FC236}">
+                <a16:creationId xmlns:a16="http://schemas.microsoft.com/office/drawing/2014/main" id="{5C814D7A-88AF-80E7-188F-E4E36ED26107}"/>
+              </a:ext>
+            </a:extLst>
+          </p:cNvPr>
+          <p:cNvSpPr>
+            <a:spLocks noGrp="1"/>
+          </p:cNvSpPr>
+          <p:nvPr>
+            <p:ph type="ftr" sz="quarter" idx="11"/>
+          </p:nvPr>
+        </p:nvSpPr>
+        <p:spPr/>
+        <p:txBody>
+          <a:bodyPr/>
+          <a:lstStyle/>
+          <a:p>
+            <a:endParaRPr lang="en-US"/>
+          </a:p>
+        </p:txBody>
+      </p:sp>
+      <p:sp>
+        <p:nvSpPr>
+          <p:cNvPr id="5" name="Slide Number Placeholder 4">
+            <a:extLst>
+              <a:ext uri="{FF2B5EF4-FFF2-40B4-BE49-F238E27FC236}">
+                <a16:creationId xmlns:a16="http://schemas.microsoft.com/office/drawing/2014/main" id="{8279FA8A-B754-6D5F-F924-8C58FC4A86D9}"/>
+              </a:ext>
+            </a:extLst>
+          </p:cNvPr>
+          <p:cNvSpPr>
+            <a:spLocks noGrp="1"/>
+          </p:cNvSpPr>
+          <p:nvPr>
+            <p:ph type="sldNum" sz="quarter" idx="12"/>
+          </p:nvPr>
+        </p:nvSpPr>
+        <p:spPr/>
+        <p:txBody>
+          <a:bodyPr/>
+          <a:lstStyle/>
+          <a:p>
+            <a:fld id="{59854499-FE6F-F146-B363-A2BB07F446CC}" type="slidenum">
+              <a:rPr lang="en-US" smtClean="0"/>
+              <a:t>‹#›</a:t>
+            </a:fld>
+            <a:endParaRPr lang="en-US"/>
+          </a:p>
+        </p:txBody>
+      </p:sp>
+    </p:spTree>
+    <p:extLst>
+      <p:ext uri="{BB962C8B-B14F-4D97-AF65-F5344CB8AC3E}">
+        <p14:creationId xmlns:p14="http://schemas.microsoft.com/office/powerpoint/2010/main" val="1293968743"/>
+      </p:ext>
+    </p:extLst>
+  </p:cSld>
+  <p:clrMapOvr>
+    <a:masterClrMapping/>
+  </p:clrMapOvr>
+</p:sldLayout>
+</file>
+
+<file path=ppt/slideLayouts/slideLayout7.xml><?xml version="1.0" encoding="utf-8"?>
+<p:sldLayout xmlns:a="http://schemas.openxmlformats.org/drawingml/2006/main" xmlns:r="http://schemas.openxmlformats.org/officeDocument/2006/relationships" xmlns:p="http://schemas.openxmlformats.org/presentationml/2006/main" type="blank" preserve="1">
+  <p:cSld name="Blank">
+    <p:spTree>
+      <p:nvGrpSpPr>
+        <p:cNvPr id="1" name=""/>
+        <p:cNvGrpSpPr/>
+        <p:nvPr/>
+      </p:nvGrpSpPr>
+      <p:grpSpPr>
+        <a:xfrm>
+          <a:off x="0" y="0"/>
+          <a:ext cx="0" cy="0"/>
+          <a:chOff x="0" y="0"/>
+          <a:chExt cx="0" cy="0"/>
+        </a:xfrm>
+      </p:grpSpPr>
+      <p:sp>
+        <p:nvSpPr>
+          <p:cNvPr id="2" name="Date Placeholder 1">
+            <a:extLst>
+              <a:ext uri="{FF2B5EF4-FFF2-40B4-BE49-F238E27FC236}">
+                <a16:creationId xmlns:a16="http://schemas.microsoft.com/office/drawing/2014/main" id="{F1D9D578-2DC8-46C2-AAFE-E6BAA9C5D03C}"/>
+              </a:ext>
+            </a:extLst>
+          </p:cNvPr>
+          <p:cNvSpPr>
+            <a:spLocks noGrp="1"/>
+          </p:cNvSpPr>
+          <p:nvPr>
+            <p:ph type="dt" sz="half" idx="10"/>
+          </p:nvPr>
+        </p:nvSpPr>
+        <p:spPr/>
+        <p:txBody>
+          <a:bodyPr/>
+          <a:lstStyle/>
+          <a:p>
+            <a:fld id="{66A4215D-D8C7-A847-BE59-27DC1BF5EB6C}" type="datetime1">
+              <a:rPr lang="en-US" smtClean="0"/>
+              <a:t>6/21/26</a:t>
+            </a:fld>
+            <a:endParaRPr lang="en-US"/>
+          </a:p>
+        </p:txBody>
+      </p:sp>
+      <p:sp>
+        <p:nvSpPr>
+          <p:cNvPr id="3" name="Footer Placeholder 2">
+            <a:extLst>
+              <a:ext uri="{FF2B5EF4-FFF2-40B4-BE49-F238E27FC236}">
+                <a16:creationId xmlns:a16="http://schemas.microsoft.com/office/drawing/2014/main" id="{1E0EBD0E-5C94-75C8-7EB0-388A64648367}"/>
+              </a:ext>
+            </a:extLst>
+          </p:cNvPr>
+          <p:cNvSpPr>
+            <a:spLocks noGrp="1"/>
+          </p:cNvSpPr>
+          <p:nvPr>
+            <p:ph type="ftr" sz="quarter" idx="11"/>
+          </p:nvPr>
+        </p:nvSpPr>
+        <p:spPr/>
+        <p:txBody>
+          <a:bodyPr/>
+          <a:lstStyle/>
+          <a:p>
+            <a:endParaRPr lang="en-US"/>
+          </a:p>
+        </p:txBody>
+      </p:sp>
+      <p:sp>
+        <p:nvSpPr>
+          <p:cNvPr id="4" name="Slide Number Placeholder 3">
+            <a:extLst>
+              <a:ext uri="{FF2B5EF4-FFF2-40B4-BE49-F238E27FC236}">
+                <a16:creationId xmlns:a16="http://schemas.microsoft.com/office/drawing/2014/main" id="{B493541F-1889-5C5D-B454-7E9C45B57A90}"/>
+              </a:ext>
+            </a:extLst>
+          </p:cNvPr>
+          <p:cNvSpPr>
+            <a:spLocks noGrp="1"/>
+          </p:cNvSpPr>
+          <p:nvPr>
+            <p:ph type="sldNum" sz="quarter" idx="12"/>
+          </p:nvPr>
+        </p:nvSpPr>
+        <p:spPr/>
+        <p:txBody>
+          <a:bodyPr/>
+          <a:lstStyle/>
+          <a:p>
+            <a:fld id="{59854499-FE6F-F146-B363-A2BB07F446CC}" type="slidenum">
+              <a:rPr lang="en-US" smtClean="0"/>
+              <a:t>‹#›</a:t>
+            </a:fld>
+            <a:endParaRPr lang="en-US"/>
+          </a:p>
+        </p:txBody>
+      </p:sp>
+    </p:spTree>
+    <p:extLst>
+      <p:ext uri="{BB962C8B-B14F-4D97-AF65-F5344CB8AC3E}">
+        <p14:creationId xmlns:p14="http://schemas.microsoft.com/office/powerpoint/2010/main" val="203633136"/>
+      </p:ext>
+    </p:extLst>
+  </p:cSld>
+  <p:clrMapOvr>
+    <a:masterClrMapping/>
+  </p:clrMapOvr>
+</p:sldLayout>
+</file>
+
+<file path=ppt/slideLayouts/slideLayout8.xml><?xml version="1.0" encoding="utf-8"?>
+<p:sldLayout xmlns:a="http://schemas.openxmlformats.org/drawingml/2006/main" xmlns:r="http://schemas.openxmlformats.org/officeDocument/2006/relationships" xmlns:p="http://schemas.openxmlformats.org/presentationml/2006/main" type="objTx" preserve="1">
+  <p:cSld name="Content with Caption">
+    <p:spTree>
+      <p:nvGrpSpPr>
+        <p:cNvPr id="1" name=""/>
+        <p:cNvGrpSpPr/>
+        <p:nvPr/>
+      </p:nvGrpSpPr>
+      <p:grpSpPr>
+        <a:xfrm>
+          <a:off x="0" y="0"/>
+          <a:ext cx="0" cy="0"/>
+          <a:chOff x="0" y="0"/>
+          <a:chExt cx="0" cy="0"/>
+        </a:xfrm>
+      </p:grpSpPr>
+      <p:sp>
+        <p:nvSpPr>
+          <p:cNvPr id="2" name="Title 1">
+            <a:extLst>
+              <a:ext uri="{FF2B5EF4-FFF2-40B4-BE49-F238E27FC236}">
+                <a16:creationId xmlns:a16="http://schemas.microsoft.com/office/drawing/2014/main" id="{FA0A11D0-47EF-163A-0FCD-E2DD27B0A683}"/>
+              </a:ext>
+            </a:extLst>
+          </p:cNvPr>
+          <p:cNvSpPr>
+            <a:spLocks noGrp="1"/>
+          </p:cNvSpPr>
+          <p:nvPr>
+            <p:ph type="title"/>
+          </p:nvPr>
+        </p:nvSpPr>
+        <p:spPr>
+          <a:xfrm>
+            <a:off x="630238" y="342900"/>
+            <a:ext cx="2949575" cy="1200150"/>
+          </a:xfrm>
+        </p:spPr>
+        <p:txBody>
+          <a:bodyPr anchor="b"/>
+          <a:lstStyle>
+            <a:lvl1pPr>
+              <a:defRPr sz="3200"/>
+            </a:lvl1pPr>
+          </a:lstStyle>
+          <a:p>
+            <a:r>
+              <a:rPr lang="en-US"/>
+              <a:t>Click to edit Master title style</a:t>
+            </a:r>
+          </a:p>
+        </p:txBody>
+      </p:sp>
+      <p:sp>
+        <p:nvSpPr>
+          <p:cNvPr id="3" name="Content Placeholder 2">
+            <a:extLst>
+              <a:ext uri="{FF2B5EF4-FFF2-40B4-BE49-F238E27FC236}">
+                <a16:creationId xmlns:a16="http://schemas.microsoft.com/office/drawing/2014/main" id="{32BD6874-EA7D-1B4C-9233-989DDCA1CA72}"/>
+              </a:ext>
+            </a:extLst>
+          </p:cNvPr>
+          <p:cNvSpPr>
+            <a:spLocks noGrp="1"/>
+          </p:cNvSpPr>
+          <p:nvPr>
+            <p:ph idx="1"/>
+          </p:nvPr>
+        </p:nvSpPr>
+        <p:spPr>
+          <a:xfrm>
+            <a:off x="3887788" y="741363"/>
+            <a:ext cx="4629150" cy="3654425"/>
+          </a:xfrm>
+        </p:spPr>
+        <p:txBody>
+          <a:bodyPr/>
+          <a:lstStyle>
+            <a:lvl1pPr>
+              <a:defRPr sz="3200"/>
+            </a:lvl1pPr>
+            <a:lvl2pPr>
+              <a:defRPr sz="2800"/>
+            </a:lvl2pPr>
+            <a:lvl3pPr>
+              <a:defRPr sz="2400"/>
+            </a:lvl3pPr>
+            <a:lvl4pPr>
+              <a:defRPr sz="2000"/>
+            </a:lvl4pPr>
+            <a:lvl5pPr>
+              <a:defRPr sz="2000"/>
+            </a:lvl5pPr>
+            <a:lvl6pPr>
+              <a:defRPr sz="2000"/>
+            </a:lvl6pPr>
+            <a:lvl7pPr>
+              <a:defRPr sz="2000"/>
+            </a:lvl7pPr>
+            <a:lvl8pPr>
+              <a:defRPr sz="2000"/>
+            </a:lvl8pPr>
+            <a:lvl9pPr>
+              <a:defRPr sz="2000"/>
+            </a:lvl9pPr>
+          </a:lstStyle>
+          <a:p>
+            <a:pPr lvl="0"/>
+            <a:r>
+              <a:rPr lang="en-US"/>
+              <a:t>Click to edit Master text styles</a:t>
+            </a:r>
+          </a:p>
+          <a:p>
+            <a:pPr lvl="1"/>
+            <a:r>
+              <a:rPr lang="en-US"/>
+              <a:t>Second level</a:t>
+            </a:r>
+          </a:p>
+          <a:p>
+            <a:pPr lvl="2"/>
+            <a:r>
+              <a:rPr lang="en-US"/>
+              <a:t>Third level</a:t>
+            </a:r>
+          </a:p>
+          <a:p>
+            <a:pPr lvl="3"/>
+            <a:r>
+              <a:rPr lang="en-US"/>
+              <a:t>Fourth level</a:t>
+            </a:r>
+          </a:p>
+          <a:p>
+            <a:pPr lvl="4"/>
+            <a:r>
+              <a:rPr lang="en-US"/>
+              <a:t>Fifth level</a:t>
+            </a:r>
+          </a:p>
+        </p:txBody>
+      </p:sp>
+      <p:sp>
+        <p:nvSpPr>
+          <p:cNvPr id="4" name="Text Placeholder 3">
+            <a:extLst>
+              <a:ext uri="{FF2B5EF4-FFF2-40B4-BE49-F238E27FC236}">
+                <a16:creationId xmlns:a16="http://schemas.microsoft.com/office/drawing/2014/main" id="{2F907B6E-2B6D-1517-D5C6-D1CB730C2D25}"/>
+              </a:ext>
+            </a:extLst>
+          </p:cNvPr>
+          <p:cNvSpPr>
+            <a:spLocks noGrp="1"/>
+          </p:cNvSpPr>
+          <p:nvPr>
+            <p:ph type="body" sz="half" idx="2"/>
+          </p:nvPr>
+        </p:nvSpPr>
+        <p:spPr>
+          <a:xfrm>
+            <a:off x="630238" y="1543050"/>
+            <a:ext cx="2949575" cy="2859088"/>
+          </a:xfrm>
+        </p:spPr>
+        <p:txBody>
+          <a:bodyPr/>
+          <a:lstStyle>
+            <a:lvl1pPr marL="0" indent="0">
+              <a:buNone/>
+              <a:defRPr sz="1600"/>
+            </a:lvl1pPr>
+            <a:lvl2pPr marL="457200" indent="0">
+              <a:buNone/>
+              <a:defRPr sz="1400"/>
+            </a:lvl2pPr>
+            <a:lvl3pPr marL="914400" indent="0">
+              <a:buNone/>
+              <a:defRPr sz="1200"/>
+            </a:lvl3pPr>
+            <a:lvl4pPr marL="1371600" indent="0">
+              <a:buNone/>
+              <a:defRPr sz="1000"/>
+            </a:lvl4pPr>
+            <a:lvl5pPr marL="1828800" indent="0">
+              <a:buNone/>
+              <a:defRPr sz="1000"/>
+            </a:lvl5pPr>
+            <a:lvl6pPr marL="2286000" indent="0">
+              <a:buNone/>
+              <a:defRPr sz="1000"/>
+            </a:lvl6pPr>
+            <a:lvl7pPr marL="2743200" indent="0">
+              <a:buNone/>
+              <a:defRPr sz="1000"/>
+            </a:lvl7pPr>
+            <a:lvl8pPr marL="3200400" indent="0">
+              <a:buNone/>
+              <a:defRPr sz="1000"/>
+            </a:lvl8pPr>
+            <a:lvl9pPr marL="3657600" indent="0">
+              <a:buNone/>
+              <a:defRPr sz="1000"/>
+            </a:lvl9pPr>
+          </a:lstStyle>
+          <a:p>
+            <a:pPr lvl="0"/>
+            <a:r>
+              <a:rPr lang="en-US"/>
+              <a:t>Click to edit Master text styles</a:t>
+            </a:r>
+          </a:p>
+        </p:txBody>
+      </p:sp>
+      <p:sp>
+        <p:nvSpPr>
+          <p:cNvPr id="5" name="Date Placeholder 4">
+            <a:extLst>
+              <a:ext uri="{FF2B5EF4-FFF2-40B4-BE49-F238E27FC236}">
+                <a16:creationId xmlns:a16="http://schemas.microsoft.com/office/drawing/2014/main" id="{1C45C00B-E469-76B9-2E78-6E8FA3B3C8DC}"/>
+              </a:ext>
+            </a:extLst>
+          </p:cNvPr>
+          <p:cNvSpPr>
+            <a:spLocks noGrp="1"/>
+          </p:cNvSpPr>
+          <p:nvPr>
+            <p:ph type="dt" sz="half" idx="10"/>
+          </p:nvPr>
+        </p:nvSpPr>
+        <p:spPr/>
+        <p:txBody>
+          <a:bodyPr/>
+          <a:lstStyle/>
+          <a:p>
+            <a:fld id="{985EF311-7D05-C54A-A81D-91C2810D2F14}" type="datetime1">
+              <a:rPr lang="en-US" smtClean="0"/>
+              <a:t>6/21/26</a:t>
+            </a:fld>
+            <a:endParaRPr lang="en-US"/>
+          </a:p>
+        </p:txBody>
+      </p:sp>
+      <p:sp>
+        <p:nvSpPr>
+          <p:cNvPr id="6" name="Footer Placeholder 5">
+            <a:extLst>
+              <a:ext uri="{FF2B5EF4-FFF2-40B4-BE49-F238E27FC236}">
+                <a16:creationId xmlns:a16="http://schemas.microsoft.com/office/drawing/2014/main" id="{2DBC5A21-E81C-816E-F4B3-9B38BC656B04}"/>
+              </a:ext>
+            </a:extLst>
+          </p:cNvPr>
+          <p:cNvSpPr>
+            <a:spLocks noGrp="1"/>
+          </p:cNvSpPr>
+          <p:nvPr>
+            <p:ph type="ftr" sz="quarter" idx="11"/>
+          </p:nvPr>
+        </p:nvSpPr>
+        <p:spPr/>
+        <p:txBody>
+          <a:bodyPr/>
+          <a:lstStyle/>
+          <a:p>
+            <a:endParaRPr lang="en-US"/>
+          </a:p>
+        </p:txBody>
+      </p:sp>
+      <p:sp>
+        <p:nvSpPr>
+          <p:cNvPr id="7" name="Slide Number Placeholder 6">
+            <a:extLst>
+              <a:ext uri="{FF2B5EF4-FFF2-40B4-BE49-F238E27FC236}">
+                <a16:creationId xmlns:a16="http://schemas.microsoft.com/office/drawing/2014/main" id="{7D1A648C-A82D-1AD6-C47A-7DD6C0343ADB}"/>
+              </a:ext>
+            </a:extLst>
+          </p:cNvPr>
+          <p:cNvSpPr>
+            <a:spLocks noGrp="1"/>
+          </p:cNvSpPr>
+          <p:nvPr>
+            <p:ph type="sldNum" sz="quarter" idx="12"/>
+          </p:nvPr>
+        </p:nvSpPr>
+        <p:spPr/>
+        <p:txBody>
+          <a:bodyPr/>
+          <a:lstStyle/>
+          <a:p>
+            <a:fld id="{59854499-FE6F-F146-B363-A2BB07F446CC}" type="slidenum">
+              <a:rPr lang="en-US" smtClean="0"/>
+              <a:t>‹#›</a:t>
+            </a:fld>
+            <a:endParaRPr lang="en-US"/>
+          </a:p>
+        </p:txBody>
+      </p:sp>
+    </p:spTree>
+    <p:extLst>
+      <p:ext uri="{BB962C8B-B14F-4D97-AF65-F5344CB8AC3E}">
+        <p14:creationId xmlns:p14="http://schemas.microsoft.com/office/powerpoint/2010/main" val="2275693199"/>
+      </p:ext>
+    </p:extLst>
+  </p:cSld>
+  <p:clrMapOvr>
+    <a:masterClrMapping/>
+  </p:clrMapOvr>
+</p:sldLayout>
+</file>
+
+<file path=ppt/slideLayouts/slideLayout9.xml><?xml version="1.0" encoding="utf-8"?>
+<p:sldLayout xmlns:a="http://schemas.openxmlformats.org/drawingml/2006/main" xmlns:r="http://schemas.openxmlformats.org/officeDocument/2006/relationships" xmlns:p="http://schemas.openxmlformats.org/presentationml/2006/main" type="picTx" preserve="1">
+  <p:cSld name="Picture with Caption">
+    <p:spTree>
+      <p:nvGrpSpPr>
+        <p:cNvPr id="1" name=""/>
+        <p:cNvGrpSpPr/>
+        <p:nvPr/>
+      </p:nvGrpSpPr>
+      <p:grpSpPr>
+        <a:xfrm>
+          <a:off x="0" y="0"/>
+          <a:ext cx="0" cy="0"/>
+          <a:chOff x="0" y="0"/>
+          <a:chExt cx="0" cy="0"/>
+        </a:xfrm>
+      </p:grpSpPr>
+      <p:sp>
+        <p:nvSpPr>
+          <p:cNvPr id="2" name="Title 1">
+            <a:extLst>
+              <a:ext uri="{FF2B5EF4-FFF2-40B4-BE49-F238E27FC236}">
+                <a16:creationId xmlns:a16="http://schemas.microsoft.com/office/drawing/2014/main" id="{0EDAA39A-A269-F7EF-B264-AFF736AADC84}"/>
+              </a:ext>
+            </a:extLst>
+          </p:cNvPr>
+          <p:cNvSpPr>
+            <a:spLocks noGrp="1"/>
+          </p:cNvSpPr>
+          <p:nvPr>
+            <p:ph type="title"/>
+          </p:nvPr>
+        </p:nvSpPr>
+        <p:spPr>
+          <a:xfrm>
+            <a:off x="630238" y="342900"/>
+            <a:ext cx="2949575" cy="1200150"/>
+          </a:xfrm>
+        </p:spPr>
+        <p:txBody>
+          <a:bodyPr anchor="b"/>
+          <a:lstStyle>
+            <a:lvl1pPr>
+              <a:defRPr sz="3200"/>
+            </a:lvl1pPr>
+          </a:lstStyle>
+          <a:p>
+            <a:r>
+              <a:rPr lang="en-US"/>
+              <a:t>Click to edit Master title style</a:t>
+            </a:r>
+          </a:p>
+        </p:txBody>
+      </p:sp>
+      <p:sp>
+        <p:nvSpPr>
+          <p:cNvPr id="3" name="Picture Placeholder 2">
+            <a:extLst>
+              <a:ext uri="{FF2B5EF4-FFF2-40B4-BE49-F238E27FC236}">
+                <a16:creationId xmlns:a16="http://schemas.microsoft.com/office/drawing/2014/main" id="{D95CB813-C9B7-7B5A-E643-29EFF73A3B7E}"/>
+              </a:ext>
+            </a:extLst>
+          </p:cNvPr>
+          <p:cNvSpPr>
+            <a:spLocks noGrp="1"/>
+          </p:cNvSpPr>
+          <p:nvPr>
+            <p:ph type="pic" idx="1"/>
+          </p:nvPr>
+        </p:nvSpPr>
+        <p:spPr>
+          <a:xfrm>
+            <a:off x="3887788" y="741363"/>
+            <a:ext cx="4629150" cy="3654425"/>
+          </a:xfrm>
+        </p:spPr>
+        <p:txBody>
+          <a:bodyPr/>
+          <a:lstStyle>
+            <a:lvl1pPr marL="0" indent="0">
+              <a:buNone/>
+              <a:defRPr sz="3200"/>
+            </a:lvl1pPr>
+            <a:lvl2pPr marL="457200" indent="0">
+              <a:buNone/>
+              <a:defRPr sz="2800"/>
+            </a:lvl2pPr>
+            <a:lvl3pPr marL="914400" indent="0">
+              <a:buNone/>
+              <a:defRPr sz="2400"/>
+            </a:lvl3pPr>
+            <a:lvl4pPr marL="1371600" indent="0">
+              <a:buNone/>
+              <a:defRPr sz="2000"/>
+            </a:lvl4pPr>
+            <a:lvl5pPr marL="1828800" indent="0">
+              <a:buNone/>
+              <a:defRPr sz="2000"/>
+            </a:lvl5pPr>
+            <a:lvl6pPr marL="2286000" indent="0">
+              <a:buNone/>
+              <a:defRPr sz="2000"/>
+            </a:lvl6pPr>
+            <a:lvl7pPr marL="2743200" indent="0">
+              <a:buNone/>
+              <a:defRPr sz="2000"/>
+            </a:lvl7pPr>
+            <a:lvl8pPr marL="3200400" indent="0">
+              <a:buNone/>
+              <a:defRPr sz="2000"/>
+            </a:lvl8pPr>
+            <a:lvl9pPr marL="3657600" indent="0">
+              <a:buNone/>
+              <a:defRPr sz="2000"/>
+            </a:lvl9pPr>
+          </a:lstStyle>
+          <a:p>
+            <a:endParaRPr lang="en-US"/>
+          </a:p>
+        </p:txBody>
+      </p:sp>
+      <p:sp>
+        <p:nvSpPr>
+          <p:cNvPr id="4" name="Text Placeholder 3">
+            <a:extLst>
+              <a:ext uri="{FF2B5EF4-FFF2-40B4-BE49-F238E27FC236}">
+                <a16:creationId xmlns:a16="http://schemas.microsoft.com/office/drawing/2014/main" id="{CAC28A7A-EADD-9E33-FFEE-86E6D2681540}"/>
+              </a:ext>
+            </a:extLst>
+          </p:cNvPr>
+          <p:cNvSpPr>
+            <a:spLocks noGrp="1"/>
+          </p:cNvSpPr>
+          <p:nvPr>
+            <p:ph type="body" sz="half" idx="2"/>
+          </p:nvPr>
+        </p:nvSpPr>
+        <p:spPr>
+          <a:xfrm>
+            <a:off x="630238" y="1543050"/>
+            <a:ext cx="2949575" cy="2859088"/>
+          </a:xfrm>
+        </p:spPr>
+        <p:txBody>
+          <a:bodyPr/>
+          <a:lstStyle>
+            <a:lvl1pPr marL="0" indent="0">
+              <a:buNone/>
+              <a:defRPr sz="1600"/>
+            </a:lvl1pPr>
+            <a:lvl2pPr marL="457200" indent="0">
+              <a:buNone/>
+              <a:defRPr sz="1400"/>
+            </a:lvl2pPr>
+            <a:lvl3pPr marL="914400" indent="0">
+              <a:buNone/>
+              <a:defRPr sz="1200"/>
+            </a:lvl3pPr>
+            <a:lvl4pPr marL="1371600" indent="0">
+              <a:buNone/>
+              <a:defRPr sz="1000"/>
+            </a:lvl4pPr>
+            <a:lvl5pPr marL="1828800" indent="0">
+              <a:buNone/>
+              <a:defRPr sz="1000"/>
+            </a:lvl5pPr>
+            <a:lvl6pPr marL="2286000" indent="0">
+              <a:buNone/>
+              <a:defRPr sz="1000"/>
+            </a:lvl6pPr>
+            <a:lvl7pPr marL="2743200" indent="0">
+              <a:buNone/>
+              <a:defRPr sz="1000"/>
+            </a:lvl7pPr>
+            <a:lvl8pPr marL="3200400" indent="0">
+              <a:buNone/>
+              <a:defRPr sz="1000"/>
+            </a:lvl8pPr>
+            <a:lvl9pPr marL="3657600" indent="0">
+              <a:buNone/>
+              <a:defRPr sz="1000"/>
+            </a:lvl9pPr>
+          </a:lstStyle>
+          <a:p>
+            <a:pPr lvl="0"/>
+            <a:r>
+              <a:rPr lang="en-US"/>
+              <a:t>Click to edit Master text styles</a:t>
+            </a:r>
+          </a:p>
+        </p:txBody>
+      </p:sp>
+      <p:sp>
+        <p:nvSpPr>
+          <p:cNvPr id="5" name="Date Placeholder 4">
+            <a:extLst>
+              <a:ext uri="{FF2B5EF4-FFF2-40B4-BE49-F238E27FC236}">
+                <a16:creationId xmlns:a16="http://schemas.microsoft.com/office/drawing/2014/main" id="{37C5F7A0-1590-83B9-184B-C4095A492B69}"/>
+              </a:ext>
+            </a:extLst>
+          </p:cNvPr>
+          <p:cNvSpPr>
+            <a:spLocks noGrp="1"/>
+          </p:cNvSpPr>
+          <p:nvPr>
+            <p:ph type="dt" sz="half" idx="10"/>
+          </p:nvPr>
+        </p:nvSpPr>
+        <p:spPr/>
+        <p:txBody>
+          <a:bodyPr/>
+          <a:lstStyle/>
+          <a:p>
+            <a:fld id="{FC8D9385-B125-BC40-897C-402C91EC224F}" type="datetime1">
+              <a:rPr lang="en-US" smtClean="0"/>
+              <a:t>6/21/26</a:t>
+            </a:fld>
+            <a:endParaRPr lang="en-US"/>
+          </a:p>
+        </p:txBody>
+      </p:sp>
+      <p:sp>
+        <p:nvSpPr>
+          <p:cNvPr id="6" name="Footer Placeholder 5">
+            <a:extLst>
+              <a:ext uri="{FF2B5EF4-FFF2-40B4-BE49-F238E27FC236}">
+                <a16:creationId xmlns:a16="http://schemas.microsoft.com/office/drawing/2014/main" id="{194F5A7B-6365-BC01-3428-1215E8D72BAD}"/>
+              </a:ext>
+            </a:extLst>
+          </p:cNvPr>
+          <p:cNvSpPr>
+            <a:spLocks noGrp="1"/>
+          </p:cNvSpPr>
+          <p:nvPr>
+            <p:ph type="ftr" sz="quarter" idx="11"/>
+          </p:nvPr>
+        </p:nvSpPr>
+        <p:spPr/>
+        <p:txBody>
+          <a:bodyPr/>
+          <a:lstStyle/>
+          <a:p>
+            <a:endParaRPr lang="en-US"/>
+          </a:p>
+        </p:txBody>
+      </p:sp>
+      <p:sp>
+        <p:nvSpPr>
+          <p:cNvPr id="7" name="Slide Number Placeholder 6">
+            <a:extLst>
+              <a:ext uri="{FF2B5EF4-FFF2-40B4-BE49-F238E27FC236}">
+                <a16:creationId xmlns:a16="http://schemas.microsoft.com/office/drawing/2014/main" id="{AB8EF3EB-D5D1-2954-299A-B73327BA39E7}"/>
+              </a:ext>
+            </a:extLst>
+          </p:cNvPr>
+          <p:cNvSpPr>
+            <a:spLocks noGrp="1"/>
+          </p:cNvSpPr>
+          <p:nvPr>
+            <p:ph type="sldNum" sz="quarter" idx="12"/>
+          </p:nvPr>
+        </p:nvSpPr>
+        <p:spPr/>
+        <p:txBody>
+          <a:bodyPr/>
+          <a:lstStyle/>
+          <a:p>
+            <a:fld id="{59854499-FE6F-F146-B363-A2BB07F446CC}" type="slidenum">
+              <a:rPr lang="en-US" smtClean="0"/>
+              <a:t>‹#›</a:t>
+            </a:fld>
+            <a:endParaRPr lang="en-US"/>
+          </a:p>
+        </p:txBody>
+      </p:sp>
+    </p:spTree>
+    <p:extLst>
+      <p:ext uri="{BB962C8B-B14F-4D97-AF65-F5344CB8AC3E}">
+        <p14:creationId xmlns:p14="http://schemas.microsoft.com/office/powerpoint/2010/main" val="3640752016"/>
+      </p:ext>
+    </p:extLst>
   </p:cSld>
   <p:clrMapOvr>
     <a:masterClrMapping/>
@@ -1562,7 +4196,7 @@
 </file>
 
 <file path=ppt/slideMasters/slideMaster1.xml><?xml version="1.0" encoding="utf-8"?>
-<p:sldMaster xmlns:a="http://schemas.openxmlformats.org/drawingml/2006/main" xmlns:r="http://schemas.openxmlformats.org/officeDocument/2006/relationships" xmlns:p="http://schemas.openxmlformats.org/presentationml/2006/main">
+<p:sldMaster xmlns:a="http://schemas.openxmlformats.org/drawingml/2006/main" xmlns:r="http://schemas.openxmlformats.org/officeDocument/2006/relationships" xmlns:p="http://schemas.openxmlformats.org/presentationml/2006/main" preserve="1">
   <p:cSld>
     <p:bg>
       <p:bgRef idx="1001">
@@ -1583,16 +4217,277 @@
           <a:chExt cx="0" cy="0"/>
         </a:xfrm>
       </p:grpSpPr>
+      <p:sp>
+        <p:nvSpPr>
+          <p:cNvPr id="2" name="Title Placeholder 1">
+            <a:extLst>
+              <a:ext uri="{FF2B5EF4-FFF2-40B4-BE49-F238E27FC236}">
+                <a16:creationId xmlns:a16="http://schemas.microsoft.com/office/drawing/2014/main" id="{B5B85FC3-1A87-D4BD-9087-6A5308340D1C}"/>
+              </a:ext>
+            </a:extLst>
+          </p:cNvPr>
+          <p:cNvSpPr>
+            <a:spLocks noGrp="1"/>
+          </p:cNvSpPr>
+          <p:nvPr>
+            <p:ph type="title"/>
+          </p:nvPr>
+        </p:nvSpPr>
+        <p:spPr>
+          <a:xfrm>
+            <a:off x="628650" y="274638"/>
+            <a:ext cx="7886700" cy="993775"/>
+          </a:xfrm>
+          <a:prstGeom prst="rect">
+            <a:avLst/>
+          </a:prstGeom>
+        </p:spPr>
+        <p:txBody>
+          <a:bodyPr vert="horz" lIns="91440" tIns="45720" rIns="91440" bIns="45720" rtlCol="0" anchor="ctr">
+            <a:normAutofit/>
+          </a:bodyPr>
+          <a:lstStyle/>
+          <a:p>
+            <a:r>
+              <a:rPr lang="en-US"/>
+              <a:t>Click to edit Master title style</a:t>
+            </a:r>
+          </a:p>
+        </p:txBody>
+      </p:sp>
+      <p:sp>
+        <p:nvSpPr>
+          <p:cNvPr id="3" name="Text Placeholder 2">
+            <a:extLst>
+              <a:ext uri="{FF2B5EF4-FFF2-40B4-BE49-F238E27FC236}">
+                <a16:creationId xmlns:a16="http://schemas.microsoft.com/office/drawing/2014/main" id="{1D5A90D9-F754-FB9B-FF4C-8E691C070AAF}"/>
+              </a:ext>
+            </a:extLst>
+          </p:cNvPr>
+          <p:cNvSpPr>
+            <a:spLocks noGrp="1"/>
+          </p:cNvSpPr>
+          <p:nvPr>
+            <p:ph type="body" idx="1"/>
+          </p:nvPr>
+        </p:nvSpPr>
+        <p:spPr>
+          <a:xfrm>
+            <a:off x="628650" y="1370013"/>
+            <a:ext cx="7886700" cy="3262312"/>
+          </a:xfrm>
+          <a:prstGeom prst="rect">
+            <a:avLst/>
+          </a:prstGeom>
+        </p:spPr>
+        <p:txBody>
+          <a:bodyPr vert="horz" lIns="91440" tIns="45720" rIns="91440" bIns="45720" rtlCol="0">
+            <a:normAutofit/>
+          </a:bodyPr>
+          <a:lstStyle/>
+          <a:p>
+            <a:pPr lvl="0"/>
+            <a:r>
+              <a:rPr lang="en-US"/>
+              <a:t>Click to edit Master text styles</a:t>
+            </a:r>
+          </a:p>
+          <a:p>
+            <a:pPr lvl="1"/>
+            <a:r>
+              <a:rPr lang="en-US"/>
+              <a:t>Second level</a:t>
+            </a:r>
+          </a:p>
+          <a:p>
+            <a:pPr lvl="2"/>
+            <a:r>
+              <a:rPr lang="en-US"/>
+              <a:t>Third level</a:t>
+            </a:r>
+          </a:p>
+          <a:p>
+            <a:pPr lvl="3"/>
+            <a:r>
+              <a:rPr lang="en-US"/>
+              <a:t>Fourth level</a:t>
+            </a:r>
+          </a:p>
+          <a:p>
+            <a:pPr lvl="4"/>
+            <a:r>
+              <a:rPr lang="en-US"/>
+              <a:t>Fifth level</a:t>
+            </a:r>
+          </a:p>
+        </p:txBody>
+      </p:sp>
+      <p:sp>
+        <p:nvSpPr>
+          <p:cNvPr id="4" name="Date Placeholder 3">
+            <a:extLst>
+              <a:ext uri="{FF2B5EF4-FFF2-40B4-BE49-F238E27FC236}">
+                <a16:creationId xmlns:a16="http://schemas.microsoft.com/office/drawing/2014/main" id="{85631B05-905C-22D7-1516-7E03A9EBA141}"/>
+              </a:ext>
+            </a:extLst>
+          </p:cNvPr>
+          <p:cNvSpPr>
+            <a:spLocks noGrp="1"/>
+          </p:cNvSpPr>
+          <p:nvPr>
+            <p:ph type="dt" sz="half" idx="2"/>
+          </p:nvPr>
+        </p:nvSpPr>
+        <p:spPr>
+          <a:xfrm>
+            <a:off x="628650" y="4767263"/>
+            <a:ext cx="2057400" cy="274637"/>
+          </a:xfrm>
+          <a:prstGeom prst="rect">
+            <a:avLst/>
+          </a:prstGeom>
+        </p:spPr>
+        <p:txBody>
+          <a:bodyPr vert="horz" lIns="91440" tIns="45720" rIns="91440" bIns="45720" rtlCol="0" anchor="ctr"/>
+          <a:lstStyle>
+            <a:lvl1pPr algn="l">
+              <a:defRPr sz="1200">
+                <a:solidFill>
+                  <a:schemeClr val="tx1">
+                    <a:tint val="82000"/>
+                  </a:schemeClr>
+                </a:solidFill>
+              </a:defRPr>
+            </a:lvl1pPr>
+          </a:lstStyle>
+          <a:p>
+            <a:fld id="{38A2B2AE-FB01-0E43-9EB6-06BD729592E3}" type="datetime1">
+              <a:rPr lang="en-US" smtClean="0"/>
+              <a:t>6/21/26</a:t>
+            </a:fld>
+            <a:endParaRPr lang="en-US"/>
+          </a:p>
+        </p:txBody>
+      </p:sp>
+      <p:sp>
+        <p:nvSpPr>
+          <p:cNvPr id="5" name="Footer Placeholder 4">
+            <a:extLst>
+              <a:ext uri="{FF2B5EF4-FFF2-40B4-BE49-F238E27FC236}">
+                <a16:creationId xmlns:a16="http://schemas.microsoft.com/office/drawing/2014/main" id="{4D9A4C55-A5DC-8876-7E33-6658CB60BA74}"/>
+              </a:ext>
+            </a:extLst>
+          </p:cNvPr>
+          <p:cNvSpPr>
+            <a:spLocks noGrp="1"/>
+          </p:cNvSpPr>
+          <p:nvPr>
+            <p:ph type="ftr" sz="quarter" idx="3"/>
+          </p:nvPr>
+        </p:nvSpPr>
+        <p:spPr>
+          <a:xfrm>
+            <a:off x="3028950" y="4767263"/>
+            <a:ext cx="3086100" cy="274637"/>
+          </a:xfrm>
+          <a:prstGeom prst="rect">
+            <a:avLst/>
+          </a:prstGeom>
+        </p:spPr>
+        <p:txBody>
+          <a:bodyPr vert="horz" lIns="91440" tIns="45720" rIns="91440" bIns="45720" rtlCol="0" anchor="ctr"/>
+          <a:lstStyle>
+            <a:lvl1pPr algn="ctr">
+              <a:defRPr sz="1200">
+                <a:solidFill>
+                  <a:schemeClr val="tx1">
+                    <a:tint val="82000"/>
+                  </a:schemeClr>
+                </a:solidFill>
+              </a:defRPr>
+            </a:lvl1pPr>
+          </a:lstStyle>
+          <a:p>
+            <a:endParaRPr lang="en-US"/>
+          </a:p>
+        </p:txBody>
+      </p:sp>
+      <p:sp>
+        <p:nvSpPr>
+          <p:cNvPr id="6" name="Slide Number Placeholder 5">
+            <a:extLst>
+              <a:ext uri="{FF2B5EF4-FFF2-40B4-BE49-F238E27FC236}">
+                <a16:creationId xmlns:a16="http://schemas.microsoft.com/office/drawing/2014/main" id="{75173CF0-278C-ECFC-6F7A-770C47D2B0C9}"/>
+              </a:ext>
+            </a:extLst>
+          </p:cNvPr>
+          <p:cNvSpPr>
+            <a:spLocks noGrp="1"/>
+          </p:cNvSpPr>
+          <p:nvPr>
+            <p:ph type="sldNum" sz="quarter" idx="4"/>
+          </p:nvPr>
+        </p:nvSpPr>
+        <p:spPr>
+          <a:xfrm>
+            <a:off x="6457950" y="4767263"/>
+            <a:ext cx="2057400" cy="274637"/>
+          </a:xfrm>
+          <a:prstGeom prst="rect">
+            <a:avLst/>
+          </a:prstGeom>
+        </p:spPr>
+        <p:txBody>
+          <a:bodyPr vert="horz" lIns="91440" tIns="45720" rIns="91440" bIns="45720" rtlCol="0" anchor="ctr"/>
+          <a:lstStyle>
+            <a:lvl1pPr algn="r">
+              <a:defRPr sz="1200">
+                <a:solidFill>
+                  <a:schemeClr val="tx1">
+                    <a:tint val="82000"/>
+                  </a:schemeClr>
+                </a:solidFill>
+              </a:defRPr>
+            </a:lvl1pPr>
+          </a:lstStyle>
+          <a:p>
+            <a:fld id="{59854499-FE6F-F146-B363-A2BB07F446CC}" type="slidenum">
+              <a:rPr lang="en-US" smtClean="0"/>
+              <a:t>‹#›</a:t>
+            </a:fld>
+            <a:endParaRPr lang="en-US"/>
+          </a:p>
+        </p:txBody>
+      </p:sp>
     </p:spTree>
+    <p:extLst>
+      <p:ext uri="{BB962C8B-B14F-4D97-AF65-F5344CB8AC3E}">
+        <p14:creationId xmlns:p14="http://schemas.microsoft.com/office/powerpoint/2010/main" val="3361401263"/>
+      </p:ext>
+    </p:extLst>
   </p:cSld>
   <p:clrMap bg1="lt1" tx1="dk1" bg2="lt2" tx2="dk2" accent1="accent1" accent2="accent2" accent3="accent3" accent4="accent4" accent5="accent5" accent6="accent6" hlink="hlink" folHlink="folHlink"/>
   <p:sldLayoutIdLst>
-    <p:sldLayoutId id="2147483649" r:id="rId1"/>
+    <p:sldLayoutId id="2147483651" r:id="rId1"/>
+    <p:sldLayoutId id="2147483652" r:id="rId2"/>
+    <p:sldLayoutId id="2147483653" r:id="rId3"/>
+    <p:sldLayoutId id="2147483654" r:id="rId4"/>
+    <p:sldLayoutId id="2147483655" r:id="rId5"/>
+    <p:sldLayoutId id="2147483656" r:id="rId6"/>
+    <p:sldLayoutId id="2147483657" r:id="rId7"/>
+    <p:sldLayoutId id="2147483658" r:id="rId8"/>
+    <p:sldLayoutId id="2147483659" r:id="rId9"/>
+    <p:sldLayoutId id="2147483660" r:id="rId10"/>
+    <p:sldLayoutId id="2147483661" r:id="rId11"/>
+    <p:sldLayoutId id="2147483662" r:id="rId12"/>
   </p:sldLayoutIdLst>
   <p:hf hdr="0" ftr="0" dt="0"/>
   <p:txStyles>
     <p:titleStyle>
-      <a:lvl1pPr algn="ctr" defTabSz="914400" rtl="0" eaLnBrk="1" latinLnBrk="0" hangingPunct="1">
+      <a:lvl1pPr algn="l" defTabSz="914400" rtl="0" eaLnBrk="1" latinLnBrk="0" hangingPunct="1">
+        <a:lnSpc>
+          <a:spcPct val="90000"/>
+        </a:lnSpc>
         <a:spcBef>
           <a:spcPct val="0"/>
         </a:spcBef>
@@ -1608,13 +4503,16 @@
       </a:lvl1pPr>
     </p:titleStyle>
     <p:bodyStyle>
-      <a:lvl1pPr marL="342900" indent="-342900" algn="l" defTabSz="914400" rtl="0" eaLnBrk="1" latinLnBrk="0" hangingPunct="1">
+      <a:lvl1pPr marL="228600" indent="-228600" algn="l" defTabSz="914400" rtl="0" eaLnBrk="1" latinLnBrk="0" hangingPunct="1">
+        <a:lnSpc>
+          <a:spcPct val="90000"/>
+        </a:lnSpc>
         <a:spcBef>
-          <a:spcPct val="20000"/>
+          <a:spcPts val="1000"/>
         </a:spcBef>
-        <a:buFont typeface="Arial" pitchFamily="34" charset="0"/>
+        <a:buFont typeface="Arial" panose="020B0604020202020204" pitchFamily="34" charset="0"/>
         <a:buChar char="•"/>
-        <a:defRPr sz="3200" kern="1200">
+        <a:defRPr sz="2800" kern="1200">
           <a:solidFill>
             <a:schemeClr val="tx1"/>
           </a:solidFill>
@@ -1623,13 +4521,16 @@
           <a:cs typeface="+mn-cs"/>
         </a:defRPr>
       </a:lvl1pPr>
-      <a:lvl2pPr marL="742950" indent="-285750" algn="l" defTabSz="914400" rtl="0" eaLnBrk="1" latinLnBrk="0" hangingPunct="1">
+      <a:lvl2pPr marL="685800" indent="-228600" algn="l" defTabSz="914400" rtl="0" eaLnBrk="1" latinLnBrk="0" hangingPunct="1">
+        <a:lnSpc>
+          <a:spcPct val="90000"/>
+        </a:lnSpc>
         <a:spcBef>
-          <a:spcPct val="20000"/>
+          <a:spcPts val="500"/>
         </a:spcBef>
-        <a:buFont typeface="Arial" pitchFamily="34" charset="0"/>
-        <a:buChar char="–"/>
-        <a:defRPr sz="2800" kern="1200">
+        <a:buFont typeface="Arial" panose="020B0604020202020204" pitchFamily="34" charset="0"/>
+        <a:buChar char="•"/>
+        <a:defRPr sz="2400" kern="1200">
           <a:solidFill>
             <a:schemeClr val="tx1"/>
           </a:solidFill>
@@ -1639,12 +4540,15 @@
         </a:defRPr>
       </a:lvl2pPr>
       <a:lvl3pPr marL="1143000" indent="-228600" algn="l" defTabSz="914400" rtl="0" eaLnBrk="1" latinLnBrk="0" hangingPunct="1">
+        <a:lnSpc>
+          <a:spcPct val="90000"/>
+        </a:lnSpc>
         <a:spcBef>
-          <a:spcPct val="20000"/>
+          <a:spcPts val="500"/>
         </a:spcBef>
-        <a:buFont typeface="Arial" pitchFamily="34" charset="0"/>
+        <a:buFont typeface="Arial" panose="020B0604020202020204" pitchFamily="34" charset="0"/>
         <a:buChar char="•"/>
-        <a:defRPr sz="2400" kern="1200">
+        <a:defRPr sz="2000" kern="1200">
           <a:solidFill>
             <a:schemeClr val="tx1"/>
           </a:solidFill>
@@ -1654,12 +4558,15 @@
         </a:defRPr>
       </a:lvl3pPr>
       <a:lvl4pPr marL="1600200" indent="-228600" algn="l" defTabSz="914400" rtl="0" eaLnBrk="1" latinLnBrk="0" hangingPunct="1">
+        <a:lnSpc>
+          <a:spcPct val="90000"/>
+        </a:lnSpc>
         <a:spcBef>
-          <a:spcPct val="20000"/>
+          <a:spcPts val="500"/>
         </a:spcBef>
-        <a:buFont typeface="Arial" pitchFamily="34" charset="0"/>
-        <a:buChar char="–"/>
-        <a:defRPr sz="2000" kern="1200">
+        <a:buFont typeface="Arial" panose="020B0604020202020204" pitchFamily="34" charset="0"/>
+        <a:buChar char="•"/>
+        <a:defRPr sz="1800" kern="1200">
           <a:solidFill>
             <a:schemeClr val="tx1"/>
           </a:solidFill>
@@ -1669,12 +4576,15 @@
         </a:defRPr>
       </a:lvl4pPr>
       <a:lvl5pPr marL="2057400" indent="-228600" algn="l" defTabSz="914400" rtl="0" eaLnBrk="1" latinLnBrk="0" hangingPunct="1">
+        <a:lnSpc>
+          <a:spcPct val="90000"/>
+        </a:lnSpc>
         <a:spcBef>
-          <a:spcPct val="20000"/>
+          <a:spcPts val="500"/>
         </a:spcBef>
-        <a:buFont typeface="Arial" pitchFamily="34" charset="0"/>
-        <a:buChar char="»"/>
-        <a:defRPr sz="2000" kern="1200">
+        <a:buFont typeface="Arial" panose="020B0604020202020204" pitchFamily="34" charset="0"/>
+        <a:buChar char="•"/>
+        <a:defRPr sz="1800" kern="1200">
           <a:solidFill>
             <a:schemeClr val="tx1"/>
           </a:solidFill>
@@ -1684,12 +4594,15 @@
         </a:defRPr>
       </a:lvl5pPr>
       <a:lvl6pPr marL="2514600" indent="-228600" algn="l" defTabSz="914400" rtl="0" eaLnBrk="1" latinLnBrk="0" hangingPunct="1">
+        <a:lnSpc>
+          <a:spcPct val="90000"/>
+        </a:lnSpc>
         <a:spcBef>
-          <a:spcPct val="20000"/>
+          <a:spcPts val="500"/>
         </a:spcBef>
-        <a:buFont typeface="Arial" pitchFamily="34" charset="0"/>
+        <a:buFont typeface="Arial" panose="020B0604020202020204" pitchFamily="34" charset="0"/>
         <a:buChar char="•"/>
-        <a:defRPr sz="2000" kern="1200">
+        <a:defRPr sz="1800" kern="1200">
           <a:solidFill>
             <a:schemeClr val="tx1"/>
           </a:solidFill>
@@ -1699,12 +4612,15 @@
         </a:defRPr>
       </a:lvl6pPr>
       <a:lvl7pPr marL="2971800" indent="-228600" algn="l" defTabSz="914400" rtl="0" eaLnBrk="1" latinLnBrk="0" hangingPunct="1">
+        <a:lnSpc>
+          <a:spcPct val="90000"/>
+        </a:lnSpc>
         <a:spcBef>
-          <a:spcPct val="20000"/>
+          <a:spcPts val="500"/>
         </a:spcBef>
-        <a:buFont typeface="Arial" pitchFamily="34" charset="0"/>
+        <a:buFont typeface="Arial" panose="020B0604020202020204" pitchFamily="34" charset="0"/>
         <a:buChar char="•"/>
-        <a:defRPr sz="2000" kern="1200">
+        <a:defRPr sz="1800" kern="1200">
           <a:solidFill>
             <a:schemeClr val="tx1"/>
           </a:solidFill>
@@ -1714,12 +4630,15 @@
         </a:defRPr>
       </a:lvl7pPr>
       <a:lvl8pPr marL="3429000" indent="-228600" algn="l" defTabSz="914400" rtl="0" eaLnBrk="1" latinLnBrk="0" hangingPunct="1">
+        <a:lnSpc>
+          <a:spcPct val="90000"/>
+        </a:lnSpc>
         <a:spcBef>
-          <a:spcPct val="20000"/>
+          <a:spcPts val="500"/>
         </a:spcBef>
-        <a:buFont typeface="Arial" pitchFamily="34" charset="0"/>
+        <a:buFont typeface="Arial" panose="020B0604020202020204" pitchFamily="34" charset="0"/>
         <a:buChar char="•"/>
-        <a:defRPr sz="2000" kern="1200">
+        <a:defRPr sz="1800" kern="1200">
           <a:solidFill>
             <a:schemeClr val="tx1"/>
           </a:solidFill>
@@ -1729,12 +4648,15 @@
         </a:defRPr>
       </a:lvl8pPr>
       <a:lvl9pPr marL="3886200" indent="-228600" algn="l" defTabSz="914400" rtl="0" eaLnBrk="1" latinLnBrk="0" hangingPunct="1">
+        <a:lnSpc>
+          <a:spcPct val="90000"/>
+        </a:lnSpc>
         <a:spcBef>
-          <a:spcPct val="20000"/>
+          <a:spcPts val="500"/>
         </a:spcBef>
-        <a:buFont typeface="Arial" pitchFamily="34" charset="0"/>
+        <a:buFont typeface="Arial" panose="020B0604020202020204" pitchFamily="34" charset="0"/>
         <a:buChar char="•"/>
-        <a:defRPr sz="2000" kern="1200">
+        <a:defRPr sz="1800" kern="1200">
           <a:solidFill>
             <a:schemeClr val="tx1"/>
           </a:solidFill>
@@ -2304,6 +5226,35 @@
           </a:prstGeom>
         </p:spPr>
       </p:pic>
+      <p:sp>
+        <p:nvSpPr>
+          <p:cNvPr id="3" name="Slide Number Placeholder 2">
+            <a:extLst>
+              <a:ext uri="{FF2B5EF4-FFF2-40B4-BE49-F238E27FC236}">
+                <a16:creationId xmlns:a16="http://schemas.microsoft.com/office/drawing/2014/main" id="{DC41A282-8239-8170-13DB-9D6D9E2E951B}"/>
+              </a:ext>
+            </a:extLst>
+          </p:cNvPr>
+          <p:cNvSpPr>
+            <a:spLocks noGrp="1"/>
+          </p:cNvSpPr>
+          <p:nvPr>
+            <p:ph type="sldNum" sz="quarter" idx="12"/>
+          </p:nvPr>
+        </p:nvSpPr>
+        <p:spPr/>
+        <p:txBody>
+          <a:bodyPr/>
+          <a:lstStyle/>
+          <a:p>
+            <a:fld id="{59854499-FE6F-F146-B363-A2BB07F446CC}" type="slidenum">
+              <a:rPr lang="en-US" smtClean="0"/>
+              <a:t>10</a:t>
+            </a:fld>
+            <a:endParaRPr lang="en-US"/>
+          </a:p>
+        </p:txBody>
+      </p:sp>
     </p:spTree>
   </p:cSld>
   <p:clrMapOvr>
@@ -2503,6 +5454,35 @@
           </a:p>
         </p:txBody>
       </p:sp>
+      <p:sp>
+        <p:nvSpPr>
+          <p:cNvPr id="4" name="Slide Number Placeholder 3">
+            <a:extLst>
+              <a:ext uri="{FF2B5EF4-FFF2-40B4-BE49-F238E27FC236}">
+                <a16:creationId xmlns:a16="http://schemas.microsoft.com/office/drawing/2014/main" id="{FFF08A5D-15A6-4F53-1DC3-F60324246A13}"/>
+              </a:ext>
+            </a:extLst>
+          </p:cNvPr>
+          <p:cNvSpPr>
+            <a:spLocks noGrp="1"/>
+          </p:cNvSpPr>
+          <p:nvPr>
+            <p:ph type="sldNum" sz="quarter" idx="12"/>
+          </p:nvPr>
+        </p:nvSpPr>
+        <p:spPr/>
+        <p:txBody>
+          <a:bodyPr/>
+          <a:lstStyle/>
+          <a:p>
+            <a:fld id="{59854499-FE6F-F146-B363-A2BB07F446CC}" type="slidenum">
+              <a:rPr lang="en-US" smtClean="0"/>
+              <a:t>11</a:t>
+            </a:fld>
+            <a:endParaRPr lang="en-US"/>
+          </a:p>
+        </p:txBody>
+      </p:sp>
     </p:spTree>
   </p:cSld>
   <p:clrMapOvr>
@@ -2609,7 +5589,7 @@
                   <a:schemeClr val="bg1"/>
                 </a:solidFill>
               </a:rPr>
-              <a:t>Across nine tests, no broad evidence of degraded NWS warning performance in 2025.</a:t>
+              <a:t>Across nine tests, no broad evidence that NWS warning performance changed in 2025.</a:t>
             </a:r>
           </a:p>
           <a:p>
@@ -3077,6 +6057,35 @@
               <a:t>Bigger, more precautionary polygons would be consistent with more warnings that did not verify. Descriptive, not causal.</a:t>
             </a:r>
             <a:endParaRPr lang="en-US" sz="1100" i="1" dirty="0"/>
+          </a:p>
+        </p:txBody>
+      </p:sp>
+      <p:sp>
+        <p:nvSpPr>
+          <p:cNvPr id="2" name="Slide Number Placeholder 1">
+            <a:extLst>
+              <a:ext uri="{FF2B5EF4-FFF2-40B4-BE49-F238E27FC236}">
+                <a16:creationId xmlns:a16="http://schemas.microsoft.com/office/drawing/2014/main" id="{0200FAB6-57C2-1099-37CA-223A5008EF8C}"/>
+              </a:ext>
+            </a:extLst>
+          </p:cNvPr>
+          <p:cNvSpPr>
+            <a:spLocks noGrp="1"/>
+          </p:cNvSpPr>
+          <p:nvPr>
+            <p:ph type="sldNum" sz="quarter" idx="12"/>
+          </p:nvPr>
+        </p:nvSpPr>
+        <p:spPr/>
+        <p:txBody>
+          <a:bodyPr/>
+          <a:lstStyle/>
+          <a:p>
+            <a:fld id="{59854499-FE6F-F146-B363-A2BB07F446CC}" type="slidenum">
+              <a:rPr lang="en-US" smtClean="0"/>
+              <a:t>14</a:t>
+            </a:fld>
+            <a:endParaRPr lang="en-US"/>
           </a:p>
         </p:txBody>
       </p:sp>
@@ -3283,6 +6292,35 @@
               <a:rPr lang="en-US" sz="1100" i="1" dirty="0"/>
               <a:t>Year-10 severe-storm reports drew from a different regional mix than baseline (red = larger 2025 share).</a:t>
             </a:r>
+          </a:p>
+        </p:txBody>
+      </p:sp>
+      <p:sp>
+        <p:nvSpPr>
+          <p:cNvPr id="2" name="Slide Number Placeholder 1">
+            <a:extLst>
+              <a:ext uri="{FF2B5EF4-FFF2-40B4-BE49-F238E27FC236}">
+                <a16:creationId xmlns:a16="http://schemas.microsoft.com/office/drawing/2014/main" id="{D472872B-3F9D-B0BA-0A0E-DC3484F6C2C2}"/>
+              </a:ext>
+            </a:extLst>
+          </p:cNvPr>
+          <p:cNvSpPr>
+            <a:spLocks noGrp="1"/>
+          </p:cNvSpPr>
+          <p:nvPr>
+            <p:ph type="sldNum" sz="quarter" idx="12"/>
+          </p:nvPr>
+        </p:nvSpPr>
+        <p:spPr/>
+        <p:txBody>
+          <a:bodyPr/>
+          <a:lstStyle/>
+          <a:p>
+            <a:fld id="{59854499-FE6F-F146-B363-A2BB07F446CC}" type="slidenum">
+              <a:rPr lang="en-US" smtClean="0"/>
+              <a:t>15</a:t>
+            </a:fld>
+            <a:endParaRPr lang="en-US"/>
           </a:p>
         </p:txBody>
       </p:sp>
@@ -3715,6 +6753,35 @@
           <a:p>
             <a:pPr marL="115888" indent="-115888"/>
             <a:endParaRPr lang="en-US" sz="800" dirty="0"/>
+          </a:p>
+        </p:txBody>
+      </p:sp>
+      <p:sp>
+        <p:nvSpPr>
+          <p:cNvPr id="6" name="Slide Number Placeholder 5">
+            <a:extLst>
+              <a:ext uri="{FF2B5EF4-FFF2-40B4-BE49-F238E27FC236}">
+                <a16:creationId xmlns:a16="http://schemas.microsoft.com/office/drawing/2014/main" id="{952BA8D8-B698-9FC3-6300-2FCD89573C71}"/>
+              </a:ext>
+            </a:extLst>
+          </p:cNvPr>
+          <p:cNvSpPr>
+            <a:spLocks noGrp="1"/>
+          </p:cNvSpPr>
+          <p:nvPr>
+            <p:ph type="sldNum" sz="quarter" idx="12"/>
+          </p:nvPr>
+        </p:nvSpPr>
+        <p:spPr/>
+        <p:txBody>
+          <a:bodyPr/>
+          <a:lstStyle/>
+          <a:p>
+            <a:fld id="{59854499-FE6F-F146-B363-A2BB07F446CC}" type="slidenum">
+              <a:rPr lang="en-US" smtClean="0"/>
+              <a:t>2</a:t>
+            </a:fld>
+            <a:endParaRPr lang="en-US"/>
           </a:p>
         </p:txBody>
       </p:sp>
@@ -4058,6 +7125,35 @@
           </a:p>
         </p:txBody>
       </p:sp>
+      <p:sp>
+        <p:nvSpPr>
+          <p:cNvPr id="4" name="Slide Number Placeholder 3">
+            <a:extLst>
+              <a:ext uri="{FF2B5EF4-FFF2-40B4-BE49-F238E27FC236}">
+                <a16:creationId xmlns:a16="http://schemas.microsoft.com/office/drawing/2014/main" id="{04781C7C-4C65-CFD8-4B78-B8128263A2C5}"/>
+              </a:ext>
+            </a:extLst>
+          </p:cNvPr>
+          <p:cNvSpPr>
+            <a:spLocks noGrp="1"/>
+          </p:cNvSpPr>
+          <p:nvPr>
+            <p:ph type="sldNum" sz="quarter" idx="12"/>
+          </p:nvPr>
+        </p:nvSpPr>
+        <p:spPr/>
+        <p:txBody>
+          <a:bodyPr/>
+          <a:lstStyle/>
+          <a:p>
+            <a:fld id="{59854499-FE6F-F146-B363-A2BB07F446CC}" type="slidenum">
+              <a:rPr lang="en-US" smtClean="0"/>
+              <a:t>3</a:t>
+            </a:fld>
+            <a:endParaRPr lang="en-US"/>
+          </a:p>
+        </p:txBody>
+      </p:sp>
     </p:spTree>
   </p:cSld>
   <p:clrMapOvr>
@@ -4288,6 +7384,35 @@
           </a:p>
         </p:txBody>
       </p:sp>
+      <p:sp>
+        <p:nvSpPr>
+          <p:cNvPr id="3" name="Slide Number Placeholder 2">
+            <a:extLst>
+              <a:ext uri="{FF2B5EF4-FFF2-40B4-BE49-F238E27FC236}">
+                <a16:creationId xmlns:a16="http://schemas.microsoft.com/office/drawing/2014/main" id="{1FCE702F-190E-6EE2-E619-59A7D6E6E5B6}"/>
+              </a:ext>
+            </a:extLst>
+          </p:cNvPr>
+          <p:cNvSpPr>
+            <a:spLocks noGrp="1"/>
+          </p:cNvSpPr>
+          <p:nvPr>
+            <p:ph type="sldNum" sz="quarter" idx="12"/>
+          </p:nvPr>
+        </p:nvSpPr>
+        <p:spPr/>
+        <p:txBody>
+          <a:bodyPr/>
+          <a:lstStyle/>
+          <a:p>
+            <a:fld id="{59854499-FE6F-F146-B363-A2BB07F446CC}" type="slidenum">
+              <a:rPr lang="en-US" smtClean="0"/>
+              <a:t>4</a:t>
+            </a:fld>
+            <a:endParaRPr lang="en-US"/>
+          </a:p>
+        </p:txBody>
+      </p:sp>
     </p:spTree>
   </p:cSld>
   <p:clrMapOvr>
@@ -4553,6 +7678,35 @@
           </a:p>
         </p:txBody>
       </p:sp>
+      <p:sp>
+        <p:nvSpPr>
+          <p:cNvPr id="3" name="Slide Number Placeholder 2">
+            <a:extLst>
+              <a:ext uri="{FF2B5EF4-FFF2-40B4-BE49-F238E27FC236}">
+                <a16:creationId xmlns:a16="http://schemas.microsoft.com/office/drawing/2014/main" id="{1A2FD1BA-D8E8-F6B1-34E5-9F1A103E143B}"/>
+              </a:ext>
+            </a:extLst>
+          </p:cNvPr>
+          <p:cNvSpPr>
+            <a:spLocks noGrp="1"/>
+          </p:cNvSpPr>
+          <p:nvPr>
+            <p:ph type="sldNum" sz="quarter" idx="12"/>
+          </p:nvPr>
+        </p:nvSpPr>
+        <p:spPr/>
+        <p:txBody>
+          <a:bodyPr/>
+          <a:lstStyle/>
+          <a:p>
+            <a:fld id="{59854499-FE6F-F146-B363-A2BB07F446CC}" type="slidenum">
+              <a:rPr lang="en-US" smtClean="0"/>
+              <a:t>5</a:t>
+            </a:fld>
+            <a:endParaRPr lang="en-US"/>
+          </a:p>
+        </p:txBody>
+      </p:sp>
     </p:spTree>
     <p:extLst>
       <p:ext uri="{BB962C8B-B14F-4D97-AF65-F5344CB8AC3E}">
@@ -4810,6 +7964,35 @@
             <a:endParaRPr lang="en-US" sz="1100" b="0" dirty="0">
               <a:effectLst/>
             </a:endParaRPr>
+          </a:p>
+        </p:txBody>
+      </p:sp>
+      <p:sp>
+        <p:nvSpPr>
+          <p:cNvPr id="3" name="Slide Number Placeholder 2">
+            <a:extLst>
+              <a:ext uri="{FF2B5EF4-FFF2-40B4-BE49-F238E27FC236}">
+                <a16:creationId xmlns:a16="http://schemas.microsoft.com/office/drawing/2014/main" id="{714822E3-00B2-CCCA-F68F-E9F81FB2A7EA}"/>
+              </a:ext>
+            </a:extLst>
+          </p:cNvPr>
+          <p:cNvSpPr>
+            <a:spLocks noGrp="1"/>
+          </p:cNvSpPr>
+          <p:nvPr>
+            <p:ph type="sldNum" sz="quarter" idx="12"/>
+          </p:nvPr>
+        </p:nvSpPr>
+        <p:spPr/>
+        <p:txBody>
+          <a:bodyPr/>
+          <a:lstStyle/>
+          <a:p>
+            <a:fld id="{59854499-FE6F-F146-B363-A2BB07F446CC}" type="slidenum">
+              <a:rPr lang="en-US" smtClean="0"/>
+              <a:t>6</a:t>
+            </a:fld>
+            <a:endParaRPr lang="en-US"/>
           </a:p>
         </p:txBody>
       </p:sp>
@@ -5060,6 +8243,35 @@
               <a:t>Each type has a distinct seasonal signature. The shaded bands mark four engineered seasons; note they break on the 27th of February, May, August, and November (anchored to the treatment anniversary), not on the 1st, so the boundaries sit slightly past each month tick and Winter wraps both ends of the year.</a:t>
             </a:r>
             <a:endParaRPr lang="en-US" sz="1100" dirty="0"/>
+          </a:p>
+        </p:txBody>
+      </p:sp>
+      <p:sp>
+        <p:nvSpPr>
+          <p:cNvPr id="6" name="Slide Number Placeholder 5">
+            <a:extLst>
+              <a:ext uri="{FF2B5EF4-FFF2-40B4-BE49-F238E27FC236}">
+                <a16:creationId xmlns:a16="http://schemas.microsoft.com/office/drawing/2014/main" id="{637D2DAB-21E3-F83E-5E2D-5C58EEA881D0}"/>
+              </a:ext>
+            </a:extLst>
+          </p:cNvPr>
+          <p:cNvSpPr>
+            <a:spLocks noGrp="1"/>
+          </p:cNvSpPr>
+          <p:nvPr>
+            <p:ph type="sldNum" sz="quarter" idx="12"/>
+          </p:nvPr>
+        </p:nvSpPr>
+        <p:spPr/>
+        <p:txBody>
+          <a:bodyPr/>
+          <a:lstStyle/>
+          <a:p>
+            <a:fld id="{59854499-FE6F-F146-B363-A2BB07F446CC}" type="slidenum">
+              <a:rPr lang="en-US" smtClean="0"/>
+              <a:t>7</a:t>
+            </a:fld>
+            <a:endParaRPr lang="en-US"/>
           </a:p>
         </p:txBody>
       </p:sp>
@@ -6632,6 +9844,35 @@
           </a:p>
         </p:txBody>
       </p:sp>
+      <p:sp>
+        <p:nvSpPr>
+          <p:cNvPr id="3" name="Slide Number Placeholder 2">
+            <a:extLst>
+              <a:ext uri="{FF2B5EF4-FFF2-40B4-BE49-F238E27FC236}">
+                <a16:creationId xmlns:a16="http://schemas.microsoft.com/office/drawing/2014/main" id="{E21AD1E7-0F95-3383-B4AA-8BBA6C985007}"/>
+              </a:ext>
+            </a:extLst>
+          </p:cNvPr>
+          <p:cNvSpPr>
+            <a:spLocks noGrp="1"/>
+          </p:cNvSpPr>
+          <p:nvPr>
+            <p:ph type="sldNum" sz="quarter" idx="12"/>
+          </p:nvPr>
+        </p:nvSpPr>
+        <p:spPr/>
+        <p:txBody>
+          <a:bodyPr/>
+          <a:lstStyle/>
+          <a:p>
+            <a:fld id="{59854499-FE6F-F146-B363-A2BB07F446CC}" type="slidenum">
+              <a:rPr lang="en-US" smtClean="0"/>
+              <a:t>8</a:t>
+            </a:fld>
+            <a:endParaRPr lang="en-US"/>
+          </a:p>
+        </p:txBody>
+      </p:sp>
     </p:spTree>
   </p:cSld>
   <p:clrMapOvr>
@@ -6892,6 +10133,35 @@
           </a:p>
         </p:txBody>
       </p:sp>
+      <p:sp>
+        <p:nvSpPr>
+          <p:cNvPr id="3" name="Slide Number Placeholder 2">
+            <a:extLst>
+              <a:ext uri="{FF2B5EF4-FFF2-40B4-BE49-F238E27FC236}">
+                <a16:creationId xmlns:a16="http://schemas.microsoft.com/office/drawing/2014/main" id="{7AE0EAC6-B879-1695-A249-F490593F204D}"/>
+              </a:ext>
+            </a:extLst>
+          </p:cNvPr>
+          <p:cNvSpPr>
+            <a:spLocks noGrp="1"/>
+          </p:cNvSpPr>
+          <p:nvPr>
+            <p:ph type="sldNum" sz="quarter" idx="12"/>
+          </p:nvPr>
+        </p:nvSpPr>
+        <p:spPr/>
+        <p:txBody>
+          <a:bodyPr/>
+          <a:lstStyle/>
+          <a:p>
+            <a:fld id="{59854499-FE6F-F146-B363-A2BB07F446CC}" type="slidenum">
+              <a:rPr lang="en-US" smtClean="0"/>
+              <a:t>9</a:t>
+            </a:fld>
+            <a:endParaRPr lang="en-US"/>
+          </a:p>
+        </p:txBody>
+      </p:sp>
     </p:spTree>
   </p:cSld>
   <p:clrMapOvr>
@@ -6901,7 +10171,7 @@
 </file>
 
 <file path=ppt/theme/theme1.xml><?xml version="1.0" encoding="utf-8"?>
-<a:theme xmlns:a="http://schemas.openxmlformats.org/drawingml/2006/main" name="Office Theme">
+<a:theme xmlns:a="http://schemas.openxmlformats.org/drawingml/2006/main" name="Custom Design">
   <a:themeElements>
     <a:clrScheme name="Office">
       <a:dk1>
@@ -6911,39 +10181,39 @@
         <a:sysClr val="window" lastClr="FFFFFF"/>
       </a:lt1>
       <a:dk2>
-        <a:srgbClr val="44546A"/>
+        <a:srgbClr val="0E2841"/>
       </a:dk2>
       <a:lt2>
-        <a:srgbClr val="E7E6E6"/>
+        <a:srgbClr val="E8E8E8"/>
       </a:lt2>
       <a:accent1>
-        <a:srgbClr val="4472C4"/>
+        <a:srgbClr val="156082"/>
       </a:accent1>
       <a:accent2>
-        <a:srgbClr val="ED7D31"/>
+        <a:srgbClr val="E97132"/>
       </a:accent2>
       <a:accent3>
-        <a:srgbClr val="A5A5A5"/>
+        <a:srgbClr val="196B24"/>
       </a:accent3>
       <a:accent4>
-        <a:srgbClr val="FFC000"/>
+        <a:srgbClr val="0F9ED5"/>
       </a:accent4>
       <a:accent5>
-        <a:srgbClr val="5B9BD5"/>
+        <a:srgbClr val="A02B93"/>
       </a:accent5>
       <a:accent6>
-        <a:srgbClr val="70AD47"/>
+        <a:srgbClr val="4EA72E"/>
       </a:accent6>
       <a:hlink>
-        <a:srgbClr val="0563C1"/>
+        <a:srgbClr val="467886"/>
       </a:hlink>
       <a:folHlink>
-        <a:srgbClr val="954F72"/>
+        <a:srgbClr val="96607D"/>
       </a:folHlink>
     </a:clrScheme>
     <a:fontScheme name="Office">
       <a:majorFont>
-        <a:latin typeface="Calibri Light" panose="020F0302020204030204"/>
+        <a:latin typeface="Aptos Display" panose="02110004020202020204"/>
         <a:ea typeface=""/>
         <a:cs typeface=""/>
         <a:font script="Jpan" typeface="游ゴシック Light"/>
@@ -6995,7 +10265,7 @@
         <a:font script="Tfng" typeface="Ebrima"/>
       </a:majorFont>
       <a:minorFont>
-        <a:latin typeface="Calibri" panose="020F0502020204030204"/>
+        <a:latin typeface="Aptos" panose="02110004020202020204"/>
         <a:ea typeface=""/>
         <a:cs typeface=""/>
         <a:font script="Jpan" typeface="游ゴシック"/>
@@ -7106,13 +10376,6 @@
         </a:gradFill>
       </a:fillStyleLst>
       <a:lnStyleLst>
-        <a:ln w="6350" cap="flat" cmpd="sng" algn="ctr">
-          <a:solidFill>
-            <a:schemeClr val="phClr"/>
-          </a:solidFill>
-          <a:prstDash val="solid"/>
-          <a:miter lim="800000"/>
-        </a:ln>
         <a:ln w="12700" cap="flat" cmpd="sng" algn="ctr">
           <a:solidFill>
             <a:schemeClr val="phClr"/>
@@ -7121,6 +10384,13 @@
           <a:miter lim="800000"/>
         </a:ln>
         <a:ln w="19050" cap="flat" cmpd="sng" algn="ctr">
+          <a:solidFill>
+            <a:schemeClr val="phClr"/>
+          </a:solidFill>
+          <a:prstDash val="solid"/>
+          <a:miter lim="800000"/>
+        </a:ln>
+        <a:ln w="25400" cap="flat" cmpd="sng" algn="ctr">
           <a:solidFill>
             <a:schemeClr val="phClr"/>
           </a:solidFill>
@@ -7185,11 +10455,31 @@
       </a:bgFillStyleLst>
     </a:fmtScheme>
   </a:themeElements>
-  <a:objectDefaults/>
+  <a:objectDefaults>
+    <a:lnDef>
+      <a:spPr/>
+      <a:bodyPr/>
+      <a:lstStyle/>
+      <a:style>
+        <a:lnRef idx="2">
+          <a:schemeClr val="accent1"/>
+        </a:lnRef>
+        <a:fillRef idx="0">
+          <a:schemeClr val="accent1"/>
+        </a:fillRef>
+        <a:effectRef idx="1">
+          <a:schemeClr val="accent1"/>
+        </a:effectRef>
+        <a:fontRef idx="minor">
+          <a:schemeClr val="tx1"/>
+        </a:fontRef>
+      </a:style>
+    </a:lnDef>
+  </a:objectDefaults>
   <a:extraClrSchemeLst/>
   <a:extLst>
     <a:ext uri="{05A4C25C-085E-4340-85A3-A5531E510DB2}">
-      <thm15:themeFamily xmlns:thm15="http://schemas.microsoft.com/office/thememl/2012/main" name="Office Theme" id="{62F939B6-93AF-4DB8-9C6B-D6C7DFDC589F}" vid="{4A3C46E8-61CC-4603-A589-7422A47A8E4A}"/>
+      <thm15:themeFamily xmlns:thm15="http://schemas.microsoft.com/office/thememl/2012/main" name="Office Theme" id="{2E142A2C-CD16-42D6-873A-C26D2A0506FA}" vid="{1BDDFF52-6CD6-40A5-AB3C-68EB2F1E4D0A}"/>
     </a:ext>
   </a:extLst>
 </a:theme>

--- a/report/MSDS692 Practicum I Craig Rudman.pptx
+++ b/report/MSDS692 Practicum I Craig Rudman.pptx
@@ -5,7 +5,7 @@
     <p:sldMasterId id="2147483650" r:id="rId1"/>
   </p:sldMasterIdLst>
   <p:notesMasterIdLst>
-    <p:notesMasterId r:id="rId17"/>
+    <p:notesMasterId r:id="rId15"/>
   </p:notesMasterIdLst>
   <p:sldIdLst>
     <p:sldId id="256" r:id="rId2"/>
@@ -19,10 +19,8 @@
     <p:sldId id="261" r:id="rId10"/>
     <p:sldId id="264" r:id="rId11"/>
     <p:sldId id="265" r:id="rId12"/>
-    <p:sldId id="266" r:id="rId13"/>
-    <p:sldId id="270" r:id="rId14"/>
-    <p:sldId id="271" r:id="rId15"/>
-    <p:sldId id="272" r:id="rId16"/>
+    <p:sldId id="271" r:id="rId13"/>
+    <p:sldId id="266" r:id="rId14"/>
   </p:sldIdLst>
   <p:sldSz cx="9144000" cy="5143500" type="screen16x9"/>
   <p:notesSz cx="5143500" cy="9144000"/>
@@ -533,7 +531,21 @@
             <p:ph type="sldImg"/>
           </p:nvPr>
         </p:nvSpPr>
-        <p:spPr/>
+        <p:spPr>
+          <a:xfrm>
+            <a:off x="-171450" y="1143000"/>
+            <a:ext cx="5486400" cy="3086100"/>
+          </a:xfrm>
+          <a:prstGeom prst="rect">
+            <a:avLst/>
+          </a:prstGeom>
+          <a:noFill/>
+          <a:ln w="12700">
+            <a:solidFill>
+              <a:prstClr val="black"/>
+            </a:solidFill>
+          </a:ln>
+        </p:spPr>
       </p:sp>
       <p:sp>
         <p:nvSpPr>
@@ -545,42 +557,27 @@
             <p:ph type="body" idx="1"/>
           </p:nvPr>
         </p:nvSpPr>
-        <p:spPr/>
+        <p:spPr>
+          <a:xfrm>
+            <a:off x="514350" y="4400550"/>
+            <a:ext cx="4114800" cy="3600450"/>
+          </a:xfrm>
+          <a:prstGeom prst="rect">
+            <a:avLst/>
+          </a:prstGeom>
+        </p:spPr>
         <p:txBody>
           <a:bodyPr/>
           <a:lstStyle/>
           <a:p>
             <a:endParaRPr lang="en-US" dirty="0"/>
-          </a:p>
-        </p:txBody>
-      </p:sp>
-      <p:sp>
-        <p:nvSpPr>
-          <p:cNvPr id="4" name="Slide Number Placeholder 3"/>
-          <p:cNvSpPr>
-            <a:spLocks noGrp="1"/>
-          </p:cNvSpPr>
-          <p:nvPr>
-            <p:ph type="sldNum" sz="quarter" idx="10"/>
-          </p:nvPr>
-        </p:nvSpPr>
-        <p:spPr/>
-        <p:txBody>
-          <a:bodyPr/>
-          <a:lstStyle/>
-          <a:p>
-            <a:fld id="{F7021451-1387-4CA6-816F-3879F97B5CBC}" type="slidenum">
-              <a:rPr lang="en-US"/>
-              <a:t>12</a:t>
-            </a:fld>
-            <a:endParaRPr lang="en-US"/>
           </a:p>
         </p:txBody>
       </p:sp>
     </p:spTree>
     <p:extLst>
       <p:ext uri="{BB962C8B-B14F-4D97-AF65-F5344CB8AC3E}">
-        <p14:creationId xmlns:p14="http://schemas.microsoft.com/office/powerpoint/2010/main" val="1024086991"/>
+        <p14:creationId xmlns:p14="http://schemas.microsoft.com/office/powerpoint/2010/main" val="84385880"/>
       </p:ext>
     </p:extLst>
   </p:cSld>
@@ -617,21 +614,7 @@
             <p:ph type="sldImg"/>
           </p:nvPr>
         </p:nvSpPr>
-        <p:spPr>
-          <a:xfrm>
-            <a:off x="-171450" y="1143000"/>
-            <a:ext cx="5486400" cy="3086100"/>
-          </a:xfrm>
-          <a:prstGeom prst="rect">
-            <a:avLst/>
-          </a:prstGeom>
-          <a:noFill/>
-          <a:ln w="12700">
-            <a:solidFill>
-              <a:prstClr val="black"/>
-            </a:solidFill>
-          </a:ln>
-        </p:spPr>
+        <p:spPr/>
       </p:sp>
       <p:sp>
         <p:nvSpPr>
@@ -643,110 +626,42 @@
             <p:ph type="body" idx="1"/>
           </p:nvPr>
         </p:nvSpPr>
-        <p:spPr>
-          <a:xfrm>
-            <a:off x="514350" y="4400550"/>
-            <a:ext cx="4114800" cy="3600450"/>
-          </a:xfrm>
-          <a:prstGeom prst="rect">
-            <a:avLst/>
-          </a:prstGeom>
-        </p:spPr>
+        <p:spPr/>
         <p:txBody>
           <a:bodyPr/>
           <a:lstStyle/>
           <a:p>
             <a:endParaRPr lang="en-US" dirty="0"/>
+          </a:p>
+        </p:txBody>
+      </p:sp>
+      <p:sp>
+        <p:nvSpPr>
+          <p:cNvPr id="4" name="Slide Number Placeholder 3"/>
+          <p:cNvSpPr>
+            <a:spLocks noGrp="1"/>
+          </p:cNvSpPr>
+          <p:nvPr>
+            <p:ph type="sldNum" sz="quarter" idx="10"/>
+          </p:nvPr>
+        </p:nvSpPr>
+        <p:spPr/>
+        <p:txBody>
+          <a:bodyPr/>
+          <a:lstStyle/>
+          <a:p>
+            <a:fld id="{F7021451-1387-4CA6-816F-3879F97B5CBC}" type="slidenum">
+              <a:rPr lang="en-US"/>
+              <a:t>13</a:t>
+            </a:fld>
+            <a:endParaRPr lang="en-US"/>
           </a:p>
         </p:txBody>
       </p:sp>
     </p:spTree>
     <p:extLst>
       <p:ext uri="{BB962C8B-B14F-4D97-AF65-F5344CB8AC3E}">
-        <p14:creationId xmlns:p14="http://schemas.microsoft.com/office/powerpoint/2010/main" val="2326428197"/>
-      </p:ext>
-    </p:extLst>
-  </p:cSld>
-  <p:clrMapOvr>
-    <a:masterClrMapping/>
-  </p:clrMapOvr>
-</p:notes>
-</file>
-
-<file path=ppt/notesSlides/notesSlide14.xml><?xml version="1.0" encoding="utf-8"?>
-<p:notes xmlns:a="http://schemas.openxmlformats.org/drawingml/2006/main" xmlns:r="http://schemas.openxmlformats.org/officeDocument/2006/relationships" xmlns:p="http://schemas.openxmlformats.org/presentationml/2006/main">
-  <p:cSld>
-    <p:spTree>
-      <p:nvGrpSpPr>
-        <p:cNvPr id="1" name=""/>
-        <p:cNvGrpSpPr/>
-        <p:nvPr/>
-      </p:nvGrpSpPr>
-      <p:grpSpPr>
-        <a:xfrm>
-          <a:off x="0" y="0"/>
-          <a:ext cx="0" cy="0"/>
-          <a:chOff x="0" y="0"/>
-          <a:chExt cx="0" cy="0"/>
-        </a:xfrm>
-      </p:grpSpPr>
-      <p:sp>
-        <p:nvSpPr>
-          <p:cNvPr id="2" name="Slide Image Placeholder 1"/>
-          <p:cNvSpPr>
-            <a:spLocks noGrp="1" noRot="1" noChangeAspect="1"/>
-          </p:cNvSpPr>
-          <p:nvPr>
-            <p:ph type="sldImg"/>
-          </p:nvPr>
-        </p:nvSpPr>
-        <p:spPr>
-          <a:xfrm>
-            <a:off x="-171450" y="1143000"/>
-            <a:ext cx="5486400" cy="3086100"/>
-          </a:xfrm>
-          <a:prstGeom prst="rect">
-            <a:avLst/>
-          </a:prstGeom>
-          <a:noFill/>
-          <a:ln w="12700">
-            <a:solidFill>
-              <a:prstClr val="black"/>
-            </a:solidFill>
-          </a:ln>
-        </p:spPr>
-      </p:sp>
-      <p:sp>
-        <p:nvSpPr>
-          <p:cNvPr id="3" name="Notes Placeholder 2"/>
-          <p:cNvSpPr>
-            <a:spLocks noGrp="1"/>
-          </p:cNvSpPr>
-          <p:nvPr>
-            <p:ph type="body" idx="1"/>
-          </p:nvPr>
-        </p:nvSpPr>
-        <p:spPr>
-          <a:xfrm>
-            <a:off x="514350" y="4400550"/>
-            <a:ext cx="4114800" cy="3600450"/>
-          </a:xfrm>
-          <a:prstGeom prst="rect">
-            <a:avLst/>
-          </a:prstGeom>
-        </p:spPr>
-        <p:txBody>
-          <a:bodyPr/>
-          <a:lstStyle/>
-          <a:p>
-            <a:endParaRPr lang="en-US" dirty="0"/>
-          </a:p>
-        </p:txBody>
-      </p:sp>
-    </p:spTree>
-    <p:extLst>
-      <p:ext uri="{BB962C8B-B14F-4D97-AF65-F5344CB8AC3E}">
-        <p14:creationId xmlns:p14="http://schemas.microsoft.com/office/powerpoint/2010/main" val="1674040013"/>
+        <p14:creationId xmlns:p14="http://schemas.microsoft.com/office/powerpoint/2010/main" val="1024086991"/>
       </p:ext>
     </p:extLst>
   </p:cSld>
@@ -799,6 +714,12 @@
         <p:txBody>
           <a:bodyPr/>
           <a:lstStyle/>
+          <a:p>
+            <a:r>
+              <a:rPr lang="en-US" dirty="0"/>
+              <a:t>This study examines whether warning performance changed following widely reported staffing reductions at the National Oceanic and Atmospheric Administration (NOAA) and the National Weather Service (NWS) beginning in February 2025. Using publicly available verification data from the Iowa Environmental Mesonet (IEM) Cow application, we compare probability of detection (POD), false alarm ratio (FAR), and lead time in advance (LTA) across 116 of the the agency's 122 Weather Forecast Offices (WFOs) between a baseline period of 2016 to 2024 and the post-treatment year of 2025. A statistically significant change in performance would be consistent with the hypothesis that staffing reductions affected warning quality; the absence of such degradation would provide empirical grounds for reassurance. The study cannot establish causality, but contributes a documented, reproducible methodology for evaluating NWS warning performance over time using publicly available data.</a:t>
+            </a:r>
+          </a:p>
           <a:p>
             <a:endParaRPr lang="en-US" dirty="0"/>
           </a:p>
@@ -1678,7 +1599,7 @@
           <a:p>
             <a:fld id="{517C7DB4-066D-E64F-AACA-70882CED0933}" type="datetime1">
               <a:rPr lang="en-US" smtClean="0"/>
-              <a:t>6/21/26</a:t>
+              <a:t>6/27/26</a:t>
             </a:fld>
             <a:endParaRPr lang="en-US"/>
           </a:p>
@@ -1876,7 +1797,7 @@
           <a:p>
             <a:fld id="{3740829C-690F-7F48-93B0-64293CACC2E5}" type="datetime1">
               <a:rPr lang="en-US" smtClean="0"/>
-              <a:t>6/21/26</a:t>
+              <a:t>6/27/26</a:t>
             </a:fld>
             <a:endParaRPr lang="en-US"/>
           </a:p>
@@ -2084,7 +2005,7 @@
           <a:p>
             <a:fld id="{5DCF8C41-E7C7-6B48-B051-772FB5200599}" type="datetime1">
               <a:rPr lang="en-US" smtClean="0"/>
-              <a:t>6/21/26</a:t>
+              <a:t>6/27/26</a:t>
             </a:fld>
             <a:endParaRPr lang="en-US"/>
           </a:p>
@@ -2317,7 +2238,7 @@
           <a:p>
             <a:fld id="{A07D40B0-4BD1-E545-A9DD-31DC06D86CE5}" type="datetime1">
               <a:rPr lang="en-US" smtClean="0"/>
-              <a:t>6/21/26</a:t>
+              <a:t>6/27/26</a:t>
             </a:fld>
             <a:endParaRPr lang="en-US"/>
           </a:p>
@@ -2592,7 +2513,7 @@
           <a:p>
             <a:fld id="{F99398D8-DFF5-1842-8EFB-7EA18E349DAD}" type="datetime1">
               <a:rPr lang="en-US" smtClean="0"/>
-              <a:t>6/21/26</a:t>
+              <a:t>6/27/26</a:t>
             </a:fld>
             <a:endParaRPr lang="en-US"/>
           </a:p>
@@ -2857,7 +2778,7 @@
           <a:p>
             <a:fld id="{6F6558AB-181D-2D4D-B92E-4D3FECF4962F}" type="datetime1">
               <a:rPr lang="en-US" smtClean="0"/>
-              <a:t>6/21/26</a:t>
+              <a:t>6/27/26</a:t>
             </a:fld>
             <a:endParaRPr lang="en-US"/>
           </a:p>
@@ -3269,7 +3190,7 @@
           <a:p>
             <a:fld id="{20318742-2822-1A4A-BB4E-0ED73E9A1171}" type="datetime1">
               <a:rPr lang="en-US" smtClean="0"/>
-              <a:t>6/21/26</a:t>
+              <a:t>6/27/26</a:t>
             </a:fld>
             <a:endParaRPr lang="en-US"/>
           </a:p>
@@ -3410,7 +3331,7 @@
           <a:p>
             <a:fld id="{70A01EC0-E714-DD4D-9DB2-511B089AA6CC}" type="datetime1">
               <a:rPr lang="en-US" smtClean="0"/>
-              <a:t>6/21/26</a:t>
+              <a:t>6/27/26</a:t>
             </a:fld>
             <a:endParaRPr lang="en-US"/>
           </a:p>
@@ -3523,7 +3444,7 @@
           <a:p>
             <a:fld id="{66A4215D-D8C7-A847-BE59-27DC1BF5EB6C}" type="datetime1">
               <a:rPr lang="en-US" smtClean="0"/>
-              <a:t>6/21/26</a:t>
+              <a:t>6/27/26</a:t>
             </a:fld>
             <a:endParaRPr lang="en-US"/>
           </a:p>
@@ -3834,7 +3755,7 @@
           <a:p>
             <a:fld id="{985EF311-7D05-C54A-A81D-91C2810D2F14}" type="datetime1">
               <a:rPr lang="en-US" smtClean="0"/>
-              <a:t>6/21/26</a:t>
+              <a:t>6/27/26</a:t>
             </a:fld>
             <a:endParaRPr lang="en-US"/>
           </a:p>
@@ -4122,7 +4043,7 @@
           <a:p>
             <a:fld id="{FC8D9385-B125-BC40-897C-402C91EC224F}" type="datetime1">
               <a:rPr lang="en-US" smtClean="0"/>
-              <a:t>6/21/26</a:t>
+              <a:t>6/27/26</a:t>
             </a:fld>
             <a:endParaRPr lang="en-US"/>
           </a:p>
@@ -4363,7 +4284,7 @@
           <a:p>
             <a:fld id="{38A2B2AE-FB01-0E43-9EB6-06BD729592E3}" type="datetime1">
               <a:rPr lang="en-US" smtClean="0"/>
-              <a:t>6/21/26</a:t>
+              <a:t>6/27/26</a:t>
             </a:fld>
             <a:endParaRPr lang="en-US"/>
           </a:p>
@@ -4798,8 +4719,8 @@
         </p:nvSpPr>
         <p:spPr>
           <a:xfrm>
-            <a:off x="640080" y="1463040"/>
-            <a:ext cx="7863840" cy="1097280"/>
+            <a:off x="640080" y="1020279"/>
+            <a:ext cx="7863840" cy="1743977"/>
           </a:xfrm>
           <a:prstGeom prst="rect">
             <a:avLst/>
@@ -4823,7 +4744,7 @@
                 <a:ea typeface="Cambria" pitchFamily="34" charset="-122"/>
                 <a:cs typeface="Cambria" pitchFamily="34" charset="-120"/>
               </a:rPr>
-              <a:t>Did National Weather Service (NWS) Warning Performance Change After Staffing Cuts in 2025?</a:t>
+              <a:t>The effect of 2025 staffing cuts on National Weather Service (NWS) warning performance</a:t>
             </a:r>
           </a:p>
         </p:txBody>
@@ -4874,7 +4795,7 @@
         </p:nvSpPr>
         <p:spPr>
           <a:xfrm>
-            <a:off x="640080" y="3749040"/>
+            <a:off x="640080" y="3469907"/>
             <a:ext cx="1097280" cy="0"/>
           </a:xfrm>
           <a:prstGeom prst="line">
@@ -4904,8 +4825,8 @@
         </p:nvSpPr>
         <p:spPr>
           <a:xfrm>
-            <a:off x="640080" y="3886200"/>
-            <a:ext cx="7863840" cy="914400"/>
+            <a:off x="640080" y="3611880"/>
+            <a:ext cx="7863840" cy="1188720"/>
           </a:xfrm>
           <a:prstGeom prst="rect">
             <a:avLst/>
@@ -4921,7 +4842,7 @@
               <a:buNone/>
             </a:pPr>
             <a:r>
-              <a:rPr lang="en-US" sz="1400" b="1" dirty="0">
+              <a:rPr lang="en-US" sz="1200" b="1" dirty="0">
                 <a:solidFill>
                   <a:srgbClr val="FFFFFF"/>
                 </a:solidFill>
@@ -4936,30 +4857,64 @@
               <a:buNone/>
             </a:pPr>
             <a:r>
-              <a:rPr lang="en-US" sz="1400" b="1" dirty="0">
+              <a:rPr lang="en-US" sz="1200" b="1" dirty="0">
                 <a:solidFill>
                   <a:srgbClr val="FFFFFF"/>
                 </a:solidFill>
                 <a:ea typeface="Calibri" pitchFamily="34" charset="-122"/>
                 <a:cs typeface="Calibri" pitchFamily="34" charset="-120"/>
               </a:rPr>
-              <a:t>MSDS692 Data Science Practicum I  |  Regis University</a:t>
-            </a:r>
-          </a:p>
-          <a:p>
-            <a:pPr marL="0" indent="0">
-              <a:buNone/>
-            </a:pPr>
-            <a:r>
-              <a:rPr lang="en-US" sz="1400" b="1" dirty="0">
+              <a:t>MSDS692 Data Science Practicum I</a:t>
+            </a:r>
+          </a:p>
+          <a:p>
+            <a:r>
+              <a:rPr lang="en-US" sz="1200" b="1" dirty="0">
                 <a:solidFill>
                   <a:srgbClr val="FFFFFF"/>
                 </a:solidFill>
                 <a:ea typeface="Calibri" pitchFamily="34" charset="-122"/>
                 <a:cs typeface="Calibri" pitchFamily="34" charset="-120"/>
               </a:rPr>
-              <a:t>Prof. Ghulam Mujtaba  |  June 20, 2026</a:t>
-            </a:r>
+              <a:t>Anderson College of Business and Computing</a:t>
+            </a:r>
+          </a:p>
+          <a:p>
+            <a:pPr marL="0" indent="0">
+              <a:buNone/>
+            </a:pPr>
+            <a:r>
+              <a:rPr lang="en-US" sz="1200" b="1" dirty="0">
+                <a:solidFill>
+                  <a:srgbClr val="FFFFFF"/>
+                </a:solidFill>
+                <a:ea typeface="Calibri" pitchFamily="34" charset="-122"/>
+                <a:cs typeface="Calibri" pitchFamily="34" charset="-120"/>
+              </a:rPr>
+              <a:t>Regis University, Denver, CO, USA</a:t>
+            </a:r>
+          </a:p>
+          <a:p>
+            <a:pPr marL="0" indent="0">
+              <a:buNone/>
+            </a:pPr>
+            <a:r>
+              <a:rPr lang="en-US" sz="1200" b="1" dirty="0" err="1">
+                <a:solidFill>
+                  <a:srgbClr val="FFFFFF"/>
+                </a:solidFill>
+                <a:ea typeface="Calibri" pitchFamily="34" charset="-122"/>
+                <a:cs typeface="Calibri" pitchFamily="34" charset="-120"/>
+              </a:rPr>
+              <a:t>crudman@regis.edu</a:t>
+            </a:r>
+            <a:endParaRPr lang="en-US" sz="1200" b="1" dirty="0">
+              <a:solidFill>
+                <a:srgbClr val="FFFFFF"/>
+              </a:solidFill>
+              <a:ea typeface="Calibri" pitchFamily="34" charset="-122"/>
+              <a:cs typeface="Calibri" pitchFamily="34" charset="-120"/>
+            </a:endParaRPr>
           </a:p>
           <a:p>
             <a:pPr marL="0" indent="0">
@@ -5175,8 +5130,8 @@
         </p:nvSpPr>
         <p:spPr>
           <a:xfrm>
-            <a:off x="4011827" y="3882493"/>
-            <a:ext cx="4674973" cy="548640"/>
+            <a:off x="3696346" y="3882493"/>
+            <a:ext cx="4918265" cy="548640"/>
           </a:xfrm>
           <a:prstGeom prst="rect">
             <a:avLst/>
@@ -5190,8 +5145,10 @@
           <a:p>
             <a:r>
               <a:rPr lang="en-US" sz="1100" i="1" dirty="0"/>
-              <a:t>The year-10 false-alarm rate (0.543) for severe thunderstorms rises above the extrapolated baseline trend (0.507), a gap of +0.036, meaning more false alarms than the trend predicts.</a:t>
-            </a:r>
+              <a:t>The year-10 false-alarm rate (0.543) for severe thunderstorms rises above the extrapolated baseline trend (0.507), a gap of +0.036, meaning more false alarms than the trend predicts. Study year is offset from calendar (Feb 27 to Feb 26).</a:t>
+            </a:r>
+          </a:p>
+          <a:p>
             <a:endParaRPr lang="en-US" sz="1100" dirty="0"/>
           </a:p>
         </p:txBody>
@@ -5212,14 +5169,13 @@
         </p:nvPicPr>
         <p:blipFill>
           <a:blip r:embed="rId3"/>
-          <a:stretch>
-            <a:fillRect/>
-          </a:stretch>
+          <a:srcRect/>
+          <a:stretch/>
         </p:blipFill>
         <p:spPr>
           <a:xfrm>
             <a:off x="3540274" y="1045845"/>
-            <a:ext cx="5146526" cy="2777490"/>
+            <a:ext cx="5146525" cy="2777490"/>
           </a:xfrm>
           <a:prstGeom prst="rect">
             <a:avLst/>
@@ -5493,6 +5449,247 @@
 
 <file path=ppt/slides/slide12.xml><?xml version="1.0" encoding="utf-8"?>
 <p:sld xmlns:a="http://schemas.openxmlformats.org/drawingml/2006/main" xmlns:r="http://schemas.openxmlformats.org/officeDocument/2006/relationships" xmlns:p="http://schemas.openxmlformats.org/presentationml/2006/main">
+  <p:cSld>
+    <p:spTree>
+      <p:nvGrpSpPr>
+        <p:cNvPr id="1" name=""/>
+        <p:cNvGrpSpPr/>
+        <p:nvPr/>
+      </p:nvGrpSpPr>
+      <p:grpSpPr>
+        <a:xfrm>
+          <a:off x="0" y="0"/>
+          <a:ext cx="0" cy="0"/>
+          <a:chOff x="0" y="0"/>
+          <a:chExt cx="0" cy="0"/>
+        </a:xfrm>
+      </p:grpSpPr>
+      <p:sp>
+        <p:nvSpPr>
+          <p:cNvPr id="4" name="Text 0">
+            <a:extLst>
+              <a:ext uri="{FF2B5EF4-FFF2-40B4-BE49-F238E27FC236}">
+                <a16:creationId xmlns:a16="http://schemas.microsoft.com/office/drawing/2014/main" id="{7DBCA082-8323-EF5E-90FB-C5CBD78C8B5D}"/>
+              </a:ext>
+            </a:extLst>
+          </p:cNvPr>
+          <p:cNvSpPr/>
+          <p:nvPr/>
+        </p:nvSpPr>
+        <p:spPr>
+          <a:xfrm>
+            <a:off x="457200" y="320040"/>
+            <a:ext cx="8229600" cy="502920"/>
+          </a:xfrm>
+          <a:prstGeom prst="rect">
+            <a:avLst/>
+          </a:prstGeom>
+          <a:noFill/>
+          <a:ln/>
+        </p:spPr>
+        <p:txBody>
+          <a:bodyPr wrap="square" lIns="0" tIns="0" rIns="0" bIns="0" rtlCol="0" anchor="ctr"/>
+          <a:lstStyle/>
+          <a:p>
+            <a:pPr marL="0" indent="0" algn="l">
+              <a:buNone/>
+            </a:pPr>
+            <a:r>
+              <a:rPr lang="en-US" sz="2600" b="1" dirty="0">
+                <a:solidFill>
+                  <a:srgbClr val="1F2937"/>
+                </a:solidFill>
+                <a:latin typeface="Cambria" pitchFamily="34" charset="0"/>
+                <a:ea typeface="Cambria" pitchFamily="34" charset="-122"/>
+                <a:cs typeface="Cambria" pitchFamily="34" charset="-120"/>
+              </a:rPr>
+              <a:t>Did SV false alarms come with larger warnings?</a:t>
+            </a:r>
+          </a:p>
+        </p:txBody>
+      </p:sp>
+      <p:sp>
+        <p:nvSpPr>
+          <p:cNvPr id="5" name="Shape 3">
+            <a:extLst>
+              <a:ext uri="{FF2B5EF4-FFF2-40B4-BE49-F238E27FC236}">
+                <a16:creationId xmlns:a16="http://schemas.microsoft.com/office/drawing/2014/main" id="{09685400-C168-F991-206D-331ADF6ADB94}"/>
+              </a:ext>
+            </a:extLst>
+          </p:cNvPr>
+          <p:cNvSpPr/>
+          <p:nvPr/>
+        </p:nvSpPr>
+        <p:spPr>
+          <a:xfrm>
+            <a:off x="457200" y="971550"/>
+            <a:ext cx="2135530" cy="3457015"/>
+          </a:xfrm>
+          <a:prstGeom prst="roundRect">
+            <a:avLst>
+              <a:gd name="adj" fmla="val 1714"/>
+            </a:avLst>
+          </a:prstGeom>
+          <a:solidFill>
+            <a:srgbClr val="F8FAFC"/>
+          </a:solidFill>
+          <a:ln w="9525">
+            <a:solidFill>
+              <a:srgbClr val="D1D5DB"/>
+            </a:solidFill>
+            <a:prstDash val="solid"/>
+          </a:ln>
+        </p:spPr>
+        <p:txBody>
+          <a:bodyPr/>
+          <a:lstStyle/>
+          <a:p>
+            <a:r>
+              <a:rPr lang="en-US" sz="1400" b="1" dirty="0"/>
+              <a:t>A diagnostic on the false-alarm finding, not a tenth test</a:t>
+            </a:r>
+          </a:p>
+          <a:p>
+            <a:endParaRPr lang="en-US" sz="1400" b="1" dirty="0"/>
+          </a:p>
+          <a:p>
+            <a:r>
+              <a:rPr lang="en-US" sz="1400" dirty="0"/>
+              <a:t>If 2025 had more severe-storm false alarms, were the warnings also drawn larger? Larger polygons are more precautionary and sweep up more non-events.</a:t>
+            </a:r>
+          </a:p>
+          <a:p>
+            <a:endParaRPr lang="en-US" sz="1400" b="1" dirty="0"/>
+          </a:p>
+          <a:p>
+            <a:r>
+              <a:rPr lang="en-US" sz="1400" i="1" dirty="0"/>
+              <a:t>Exploratory; excluded from the nine FDR-corrected tests</a:t>
+            </a:r>
+          </a:p>
+        </p:txBody>
+      </p:sp>
+      <p:pic>
+        <p:nvPicPr>
+          <p:cNvPr id="7" name="Picture 6">
+            <a:extLst>
+              <a:ext uri="{FF2B5EF4-FFF2-40B4-BE49-F238E27FC236}">
+                <a16:creationId xmlns:a16="http://schemas.microsoft.com/office/drawing/2014/main" id="{56EEB1FB-EBB1-DB99-E4B7-61F509CF4631}"/>
+              </a:ext>
+            </a:extLst>
+          </p:cNvPr>
+          <p:cNvPicPr>
+            <a:picLocks noChangeAspect="1"/>
+          </p:cNvPicPr>
+          <p:nvPr/>
+        </p:nvPicPr>
+        <p:blipFill>
+          <a:blip r:embed="rId3"/>
+          <a:srcRect/>
+          <a:stretch/>
+        </p:blipFill>
+        <p:spPr>
+          <a:xfrm>
+            <a:off x="2723815" y="822960"/>
+            <a:ext cx="6263925" cy="3380531"/>
+          </a:xfrm>
+          <a:prstGeom prst="rect">
+            <a:avLst/>
+          </a:prstGeom>
+        </p:spPr>
+      </p:pic>
+      <p:sp>
+        <p:nvSpPr>
+          <p:cNvPr id="9" name="TextBox 8">
+            <a:extLst>
+              <a:ext uri="{FF2B5EF4-FFF2-40B4-BE49-F238E27FC236}">
+                <a16:creationId xmlns:a16="http://schemas.microsoft.com/office/drawing/2014/main" id="{E78396E9-33A0-BFAF-D997-B31020A026C0}"/>
+              </a:ext>
+            </a:extLst>
+          </p:cNvPr>
+          <p:cNvSpPr txBox="1"/>
+          <p:nvPr/>
+        </p:nvSpPr>
+        <p:spPr>
+          <a:xfrm>
+            <a:off x="2723814" y="4203491"/>
+            <a:ext cx="6263925" cy="600164"/>
+          </a:xfrm>
+          <a:prstGeom prst="rect">
+            <a:avLst/>
+          </a:prstGeom>
+          <a:noFill/>
+        </p:spPr>
+        <p:txBody>
+          <a:bodyPr wrap="square">
+            <a:spAutoFit/>
+          </a:bodyPr>
+          <a:lstStyle/>
+          <a:p>
+            <a:r>
+              <a:rPr lang="en-US" sz="1100" b="0" i="1" dirty="0">
+                <a:effectLst/>
+              </a:rPr>
+              <a:t>Severe-storm warning area departs about +4% above the season-adjusted baseline trend in 2025, the same direction as the year-10 rise in false alarms</a:t>
+            </a:r>
+            <a:r>
+              <a:rPr lang="en-US" sz="1100" i="1" dirty="0"/>
+              <a:t>. </a:t>
+            </a:r>
+            <a:r>
+              <a:rPr lang="en-US" sz="1100" b="0" i="1" dirty="0">
+                <a:effectLst/>
+              </a:rPr>
+              <a:t>Bigger, more precautionary polygons would be consistent with more warnings that did not verify. Descriptive, not causal.</a:t>
+            </a:r>
+            <a:endParaRPr lang="en-US" sz="1100" i="1" dirty="0"/>
+          </a:p>
+        </p:txBody>
+      </p:sp>
+      <p:sp>
+        <p:nvSpPr>
+          <p:cNvPr id="2" name="Slide Number Placeholder 1">
+            <a:extLst>
+              <a:ext uri="{FF2B5EF4-FFF2-40B4-BE49-F238E27FC236}">
+                <a16:creationId xmlns:a16="http://schemas.microsoft.com/office/drawing/2014/main" id="{0200FAB6-57C2-1099-37CA-223A5008EF8C}"/>
+              </a:ext>
+            </a:extLst>
+          </p:cNvPr>
+          <p:cNvSpPr>
+            <a:spLocks noGrp="1"/>
+          </p:cNvSpPr>
+          <p:nvPr>
+            <p:ph type="sldNum" sz="quarter" idx="12"/>
+          </p:nvPr>
+        </p:nvSpPr>
+        <p:spPr/>
+        <p:txBody>
+          <a:bodyPr/>
+          <a:lstStyle/>
+          <a:p>
+            <a:fld id="{59854499-FE6F-F146-B363-A2BB07F446CC}" type="slidenum">
+              <a:rPr lang="en-US" smtClean="0"/>
+              <a:t>12</a:t>
+            </a:fld>
+            <a:endParaRPr lang="en-US"/>
+          </a:p>
+        </p:txBody>
+      </p:sp>
+    </p:spTree>
+    <p:extLst>
+      <p:ext uri="{BB962C8B-B14F-4D97-AF65-F5344CB8AC3E}">
+        <p14:creationId xmlns:p14="http://schemas.microsoft.com/office/powerpoint/2010/main" val="2927952649"/>
+      </p:ext>
+    </p:extLst>
+  </p:cSld>
+  <p:clrMapOvr>
+    <a:masterClrMapping/>
+  </p:clrMapOvr>
+</p:sld>
+</file>
+
+<file path=ppt/slides/slide13.xml><?xml version="1.0" encoding="utf-8"?>
+<p:sld xmlns:a="http://schemas.openxmlformats.org/drawingml/2006/main" xmlns:r="http://schemas.openxmlformats.org/officeDocument/2006/relationships" xmlns:p="http://schemas.openxmlformats.org/presentationml/2006/main">
   <p:cSld name="Slide 11">
     <p:bg>
       <p:bgPr>
@@ -5623,7 +5820,7 @@
                   <a:schemeClr val="bg1"/>
                 </a:solidFill>
               </a:rPr>
-              <a:t>One cautious finding: SV FAR odds up about 15%, with POD and LTA unchanged. This deserves a deeper dive.</a:t>
+              <a:t>One cautious finding: SV FAR odds up about 15%, with POD and LTA unchanged. One potential explanation is a procedural change to larger warning areas. This deserves a deeper dive.</a:t>
             </a:r>
           </a:p>
           <a:p>
@@ -5729,607 +5926,6 @@
         </p:txBody>
       </p:sp>
     </p:spTree>
-  </p:cSld>
-  <p:clrMapOvr>
-    <a:masterClrMapping/>
-  </p:clrMapOvr>
-</p:sld>
-</file>
-
-<file path=ppt/slides/slide13.xml><?xml version="1.0" encoding="utf-8"?>
-<p:sld xmlns:a="http://schemas.openxmlformats.org/drawingml/2006/main" xmlns:r="http://schemas.openxmlformats.org/officeDocument/2006/relationships" xmlns:p="http://schemas.openxmlformats.org/presentationml/2006/main">
-  <p:cSld>
-    <p:spTree>
-      <p:nvGrpSpPr>
-        <p:cNvPr id="1" name=""/>
-        <p:cNvGrpSpPr/>
-        <p:nvPr/>
-      </p:nvGrpSpPr>
-      <p:grpSpPr>
-        <a:xfrm>
-          <a:off x="0" y="0"/>
-          <a:ext cx="0" cy="0"/>
-          <a:chOff x="0" y="0"/>
-          <a:chExt cx="0" cy="0"/>
-        </a:xfrm>
-      </p:grpSpPr>
-      <p:sp>
-        <p:nvSpPr>
-          <p:cNvPr id="3" name="Rectangle 2">
-            <a:extLst>
-              <a:ext uri="{FF2B5EF4-FFF2-40B4-BE49-F238E27FC236}">
-                <a16:creationId xmlns:a16="http://schemas.microsoft.com/office/drawing/2014/main" id="{1E5E7DC9-1510-A656-3011-9C78DAE5DB01}"/>
-              </a:ext>
-            </a:extLst>
-          </p:cNvPr>
-          <p:cNvSpPr/>
-          <p:nvPr/>
-        </p:nvSpPr>
-        <p:spPr>
-          <a:xfrm>
-            <a:off x="0" y="0"/>
-            <a:ext cx="9144000" cy="2821719"/>
-          </a:xfrm>
-          <a:prstGeom prst="rect">
-            <a:avLst/>
-          </a:prstGeom>
-          <a:solidFill>
-            <a:srgbClr val="1F3A5F"/>
-          </a:solidFill>
-          <a:ln>
-            <a:noFill/>
-          </a:ln>
-        </p:spPr>
-        <p:style>
-          <a:lnRef idx="2">
-            <a:schemeClr val="accent1">
-              <a:shade val="15000"/>
-            </a:schemeClr>
-          </a:lnRef>
-          <a:fillRef idx="1">
-            <a:schemeClr val="accent1"/>
-          </a:fillRef>
-          <a:effectRef idx="0">
-            <a:schemeClr val="accent1"/>
-          </a:effectRef>
-          <a:fontRef idx="minor">
-            <a:schemeClr val="lt1"/>
-          </a:fontRef>
-        </p:style>
-        <p:txBody>
-          <a:bodyPr rtlCol="0" anchor="ctr"/>
-          <a:lstStyle/>
-          <a:p>
-            <a:pPr algn="ctr"/>
-            <a:endParaRPr lang="en-US"/>
-          </a:p>
-        </p:txBody>
-      </p:sp>
-      <p:sp>
-        <p:nvSpPr>
-          <p:cNvPr id="2" name="Text 0">
-            <a:extLst>
-              <a:ext uri="{FF2B5EF4-FFF2-40B4-BE49-F238E27FC236}">
-                <a16:creationId xmlns:a16="http://schemas.microsoft.com/office/drawing/2014/main" id="{1BC45C1C-B084-318A-8C00-339A9EEEC38C}"/>
-              </a:ext>
-            </a:extLst>
-          </p:cNvPr>
-          <p:cNvSpPr/>
-          <p:nvPr/>
-        </p:nvSpPr>
-        <p:spPr>
-          <a:xfrm>
-            <a:off x="516193" y="1971191"/>
-            <a:ext cx="5432323" cy="502920"/>
-          </a:xfrm>
-          <a:prstGeom prst="rect">
-            <a:avLst/>
-          </a:prstGeom>
-          <a:noFill/>
-          <a:ln/>
-        </p:spPr>
-        <p:txBody>
-          <a:bodyPr wrap="square" lIns="0" tIns="0" rIns="0" bIns="0" rtlCol="0" anchor="ctr"/>
-          <a:lstStyle/>
-          <a:p>
-            <a:r>
-              <a:rPr lang="en-US" sz="2800" b="1" dirty="0">
-                <a:solidFill>
-                  <a:srgbClr val="FFFFFF"/>
-                </a:solidFill>
-                <a:latin typeface="Cambria" pitchFamily="34" charset="0"/>
-                <a:ea typeface="Cambria" pitchFamily="34" charset="-122"/>
-                <a:cs typeface="Cambria" pitchFamily="34" charset="-120"/>
-              </a:rPr>
-              <a:t>Appendix</a:t>
-            </a:r>
-            <a:endParaRPr lang="en-US" sz="2800" dirty="0"/>
-          </a:p>
-        </p:txBody>
-      </p:sp>
-    </p:spTree>
-    <p:extLst>
-      <p:ext uri="{BB962C8B-B14F-4D97-AF65-F5344CB8AC3E}">
-        <p14:creationId xmlns:p14="http://schemas.microsoft.com/office/powerpoint/2010/main" val="3911978186"/>
-      </p:ext>
-    </p:extLst>
-  </p:cSld>
-  <p:clrMapOvr>
-    <a:masterClrMapping/>
-  </p:clrMapOvr>
-</p:sld>
-</file>
-
-<file path=ppt/slides/slide14.xml><?xml version="1.0" encoding="utf-8"?>
-<p:sld xmlns:a="http://schemas.openxmlformats.org/drawingml/2006/main" xmlns:r="http://schemas.openxmlformats.org/officeDocument/2006/relationships" xmlns:p="http://schemas.openxmlformats.org/presentationml/2006/main">
-  <p:cSld>
-    <p:spTree>
-      <p:nvGrpSpPr>
-        <p:cNvPr id="1" name=""/>
-        <p:cNvGrpSpPr/>
-        <p:nvPr/>
-      </p:nvGrpSpPr>
-      <p:grpSpPr>
-        <a:xfrm>
-          <a:off x="0" y="0"/>
-          <a:ext cx="0" cy="0"/>
-          <a:chOff x="0" y="0"/>
-          <a:chExt cx="0" cy="0"/>
-        </a:xfrm>
-      </p:grpSpPr>
-      <p:sp>
-        <p:nvSpPr>
-          <p:cNvPr id="4" name="Text 0">
-            <a:extLst>
-              <a:ext uri="{FF2B5EF4-FFF2-40B4-BE49-F238E27FC236}">
-                <a16:creationId xmlns:a16="http://schemas.microsoft.com/office/drawing/2014/main" id="{7DBCA082-8323-EF5E-90FB-C5CBD78C8B5D}"/>
-              </a:ext>
-            </a:extLst>
-          </p:cNvPr>
-          <p:cNvSpPr/>
-          <p:nvPr/>
-        </p:nvSpPr>
-        <p:spPr>
-          <a:xfrm>
-            <a:off x="457200" y="320040"/>
-            <a:ext cx="8229600" cy="502920"/>
-          </a:xfrm>
-          <a:prstGeom prst="rect">
-            <a:avLst/>
-          </a:prstGeom>
-          <a:noFill/>
-          <a:ln/>
-        </p:spPr>
-        <p:txBody>
-          <a:bodyPr wrap="square" lIns="0" tIns="0" rIns="0" bIns="0" rtlCol="0" anchor="ctr"/>
-          <a:lstStyle/>
-          <a:p>
-            <a:pPr marL="0" indent="0" algn="l">
-              <a:buNone/>
-            </a:pPr>
-            <a:r>
-              <a:rPr lang="en-US" sz="2600" b="1" dirty="0">
-                <a:solidFill>
-                  <a:srgbClr val="1F2937"/>
-                </a:solidFill>
-                <a:latin typeface="Cambria" pitchFamily="34" charset="0"/>
-                <a:ea typeface="Cambria" pitchFamily="34" charset="-122"/>
-                <a:cs typeface="Cambria" pitchFamily="34" charset="-120"/>
-              </a:rPr>
-              <a:t>Did SV false alarms come with larger warnings?</a:t>
-            </a:r>
-          </a:p>
-        </p:txBody>
-      </p:sp>
-      <p:sp>
-        <p:nvSpPr>
-          <p:cNvPr id="5" name="Shape 3">
-            <a:extLst>
-              <a:ext uri="{FF2B5EF4-FFF2-40B4-BE49-F238E27FC236}">
-                <a16:creationId xmlns:a16="http://schemas.microsoft.com/office/drawing/2014/main" id="{09685400-C168-F991-206D-331ADF6ADB94}"/>
-              </a:ext>
-            </a:extLst>
-          </p:cNvPr>
-          <p:cNvSpPr/>
-          <p:nvPr/>
-        </p:nvSpPr>
-        <p:spPr>
-          <a:xfrm>
-            <a:off x="457200" y="971550"/>
-            <a:ext cx="2135530" cy="3457015"/>
-          </a:xfrm>
-          <a:prstGeom prst="roundRect">
-            <a:avLst>
-              <a:gd name="adj" fmla="val 1714"/>
-            </a:avLst>
-          </a:prstGeom>
-          <a:solidFill>
-            <a:srgbClr val="F8FAFC"/>
-          </a:solidFill>
-          <a:ln w="9525">
-            <a:solidFill>
-              <a:srgbClr val="D1D5DB"/>
-            </a:solidFill>
-            <a:prstDash val="solid"/>
-          </a:ln>
-        </p:spPr>
-        <p:txBody>
-          <a:bodyPr/>
-          <a:lstStyle/>
-          <a:p>
-            <a:r>
-              <a:rPr lang="en-US" sz="1400" b="1" dirty="0"/>
-              <a:t>A diagnostic on the false-alarm finding, not a tenth test</a:t>
-            </a:r>
-          </a:p>
-          <a:p>
-            <a:endParaRPr lang="en-US" sz="1400" b="1" dirty="0"/>
-          </a:p>
-          <a:p>
-            <a:r>
-              <a:rPr lang="en-US" sz="1400" dirty="0"/>
-              <a:t>If 2025 had more severe-storm false alarms, were the warnings also drawn larger? Larger polygons are more precautionary and sweep up more non-events.</a:t>
-            </a:r>
-          </a:p>
-          <a:p>
-            <a:endParaRPr lang="en-US" sz="1400" b="1" dirty="0"/>
-          </a:p>
-          <a:p>
-            <a:r>
-              <a:rPr lang="en-US" sz="1400" i="1" dirty="0"/>
-              <a:t>Exploratory; excluded from the nine FDR-corrected tests</a:t>
-            </a:r>
-          </a:p>
-        </p:txBody>
-      </p:sp>
-      <p:pic>
-        <p:nvPicPr>
-          <p:cNvPr id="7" name="Picture 6">
-            <a:extLst>
-              <a:ext uri="{FF2B5EF4-FFF2-40B4-BE49-F238E27FC236}">
-                <a16:creationId xmlns:a16="http://schemas.microsoft.com/office/drawing/2014/main" id="{56EEB1FB-EBB1-DB99-E4B7-61F509CF4631}"/>
-              </a:ext>
-            </a:extLst>
-          </p:cNvPr>
-          <p:cNvPicPr>
-            <a:picLocks noChangeAspect="1"/>
-          </p:cNvPicPr>
-          <p:nvPr/>
-        </p:nvPicPr>
-        <p:blipFill>
-          <a:blip r:embed="rId2"/>
-          <a:stretch>
-            <a:fillRect/>
-          </a:stretch>
-        </p:blipFill>
-        <p:spPr>
-          <a:xfrm>
-            <a:off x="2723817" y="971549"/>
-            <a:ext cx="6263925" cy="3380531"/>
-          </a:xfrm>
-          <a:prstGeom prst="rect">
-            <a:avLst/>
-          </a:prstGeom>
-        </p:spPr>
-      </p:pic>
-      <p:sp>
-        <p:nvSpPr>
-          <p:cNvPr id="9" name="TextBox 8">
-            <a:extLst>
-              <a:ext uri="{FF2B5EF4-FFF2-40B4-BE49-F238E27FC236}">
-                <a16:creationId xmlns:a16="http://schemas.microsoft.com/office/drawing/2014/main" id="{E78396E9-33A0-BFAF-D997-B31020A026C0}"/>
-              </a:ext>
-            </a:extLst>
-          </p:cNvPr>
-          <p:cNvSpPr txBox="1"/>
-          <p:nvPr/>
-        </p:nvSpPr>
-        <p:spPr>
-          <a:xfrm>
-            <a:off x="2723816" y="4352080"/>
-            <a:ext cx="6263925" cy="600164"/>
-          </a:xfrm>
-          <a:prstGeom prst="rect">
-            <a:avLst/>
-          </a:prstGeom>
-          <a:noFill/>
-        </p:spPr>
-        <p:txBody>
-          <a:bodyPr wrap="square">
-            <a:spAutoFit/>
-          </a:bodyPr>
-          <a:lstStyle/>
-          <a:p>
-            <a:r>
-              <a:rPr lang="en-US" sz="1100" b="0" i="1" dirty="0">
-                <a:effectLst/>
-              </a:rPr>
-              <a:t>Severe-storm warning area departs about +4% above the season-adjusted baseline trend in 2025, the same direction as the year-10 rise in false alarms</a:t>
-            </a:r>
-            <a:r>
-              <a:rPr lang="en-US" sz="1100" i="1" dirty="0"/>
-              <a:t>. </a:t>
-            </a:r>
-            <a:r>
-              <a:rPr lang="en-US" sz="1100" b="0" i="1" dirty="0">
-                <a:effectLst/>
-              </a:rPr>
-              <a:t>Bigger, more precautionary polygons would be consistent with more warnings that did not verify. Descriptive, not causal.</a:t>
-            </a:r>
-            <a:endParaRPr lang="en-US" sz="1100" i="1" dirty="0"/>
-          </a:p>
-        </p:txBody>
-      </p:sp>
-      <p:sp>
-        <p:nvSpPr>
-          <p:cNvPr id="2" name="Slide Number Placeholder 1">
-            <a:extLst>
-              <a:ext uri="{FF2B5EF4-FFF2-40B4-BE49-F238E27FC236}">
-                <a16:creationId xmlns:a16="http://schemas.microsoft.com/office/drawing/2014/main" id="{0200FAB6-57C2-1099-37CA-223A5008EF8C}"/>
-              </a:ext>
-            </a:extLst>
-          </p:cNvPr>
-          <p:cNvSpPr>
-            <a:spLocks noGrp="1"/>
-          </p:cNvSpPr>
-          <p:nvPr>
-            <p:ph type="sldNum" sz="quarter" idx="12"/>
-          </p:nvPr>
-        </p:nvSpPr>
-        <p:spPr/>
-        <p:txBody>
-          <a:bodyPr/>
-          <a:lstStyle/>
-          <a:p>
-            <a:fld id="{59854499-FE6F-F146-B363-A2BB07F446CC}" type="slidenum">
-              <a:rPr lang="en-US" smtClean="0"/>
-              <a:t>14</a:t>
-            </a:fld>
-            <a:endParaRPr lang="en-US"/>
-          </a:p>
-        </p:txBody>
-      </p:sp>
-    </p:spTree>
-    <p:extLst>
-      <p:ext uri="{BB962C8B-B14F-4D97-AF65-F5344CB8AC3E}">
-        <p14:creationId xmlns:p14="http://schemas.microsoft.com/office/powerpoint/2010/main" val="2927952649"/>
-      </p:ext>
-    </p:extLst>
-  </p:cSld>
-  <p:clrMapOvr>
-    <a:masterClrMapping/>
-  </p:clrMapOvr>
-</p:sld>
-</file>
-
-<file path=ppt/slides/slide15.xml><?xml version="1.0" encoding="utf-8"?>
-<p:sld xmlns:a="http://schemas.openxmlformats.org/drawingml/2006/main" xmlns:r="http://schemas.openxmlformats.org/officeDocument/2006/relationships" xmlns:p="http://schemas.openxmlformats.org/presentationml/2006/main">
-  <p:cSld>
-    <p:spTree>
-      <p:nvGrpSpPr>
-        <p:cNvPr id="1" name="">
-          <a:extLst>
-            <a:ext uri="{FF2B5EF4-FFF2-40B4-BE49-F238E27FC236}">
-              <a16:creationId xmlns:a16="http://schemas.microsoft.com/office/drawing/2014/main" id="{D4B80E81-6FD8-7DE0-3C7C-94889690EF8B}"/>
-            </a:ext>
-          </a:extLst>
-        </p:cNvPr>
-        <p:cNvGrpSpPr/>
-        <p:nvPr/>
-      </p:nvGrpSpPr>
-      <p:grpSpPr>
-        <a:xfrm>
-          <a:off x="0" y="0"/>
-          <a:ext cx="0" cy="0"/>
-          <a:chOff x="0" y="0"/>
-          <a:chExt cx="0" cy="0"/>
-        </a:xfrm>
-      </p:grpSpPr>
-      <p:sp>
-        <p:nvSpPr>
-          <p:cNvPr id="5" name="Shape 3">
-            <a:extLst>
-              <a:ext uri="{FF2B5EF4-FFF2-40B4-BE49-F238E27FC236}">
-                <a16:creationId xmlns:a16="http://schemas.microsoft.com/office/drawing/2014/main" id="{3940175D-57A3-6245-40B2-6A331FA23F22}"/>
-              </a:ext>
-            </a:extLst>
-          </p:cNvPr>
-          <p:cNvSpPr/>
-          <p:nvPr/>
-        </p:nvSpPr>
-        <p:spPr>
-          <a:xfrm>
-            <a:off x="457200" y="1165188"/>
-            <a:ext cx="2737821" cy="3658272"/>
-          </a:xfrm>
-          <a:prstGeom prst="roundRect">
-            <a:avLst>
-              <a:gd name="adj" fmla="val 1714"/>
-            </a:avLst>
-          </a:prstGeom>
-          <a:solidFill>
-            <a:srgbClr val="F8FAFC"/>
-          </a:solidFill>
-          <a:ln w="9525">
-            <a:solidFill>
-              <a:srgbClr val="D1D5DB"/>
-            </a:solidFill>
-            <a:prstDash val="solid"/>
-          </a:ln>
-        </p:spPr>
-        <p:txBody>
-          <a:bodyPr/>
-          <a:lstStyle/>
-          <a:p>
-            <a:r>
-              <a:rPr lang="en-US" sz="1400" b="1" dirty="0"/>
-              <a:t>Could the false-alarm rise just be a shift in which offices were busy?</a:t>
-            </a:r>
-          </a:p>
-          <a:p>
-            <a:endParaRPr lang="en-US" sz="1400" b="1" dirty="0"/>
-          </a:p>
-          <a:p>
-            <a:r>
-              <a:rPr lang="en-US" sz="1400" dirty="0"/>
-              <a:t>Weather covers different ground each year, and the national rate is office-weighted, so a shift in the busy offices can move it with no change in how anyone warns.</a:t>
-            </a:r>
-          </a:p>
-          <a:p>
-            <a:endParaRPr lang="en-US" sz="1400" dirty="0"/>
-          </a:p>
-          <a:p>
-            <a:r>
-              <a:rPr lang="en-US" sz="1400" dirty="0"/>
-              <a:t>But only false alarms moved; detection and lead time held. A broad composition shift would potentially move all three. The confound narrows, though a false-alarm-specific one can't be ruled out.</a:t>
-            </a:r>
-            <a:endParaRPr lang="en-US" sz="1400" i="1" dirty="0"/>
-          </a:p>
-        </p:txBody>
-      </p:sp>
-      <p:sp>
-        <p:nvSpPr>
-          <p:cNvPr id="4" name="Text 0">
-            <a:extLst>
-              <a:ext uri="{FF2B5EF4-FFF2-40B4-BE49-F238E27FC236}">
-                <a16:creationId xmlns:a16="http://schemas.microsoft.com/office/drawing/2014/main" id="{7BE02924-4DD2-A586-D602-844FEBB1BE68}"/>
-              </a:ext>
-            </a:extLst>
-          </p:cNvPr>
-          <p:cNvSpPr/>
-          <p:nvPr/>
-        </p:nvSpPr>
-        <p:spPr>
-          <a:xfrm>
-            <a:off x="457200" y="320040"/>
-            <a:ext cx="8229600" cy="502920"/>
-          </a:xfrm>
-          <a:prstGeom prst="rect">
-            <a:avLst/>
-          </a:prstGeom>
-          <a:noFill/>
-          <a:ln/>
-        </p:spPr>
-        <p:txBody>
-          <a:bodyPr wrap="square" lIns="0" tIns="0" rIns="0" bIns="0" rtlCol="0" anchor="ctr"/>
-          <a:lstStyle/>
-          <a:p>
-            <a:pPr marL="0" indent="0" algn="l">
-              <a:buNone/>
-            </a:pPr>
-            <a:r>
-              <a:rPr lang="en-US" sz="2600" b="1" dirty="0">
-                <a:solidFill>
-                  <a:srgbClr val="1F2937"/>
-                </a:solidFill>
-                <a:latin typeface="Cambria" pitchFamily="34" charset="0"/>
-                <a:ea typeface="Cambria" pitchFamily="34" charset="-122"/>
-                <a:cs typeface="Cambria" pitchFamily="34" charset="-120"/>
-              </a:rPr>
-              <a:t>Were SV false alarms a composition shift, not a behavior change?</a:t>
-            </a:r>
-          </a:p>
-        </p:txBody>
-      </p:sp>
-      <p:pic>
-        <p:nvPicPr>
-          <p:cNvPr id="7" name="Picture 6">
-            <a:extLst>
-              <a:ext uri="{FF2B5EF4-FFF2-40B4-BE49-F238E27FC236}">
-                <a16:creationId xmlns:a16="http://schemas.microsoft.com/office/drawing/2014/main" id="{755C075E-44D2-FBDA-AF9D-7FC89CEAEC7F}"/>
-              </a:ext>
-            </a:extLst>
-          </p:cNvPr>
-          <p:cNvPicPr>
-            <a:picLocks noChangeAspect="1"/>
-          </p:cNvPicPr>
-          <p:nvPr/>
-        </p:nvPicPr>
-        <p:blipFill>
-          <a:blip r:embed="rId3"/>
-          <a:srcRect/>
-          <a:stretch/>
-        </p:blipFill>
-        <p:spPr>
-          <a:xfrm>
-            <a:off x="3377900" y="971550"/>
-            <a:ext cx="5609841" cy="2968115"/>
-          </a:xfrm>
-          <a:prstGeom prst="rect">
-            <a:avLst/>
-          </a:prstGeom>
-        </p:spPr>
-      </p:pic>
-      <p:sp>
-        <p:nvSpPr>
-          <p:cNvPr id="9" name="TextBox 8">
-            <a:extLst>
-              <a:ext uri="{FF2B5EF4-FFF2-40B4-BE49-F238E27FC236}">
-                <a16:creationId xmlns:a16="http://schemas.microsoft.com/office/drawing/2014/main" id="{A6E5184F-2DE8-3CDD-A258-D325393B7F16}"/>
-              </a:ext>
-            </a:extLst>
-          </p:cNvPr>
-          <p:cNvSpPr txBox="1"/>
-          <p:nvPr/>
-        </p:nvSpPr>
-        <p:spPr>
-          <a:xfrm>
-            <a:off x="3517751" y="4047881"/>
-            <a:ext cx="4679578" cy="430887"/>
-          </a:xfrm>
-          <a:prstGeom prst="rect">
-            <a:avLst/>
-          </a:prstGeom>
-          <a:noFill/>
-        </p:spPr>
-        <p:txBody>
-          <a:bodyPr wrap="square">
-            <a:spAutoFit/>
-          </a:bodyPr>
-          <a:lstStyle/>
-          <a:p>
-            <a:r>
-              <a:rPr lang="en-US" sz="1100" i="1" dirty="0"/>
-              <a:t>Year-10 severe-storm reports drew from a different regional mix than baseline (red = larger 2025 share).</a:t>
-            </a:r>
-          </a:p>
-        </p:txBody>
-      </p:sp>
-      <p:sp>
-        <p:nvSpPr>
-          <p:cNvPr id="2" name="Slide Number Placeholder 1">
-            <a:extLst>
-              <a:ext uri="{FF2B5EF4-FFF2-40B4-BE49-F238E27FC236}">
-                <a16:creationId xmlns:a16="http://schemas.microsoft.com/office/drawing/2014/main" id="{D472872B-3F9D-B0BA-0A0E-DC3484F6C2C2}"/>
-              </a:ext>
-            </a:extLst>
-          </p:cNvPr>
-          <p:cNvSpPr>
-            <a:spLocks noGrp="1"/>
-          </p:cNvSpPr>
-          <p:nvPr>
-            <p:ph type="sldNum" sz="quarter" idx="12"/>
-          </p:nvPr>
-        </p:nvSpPr>
-        <p:spPr/>
-        <p:txBody>
-          <a:bodyPr/>
-          <a:lstStyle/>
-          <a:p>
-            <a:fld id="{59854499-FE6F-F146-B363-A2BB07F446CC}" type="slidenum">
-              <a:rPr lang="en-US" smtClean="0"/>
-              <a:t>15</a:t>
-            </a:fld>
-            <a:endParaRPr lang="en-US"/>
-          </a:p>
-        </p:txBody>
-      </p:sp>
-    </p:spTree>
-    <p:extLst>
-      <p:ext uri="{BB962C8B-B14F-4D97-AF65-F5344CB8AC3E}">
-        <p14:creationId xmlns:p14="http://schemas.microsoft.com/office/powerpoint/2010/main" val="3192894350"/>
-      </p:ext>
-    </p:extLst>
   </p:cSld>
   <p:clrMapOvr>
     <a:masterClrMapping/>
@@ -6409,7 +6005,7 @@
         <p:spPr>
           <a:xfrm>
             <a:off x="457199" y="1051560"/>
-            <a:ext cx="3645674" cy="2246769"/>
+            <a:ext cx="3645674" cy="2390398"/>
           </a:xfrm>
           <a:prstGeom prst="rect">
             <a:avLst/>
@@ -6423,20 +6019,21 @@
           <a:lstStyle/>
           <a:p>
             <a:r>
+              <a:rPr lang="en-US" sz="1400" dirty="0"/>
+              <a:t>Staffing reductions at NWS began February 27, 2025.</a:t>
+            </a:r>
+            <a:r>
+              <a:rPr lang="en-US" sz="1400" baseline="30000" dirty="0"/>
+              <a:t>1 </a:t>
+            </a:r>
+          </a:p>
+          <a:p>
+            <a:endParaRPr lang="en-US" sz="1400" b="1" baseline="30000" dirty="0"/>
+          </a:p>
+          <a:p>
+            <a:pPr algn="ctr"/>
+            <a:r>
               <a:rPr lang="en-US" sz="1400" b="1" dirty="0"/>
-              <a:t>Staffing reductions at NWS began in February 2025.</a:t>
-            </a:r>
-            <a:r>
-              <a:rPr lang="en-US" sz="1400" b="1" baseline="30000" dirty="0"/>
-              <a:t>1</a:t>
-            </a:r>
-          </a:p>
-          <a:p>
-            <a:endParaRPr lang="en-US" sz="1400" b="1" dirty="0"/>
-          </a:p>
-          <a:p>
-            <a:r>
-              <a:rPr lang="en-US" sz="1400" dirty="0"/>
               <a:t>Did warning performance change afterward?</a:t>
             </a:r>
           </a:p>
@@ -6572,6 +6169,50 @@
                 <a:ea typeface="Calibri" pitchFamily="34" charset="-122"/>
                 <a:cs typeface="Calibri" pitchFamily="34" charset="-120"/>
               </a:rPr>
+              <a:t>Data</a:t>
+            </a:r>
+            <a:r>
+              <a:rPr lang="en-US" sz="1400" baseline="30000" dirty="0">
+                <a:ea typeface="Calibri" pitchFamily="34" charset="-122"/>
+                <a:cs typeface="Calibri" pitchFamily="34" charset="-120"/>
+              </a:rPr>
+              <a:t>2</a:t>
+            </a:r>
+          </a:p>
+          <a:p>
+            <a:pPr marL="460375" lvl="1" indent="-168275">
+              <a:buFont typeface="System Font Regular"/>
+              <a:buChar char="-"/>
+            </a:pPr>
+            <a:r>
+              <a:rPr lang="en-US" sz="1400" dirty="0">
+                <a:cs typeface="Calibri" pitchFamily="34" charset="-120"/>
+              </a:rPr>
+              <a:t>376,963 local storm reports (LSRs)</a:t>
+            </a:r>
+          </a:p>
+          <a:p>
+            <a:pPr marL="460375" lvl="1" indent="-168275">
+              <a:buFont typeface="System Font Regular"/>
+              <a:buChar char="-"/>
+            </a:pPr>
+            <a:r>
+              <a:rPr lang="en-US" sz="1400" dirty="0">
+                <a:cs typeface="Calibri" pitchFamily="34" charset="-120"/>
+              </a:rPr>
+              <a:t>260,537 warnings</a:t>
+            </a:r>
+          </a:p>
+          <a:p>
+            <a:pPr marL="285750" indent="-285750">
+              <a:buFont typeface="Arial" panose="020B0604020202020204" pitchFamily="34" charset="0"/>
+              <a:buChar char="•"/>
+            </a:pPr>
+            <a:r>
+              <a:rPr lang="en-US" sz="1400" dirty="0">
+                <a:ea typeface="Calibri" pitchFamily="34" charset="-122"/>
+                <a:cs typeface="Calibri" pitchFamily="34" charset="-120"/>
+              </a:rPr>
               <a:t>3 phenomena: </a:t>
             </a:r>
           </a:p>
@@ -6619,49 +6260,9 @@
               <a:buFont typeface="Arial" panose="020B0604020202020204" pitchFamily="34" charset="0"/>
               <a:buChar char="•"/>
             </a:pPr>
-            <a:r>
-              <a:rPr lang="en-US" sz="1400" dirty="0">
-                <a:ea typeface="Calibri" pitchFamily="34" charset="-122"/>
-                <a:cs typeface="Calibri" pitchFamily="34" charset="-120"/>
-              </a:rPr>
-              <a:t>3 metrics: </a:t>
-            </a:r>
-          </a:p>
-          <a:p>
-            <a:pPr marL="460375" lvl="1" indent="-168275">
-              <a:buFont typeface="System Font Regular"/>
-              <a:buChar char="-"/>
-            </a:pPr>
-            <a:r>
-              <a:rPr lang="en-US" sz="1400" dirty="0">
-                <a:cs typeface="Calibri" pitchFamily="34" charset="-120"/>
-              </a:rPr>
-              <a:t>Probability of Detection (POD)</a:t>
-            </a:r>
-          </a:p>
-          <a:p>
-            <a:pPr marL="460375" lvl="1" indent="-168275">
-              <a:buFont typeface="System Font Regular"/>
-              <a:buChar char="-"/>
-            </a:pPr>
-            <a:r>
-              <a:rPr lang="en-US" sz="1400" dirty="0">
-                <a:cs typeface="Calibri" pitchFamily="34" charset="-120"/>
-              </a:rPr>
-              <a:t>False Alarm Ratio (FAR)</a:t>
-            </a:r>
-          </a:p>
-          <a:p>
-            <a:pPr marL="460375" lvl="1" indent="-168275">
-              <a:buFont typeface="System Font Regular"/>
-              <a:buChar char="-"/>
-            </a:pPr>
-            <a:r>
-              <a:rPr lang="en-US" sz="1400" dirty="0">
-                <a:cs typeface="Calibri" pitchFamily="34" charset="-120"/>
-              </a:rPr>
-              <a:t>Lead Time Average (LTA)</a:t>
-            </a:r>
+            <a:endParaRPr lang="en-US" sz="1400" dirty="0">
+              <a:cs typeface="Calibri" pitchFamily="34" charset="-120"/>
+            </a:endParaRPr>
           </a:p>
         </p:txBody>
       </p:sp>
@@ -6679,8 +6280,8 @@
         </p:nvSpPr>
         <p:spPr>
           <a:xfrm>
-            <a:off x="457200" y="4483811"/>
-            <a:ext cx="8229600" cy="339649"/>
+            <a:off x="457199" y="4191197"/>
+            <a:ext cx="8229600" cy="576066"/>
           </a:xfrm>
           <a:prstGeom prst="rect">
             <a:avLst/>
@@ -6693,10 +6294,12 @@
           </a:bodyPr>
           <a:lstStyle/>
           <a:p>
-            <a:pPr marL="115888" indent="-115888"/>
+            <a:pPr marL="228600" indent="-228600">
+              <a:buAutoNum type="arabicPeriod"/>
+            </a:pPr>
             <a:r>
               <a:rPr lang="en-US" sz="800" dirty="0"/>
-              <a:t>1.	Dance, S. (2025, February 27). </a:t>
+              <a:t>Dance, S. (2025, February 27). </a:t>
             </a:r>
             <a:r>
               <a:rPr lang="en-US" sz="800" i="1" dirty="0"/>
@@ -6710,48 +6313,34 @@
               <a:rPr lang="en-US" sz="800" dirty="0">
                 <a:hlinkClick r:id="rId3"/>
               </a:rPr>
-              <a:t>https://</a:t>
-            </a:r>
-            <a:r>
-              <a:rPr lang="en-US" sz="800" dirty="0" err="1">
-                <a:hlinkClick r:id="rId3"/>
+              <a:t>https://www.washingtonpost.com/climate-environment/2025/02/27/noaa-nws-mass-firings-trump-administration/</a:t>
+            </a:r>
+            <a:endParaRPr lang="en-US" sz="800" dirty="0"/>
+          </a:p>
+          <a:p>
+            <a:pPr marL="228600" indent="-228600">
+              <a:buFontTx/>
+              <a:buAutoNum type="arabicPeriod"/>
+            </a:pPr>
+            <a:r>
+              <a:rPr lang="en-US" sz="800" i="1" dirty="0"/>
+              <a:t>Iowa Environmental Mesonet Cow (NWS Storm Based Warning Verification), Iowa State University. </a:t>
+            </a:r>
+            <a:r>
+              <a:rPr lang="en-US" sz="800" i="1" dirty="0">
+                <a:hlinkClick r:id="rId4"/>
               </a:rPr>
-              <a:t>www.washingtonpost.com</a:t>
-            </a:r>
-            <a:r>
-              <a:rPr lang="en-US" sz="800" dirty="0">
-                <a:hlinkClick r:id="rId3"/>
-              </a:rPr>
-              <a:t>/climate-environment/2025/02/27/</a:t>
-            </a:r>
-            <a:r>
-              <a:rPr lang="en-US" sz="800" dirty="0" err="1">
-                <a:hlinkClick r:id="rId3"/>
-              </a:rPr>
-              <a:t>noaa</a:t>
-            </a:r>
-            <a:r>
-              <a:rPr lang="en-US" sz="800" dirty="0">
-                <a:hlinkClick r:id="rId3"/>
-              </a:rPr>
-              <a:t>-</a:t>
-            </a:r>
-            <a:r>
-              <a:rPr lang="en-US" sz="800" dirty="0" err="1">
-                <a:hlinkClick r:id="rId3"/>
-              </a:rPr>
-              <a:t>nws</a:t>
-            </a:r>
-            <a:r>
-              <a:rPr lang="en-US" sz="800" dirty="0">
-                <a:hlinkClick r:id="rId3"/>
-              </a:rPr>
-              <a:t>-mass-firings-trump-administration/</a:t>
-            </a:r>
+              <a:t>https://mesonet.agron.iastate.edu/cow/</a:t>
+            </a:r>
+            <a:endParaRPr lang="en-US" sz="800" i="1" dirty="0"/>
+          </a:p>
+          <a:p>
             <a:endParaRPr lang="en-US" sz="800" dirty="0"/>
           </a:p>
           <a:p>
-            <a:pPr marL="115888" indent="-115888"/>
+            <a:pPr marL="228600" indent="-228600">
+              <a:buAutoNum type="arabicPeriod"/>
+            </a:pPr>
             <a:endParaRPr lang="en-US" sz="800" dirty="0"/>
           </a:p>
         </p:txBody>
@@ -6852,6 +6441,17 @@
                 <a:cs typeface="Cambria" pitchFamily="34" charset="-120"/>
               </a:rPr>
               <a:t>How warning performance is measured</a:t>
+            </a:r>
+            <a:r>
+              <a:rPr lang="en-US" sz="2600" baseline="30000" dirty="0">
+                <a:solidFill>
+                  <a:srgbClr val="1F2937"/>
+                </a:solidFill>
+                <a:latin typeface="Cambria" pitchFamily="34" charset="0"/>
+                <a:ea typeface="Cambria" pitchFamily="34" charset="-122"/>
+                <a:cs typeface="Cambria" pitchFamily="34" charset="-120"/>
+              </a:rPr>
+              <a:t>1</a:t>
             </a:r>
           </a:p>
         </p:txBody>
@@ -7026,8 +6626,8 @@
         </p:nvSpPr>
         <p:spPr>
           <a:xfrm>
-            <a:off x="457200" y="4238956"/>
-            <a:ext cx="2468881" cy="600164"/>
+            <a:off x="353832" y="4259263"/>
+            <a:ext cx="7824972" cy="261610"/>
           </a:xfrm>
           <a:prstGeom prst="rect">
             <a:avLst/>
@@ -7040,9 +6640,10 @@
           </a:bodyPr>
           <a:lstStyle/>
           <a:p>
+            <a:pPr algn="ctr"/>
             <a:r>
               <a:rPr lang="en-US" sz="1100" i="1" dirty="0"/>
-              <a:t>Storm reports without warnings are </a:t>
+              <a:t>Reports without warnings are </a:t>
             </a:r>
             <a:r>
               <a:rPr lang="en-US" sz="1100" b="1" i="1" dirty="0">
@@ -7054,7 +6655,7 @@
             </a:r>
             <a:r>
               <a:rPr lang="en-US" sz="1100" i="1" dirty="0"/>
-              <a:t>warnings without storm reports are </a:t>
+              <a:t>warnings without reports are </a:t>
             </a:r>
             <a:r>
               <a:rPr lang="en-US" sz="1100" b="1" i="1" dirty="0">
@@ -7069,10 +6670,39 @@
       </p:sp>
       <p:sp>
         <p:nvSpPr>
-          <p:cNvPr id="21" name="TextBox 20">
-            <a:extLst>
-              <a:ext uri="{FF2B5EF4-FFF2-40B4-BE49-F238E27FC236}">
-                <a16:creationId xmlns:a16="http://schemas.microsoft.com/office/drawing/2014/main" id="{E6C62BEF-B623-F8FF-FF54-AF2F89EC210C}"/>
+          <p:cNvPr id="4" name="Slide Number Placeholder 3">
+            <a:extLst>
+              <a:ext uri="{FF2B5EF4-FFF2-40B4-BE49-F238E27FC236}">
+                <a16:creationId xmlns:a16="http://schemas.microsoft.com/office/drawing/2014/main" id="{04781C7C-4C65-CFD8-4B78-B8128263A2C5}"/>
+              </a:ext>
+            </a:extLst>
+          </p:cNvPr>
+          <p:cNvSpPr>
+            <a:spLocks noGrp="1"/>
+          </p:cNvSpPr>
+          <p:nvPr>
+            <p:ph type="sldNum" sz="quarter" idx="12"/>
+          </p:nvPr>
+        </p:nvSpPr>
+        <p:spPr/>
+        <p:txBody>
+          <a:bodyPr/>
+          <a:lstStyle/>
+          <a:p>
+            <a:fld id="{59854499-FE6F-F146-B363-A2BB07F446CC}" type="slidenum">
+              <a:rPr lang="en-US" smtClean="0"/>
+              <a:t>3</a:t>
+            </a:fld>
+            <a:endParaRPr lang="en-US"/>
+          </a:p>
+        </p:txBody>
+      </p:sp>
+      <p:sp>
+        <p:nvSpPr>
+          <p:cNvPr id="5" name="TextBox 4">
+            <a:extLst>
+              <a:ext uri="{FF2B5EF4-FFF2-40B4-BE49-F238E27FC236}">
+                <a16:creationId xmlns:a16="http://schemas.microsoft.com/office/drawing/2014/main" id="{337FCFD6-FC4C-146E-2748-4CB81A58A8B8}"/>
               </a:ext>
             </a:extLst>
           </p:cNvPr>
@@ -7081,8 +6711,8 @@
         </p:nvSpPr>
         <p:spPr>
           <a:xfrm>
-            <a:off x="3034310" y="4238956"/>
-            <a:ext cx="5144494" cy="430887"/>
+            <a:off x="443919" y="4620003"/>
+            <a:ext cx="8071431" cy="274636"/>
           </a:xfrm>
           <a:prstGeom prst="rect">
             <a:avLst/>
@@ -7090,67 +6720,35 @@
           <a:noFill/>
         </p:spPr>
         <p:txBody>
-          <a:bodyPr wrap="square">
-            <a:spAutoFit/>
+          <a:bodyPr wrap="square" rtlCol="0">
+            <a:noAutofit/>
           </a:bodyPr>
           <a:lstStyle/>
           <a:p>
-            <a:r>
-              <a:rPr lang="en-US" sz="1100" b="1" i="1" dirty="0"/>
-              <a:t>Data: </a:t>
-            </a:r>
-            <a:r>
-              <a:rPr lang="en-US" sz="1100" i="1" dirty="0"/>
-              <a:t>Iowa Environmental Mesonet Cow (NWS Storm Based Warning Verification), Iowa State University. </a:t>
-            </a:r>
-            <a:r>
-              <a:rPr lang="en-US" sz="1100" i="1" dirty="0">
+            <a:pPr marL="117475" indent="-117475">
+              <a:tabLst>
+                <a:tab pos="104775" algn="l"/>
+              </a:tabLst>
+            </a:pPr>
+            <a:r>
+              <a:rPr lang="en-US" sz="800" dirty="0"/>
+              <a:t>1. 	Brooks, H. E., &amp; Correia, J., Jr. (2018). Long-term performance metrics for National Weather Service tornado warnings. </a:t>
+            </a:r>
+            <a:r>
+              <a:rPr lang="en-US" sz="800" i="1" dirty="0"/>
+              <a:t>Weather and Forecasting, 33</a:t>
+            </a:r>
+            <a:r>
+              <a:rPr lang="en-US" sz="800" dirty="0"/>
+              <a:t>(6), 1601–1614. </a:t>
+            </a:r>
+            <a:r>
+              <a:rPr lang="en-US" sz="800" dirty="0">
                 <a:hlinkClick r:id="rId4"/>
               </a:rPr>
-              <a:t>https://</a:t>
-            </a:r>
-            <a:r>
-              <a:rPr lang="en-US" sz="1100" i="1" dirty="0" err="1">
-                <a:hlinkClick r:id="rId4"/>
-              </a:rPr>
-              <a:t>mesonet.agron.iastate.edu</a:t>
-            </a:r>
-            <a:r>
-              <a:rPr lang="en-US" sz="1100" i="1" dirty="0">
-                <a:hlinkClick r:id="rId4"/>
-              </a:rPr>
-              <a:t>/cow/</a:t>
-            </a:r>
-            <a:endParaRPr lang="en-US" sz="1100" i="1" dirty="0"/>
-          </a:p>
-        </p:txBody>
-      </p:sp>
-      <p:sp>
-        <p:nvSpPr>
-          <p:cNvPr id="4" name="Slide Number Placeholder 3">
-            <a:extLst>
-              <a:ext uri="{FF2B5EF4-FFF2-40B4-BE49-F238E27FC236}">
-                <a16:creationId xmlns:a16="http://schemas.microsoft.com/office/drawing/2014/main" id="{04781C7C-4C65-CFD8-4B78-B8128263A2C5}"/>
-              </a:ext>
-            </a:extLst>
-          </p:cNvPr>
-          <p:cNvSpPr>
-            <a:spLocks noGrp="1"/>
-          </p:cNvSpPr>
-          <p:nvPr>
-            <p:ph type="sldNum" sz="quarter" idx="12"/>
-          </p:nvPr>
-        </p:nvSpPr>
-        <p:spPr/>
-        <p:txBody>
-          <a:bodyPr/>
-          <a:lstStyle/>
-          <a:p>
-            <a:fld id="{59854499-FE6F-F146-B363-A2BB07F446CC}" type="slidenum">
-              <a:rPr lang="en-US" smtClean="0"/>
-              <a:t>3</a:t>
-            </a:fld>
-            <a:endParaRPr lang="en-US"/>
+              <a:t>https://doi.org/10.1175/WAF-D-18-0120.1</a:t>
+            </a:r>
+            <a:endParaRPr lang="en-US" sz="800" dirty="0"/>
           </a:p>
         </p:txBody>
       </p:sp>
@@ -8099,10 +7697,10 @@
         </p:nvGrpSpPr>
         <p:grpSpPr>
           <a:xfrm>
-            <a:off x="410074" y="1017781"/>
-            <a:ext cx="1435372" cy="2825349"/>
-            <a:chOff x="410074" y="1017781"/>
-            <a:chExt cx="1435372" cy="2825349"/>
+            <a:off x="457200" y="1006050"/>
+            <a:ext cx="1388246" cy="2940308"/>
+            <a:chOff x="410074" y="822961"/>
+            <a:chExt cx="1388246" cy="2940309"/>
           </a:xfrm>
         </p:grpSpPr>
         <p:sp>
@@ -8119,8 +7717,8 @@
           </p:nvSpPr>
           <p:spPr>
             <a:xfrm>
-              <a:off x="410074" y="1017781"/>
-              <a:ext cx="1388246" cy="2825349"/>
+              <a:off x="410074" y="822961"/>
+              <a:ext cx="1388246" cy="2940309"/>
             </a:xfrm>
             <a:prstGeom prst="roundRect">
               <a:avLst>
@@ -8159,8 +7757,8 @@
           </p:nvSpPr>
           <p:spPr>
             <a:xfrm>
-              <a:off x="457200" y="1056025"/>
-              <a:ext cx="1388246" cy="738664"/>
+              <a:off x="457200" y="882770"/>
+              <a:ext cx="1341120" cy="738664"/>
             </a:xfrm>
             <a:prstGeom prst="rect">
               <a:avLst/>
@@ -8240,7 +7838,7 @@
           <a:p>
             <a:r>
               <a:rPr lang="en-US" sz="1100" i="1" dirty="0"/>
-              <a:t>Each type has a distinct seasonal signature. The shaded bands mark four engineered seasons; note they break on the 27th of February, May, August, and November (anchored to the treatment anniversary), not on the 1st, so the boundaries sit slightly past each month tick and Winter wraps both ends of the year.</a:t>
+              <a:t>Each type has a distinct seasonal signature. The shaded bands mark four engineered seasons; note they break on the 27th of February, May, August, and November (anchored to the treatment anniversary), not on the canonical calendar dates</a:t>
             </a:r>
             <a:endParaRPr lang="en-US" sz="1100" dirty="0"/>
           </a:p>
@@ -8366,7 +7964,7 @@
         <p:grpSpPr>
           <a:xfrm>
             <a:off x="449871" y="1811805"/>
-            <a:ext cx="3114964" cy="2640755"/>
+            <a:ext cx="3026385" cy="3011655"/>
             <a:chOff x="449871" y="1811805"/>
             <a:chExt cx="3114964" cy="2640755"/>
           </a:xfrm>
@@ -8441,37 +8039,7 @@
             <a:p>
               <a:r>
                 <a:rPr lang="en-US" sz="1400" dirty="0"/>
-                <a:t>For each phenomenon:</a:t>
-              </a:r>
-            </a:p>
-            <a:p>
-              <a:pPr marL="285750" indent="-285750">
-                <a:buFont typeface="Arial" panose="020B0604020202020204" pitchFamily="34" charset="0"/>
-                <a:buChar char="•"/>
-              </a:pPr>
-              <a:r>
-                <a:rPr lang="en-US" sz="1400" dirty="0"/>
-                <a:t>A logistic regression for POD</a:t>
-              </a:r>
-            </a:p>
-            <a:p>
-              <a:pPr marL="285750" indent="-285750">
-                <a:buFont typeface="Arial" panose="020B0604020202020204" pitchFamily="34" charset="0"/>
-                <a:buChar char="•"/>
-              </a:pPr>
-              <a:r>
-                <a:rPr lang="en-US" sz="1400" dirty="0"/>
-                <a:t>A logistic regression for FAR</a:t>
-              </a:r>
-            </a:p>
-            <a:p>
-              <a:pPr marL="285750" indent="-285750">
-                <a:buFont typeface="Arial" panose="020B0604020202020204" pitchFamily="34" charset="0"/>
-                <a:buChar char="•"/>
-              </a:pPr>
-              <a:r>
-                <a:rPr lang="en-US" sz="1400" dirty="0"/>
-                <a:t>A linear regression for LTA</a:t>
+                <a:t>After accounting for normal seasonal swings and the baseline year-to-year trend, did year 10 land off that expected line, and by how much?</a:t>
               </a:r>
             </a:p>
             <a:p>
@@ -9823,7 +9391,7 @@
         </p:nvSpPr>
         <p:spPr>
           <a:xfrm>
-            <a:off x="3619307" y="4450945"/>
+            <a:off x="3619307" y="4499070"/>
             <a:ext cx="5182829" cy="261610"/>
           </a:xfrm>
           <a:prstGeom prst="rect">
@@ -9920,8 +9488,8 @@
         </p:nvSpPr>
         <p:spPr>
           <a:xfrm>
-            <a:off x="457200" y="971550"/>
-            <a:ext cx="2949212" cy="3194044"/>
+            <a:off x="457200" y="971549"/>
+            <a:ext cx="2949212" cy="3795713"/>
           </a:xfrm>
           <a:prstGeom prst="roundRect">
             <a:avLst>
@@ -9994,7 +9562,7 @@
         <p:spPr>
           <a:xfrm>
             <a:off x="503885" y="977906"/>
-            <a:ext cx="2855843" cy="3108543"/>
+            <a:ext cx="2855843" cy="3539430"/>
           </a:xfrm>
           <a:prstGeom prst="rect">
             <a:avLst/>
@@ -10052,11 +9620,21 @@
             </a:r>
             <a:r>
               <a:rPr lang="en-US" sz="1400" dirty="0"/>
-              <a:t>ank the p-values from each and accept each one whose value falls below its rank’s proportional share of the false-discovery budget (i.e. </a:t>
+              <a:t>ank the p-values from each and accept each one whose value falls below its rank’s proportional share of the false-discovery budget</a:t>
+            </a:r>
+          </a:p>
+          <a:p>
+            <a:r>
+              <a:rPr lang="en-US" sz="1400" dirty="0"/>
+              <a:t>(i.e. </a:t>
+            </a:r>
+            <a:r>
+              <a:rPr lang="el-GR" sz="1400" i="1" dirty="0"/>
+              <a:t>α</a:t>
             </a:r>
             <a:r>
               <a:rPr lang="el-GR" sz="1400" dirty="0"/>
-              <a:t>α </a:t>
+              <a:t> </a:t>
             </a:r>
             <a:r>
               <a:rPr lang="en-US" sz="1400" dirty="0"/>
@@ -10112,8 +9690,8 @@
         </p:nvSpPr>
         <p:spPr>
           <a:xfrm>
-            <a:off x="3810000" y="4320540"/>
-            <a:ext cx="4876800" cy="600164"/>
+            <a:off x="3810000" y="4392573"/>
+            <a:ext cx="4876800" cy="430887"/>
           </a:xfrm>
           <a:prstGeom prst="rect">
             <a:avLst/>
@@ -10128,7 +9706,7 @@
           <a:p>
             <a:r>
               <a:rPr lang="en-US" sz="1100" i="1" dirty="0"/>
-              <a:t>Only severe-storm FAR sits clearly right of its placebo cloud and the ±1.96 band; the other eight fall inside their grey spreads. Axis is the signed Wald statistic: sign is coefficient direction, not performance.</a:t>
+              <a:t>Only severe-storm FAR sits clearly right of its placebo cloud and the ±1.96 band; the other eight fall inside their grey placebo spreads.</a:t>
             </a:r>
           </a:p>
         </p:txBody>
